--- a/presentacion/nexus_tecnico_v2.pptx
+++ b/presentacion/nexus_tecnico_v2.pptx
@@ -18,7 +18,7 @@
     <p:sldId id="263" r:id="rId9"/>
     <p:sldId id="264" r:id="rId10"/>
     <p:sldId id="265" r:id="rId11"/>
-    <p:sldId id="266" r:id="rId12"/>
+    <p:sldId id="271" r:id="rId12"/>
     <p:sldId id="267" r:id="rId13"/>
     <p:sldId id="268" r:id="rId14"/>
     <p:sldId id="269" r:id="rId15"/>
@@ -151,7 +151,7 @@
     </p:spTree>
     <p:extLst>
       <p:ext uri="{BB962C8B-B14F-4D97-AF65-F5344CB8AC3E}">
-        <p14:creationId xmlns:p14="http://schemas.microsoft.com/office/powerpoint/2010/main" val="1227558122"/>
+        <p14:creationId xmlns:p14="http://schemas.microsoft.com/office/powerpoint/2010/main" val="850320844"/>
       </p:ext>
     </p:extLst>
   </p:cSld>
@@ -645,7 +645,7 @@
           <a:p>
             <a:r>
               <a:rPr lang="en-US" dirty="0"/>
-              <a:t>Justificar con fundamento técnico Y con la literatura. Dacrema et al. es una referencia fundamental que dice exactamente esto: los métodos clásicos bien optimizados superan al DL en datasets sparse. Mult-VAE es el challenger más serio pero no supera al ensemble. RP3beta + EASE^R son el par ideal por su complementariedad (ρ=0.216).</a:t>
+              <a:t>CORRECCIÓN CLAVE: el protagonista es el ENSEMBLE, no RP3beta. RP3beta individual llega a 0.0286. El ensemble llega a 0.0431 (+50.8%). La diferencia la hace la COMPLEMENTARIEDAD con EASE^R (ρ=0.216). Ningún modelo individual alcanza ese resultado.</a:t>
             </a:r>
           </a:p>
         </p:txBody>
@@ -819,7 +819,7 @@
           <a:p>
             <a:r>
               <a:rPr lang="en-US" dirty="0"/>
-              <a:t>CIERRE — Disponibles para profundizar en cualquier aspecto: protocolo de evaluación, hiperparámetros, por qué NMF falla, análisis de sensibilidad, arquitectura de producción.</a:t>
+              <a:t>CIERRE — La narrativa correcta: el ensemble ES el modelo ganador. No RP3beta. El ensemble combina 3 componentes con señales complementarias (ρ=0.216 entre EASE^R y RP3) y alcanza 0.0431 vs 0.0286 individual. Ese es el logro central del proyecto.</a:t>
             </a:r>
           </a:p>
         </p:txBody>
@@ -1918,7 +1918,7 @@
         </p:nvSpPr>
         <p:spPr>
           <a:xfrm>
-            <a:off x="2202512" y="-164592"/>
+            <a:off x="-1828800" y="-914400"/>
             <a:ext cx="5486400" cy="5486400"/>
           </a:xfrm>
           <a:prstGeom prst="ellipse">
@@ -4186,7 +4186,7 @@
 
 <file path=ppt/slides/slide11.xml><?xml version="1.0" encoding="utf-8"?>
 <p:sld xmlns:a="http://schemas.openxmlformats.org/drawingml/2006/main" xmlns:r="http://schemas.openxmlformats.org/officeDocument/2006/relationships" xmlns:p="http://schemas.openxmlformats.org/presentationml/2006/main">
-  <p:cSld name="Slide 11">
+  <p:cSld>
     <p:spTree>
       <p:nvGrpSpPr>
         <p:cNvPr id="1" name=""/>
@@ -6615,7 +6615,7 @@
         </p:nvSpPr>
         <p:spPr>
           <a:xfrm>
-            <a:off x="3383280" y="4855464"/>
+            <a:off x="3295820" y="4855464"/>
             <a:ext cx="201168" cy="292608"/>
           </a:xfrm>
           <a:prstGeom prst="rect">
@@ -9912,7 +9912,7 @@
                 <a:ea typeface="Calibri" pitchFamily="34" charset="-122"/>
                 <a:cs typeface="Calibri" pitchFamily="34" charset="-120"/>
               </a:rPr>
-              <a:t>¿Por qué RP3beta+EASE^R y no deep learning?</a:t>
+              <a:t>El ganador es el Ensemble — ningún modelo individual llega ahí solo</a:t>
             </a:r>
             <a:endParaRPr lang="en-US" sz="1200" dirty="0"/>
           </a:p>
@@ -9926,8 +9926,167 @@
         </p:nvSpPr>
         <p:spPr>
           <a:xfrm>
-            <a:off x="301752" y="1234440"/>
-            <a:ext cx="2788920" cy="2834640"/>
+            <a:off x="320040" y="1261872"/>
+            <a:ext cx="8503920" cy="841248"/>
+          </a:xfrm>
+          <a:prstGeom prst="rect">
+            <a:avLst/>
+          </a:prstGeom>
+          <a:solidFill>
+            <a:srgbClr val="002010"/>
+          </a:solidFill>
+          <a:ln w="12700">
+            <a:solidFill>
+              <a:srgbClr val="00E5A0"/>
+            </a:solidFill>
+            <a:prstDash val="solid"/>
+          </a:ln>
+          <a:effectLst>
+            <a:outerShdw blurRad="76200" dist="25400" dir="8100000" algn="bl" rotWithShape="0">
+              <a:srgbClr val="000000">
+                <a:alpha val="25000"/>
+              </a:srgbClr>
+            </a:outerShdw>
+          </a:effectLst>
+        </p:spPr>
+      </p:sp>
+      <p:sp>
+        <p:nvSpPr>
+          <p:cNvPr id="10" name="Shape 7"/>
+          <p:cNvSpPr/>
+          <p:nvPr/>
+        </p:nvSpPr>
+        <p:spPr>
+          <a:xfrm>
+            <a:off x="320040" y="1261872"/>
+            <a:ext cx="8503920" cy="64008"/>
+          </a:xfrm>
+          <a:prstGeom prst="rect">
+            <a:avLst/>
+          </a:prstGeom>
+          <a:solidFill>
+            <a:srgbClr val="00E5A0"/>
+          </a:solidFill>
+          <a:ln w="12700">
+            <a:solidFill>
+              <a:srgbClr val="00E5A0"/>
+            </a:solidFill>
+            <a:prstDash val="solid"/>
+          </a:ln>
+        </p:spPr>
+      </p:sp>
+      <p:pic>
+        <p:nvPicPr>
+          <p:cNvPr id="11" name="Image 1" descr="preencoded.png"/>
+          <p:cNvPicPr>
+            <a:picLocks noChangeAspect="1"/>
+          </p:cNvPicPr>
+          <p:nvPr/>
+        </p:nvPicPr>
+        <p:blipFill>
+          <a:blip r:embed="rId4"/>
+          <a:stretch>
+            <a:fillRect/>
+          </a:stretch>
+        </p:blipFill>
+        <p:spPr>
+          <a:xfrm>
+            <a:off x="502920" y="1417320"/>
+            <a:ext cx="457200" cy="457200"/>
+          </a:xfrm>
+          <a:prstGeom prst="rect">
+            <a:avLst/>
+          </a:prstGeom>
+        </p:spPr>
+      </p:pic>
+      <p:sp>
+        <p:nvSpPr>
+          <p:cNvPr id="12" name="Text 8"/>
+          <p:cNvSpPr/>
+          <p:nvPr/>
+        </p:nvSpPr>
+        <p:spPr>
+          <a:xfrm>
+            <a:off x="1078992" y="1307592"/>
+            <a:ext cx="5486400" cy="320040"/>
+          </a:xfrm>
+          <a:prstGeom prst="rect">
+            <a:avLst/>
+          </a:prstGeom>
+          <a:noFill/>
+          <a:ln/>
+        </p:spPr>
+        <p:txBody>
+          <a:bodyPr wrap="square" lIns="0" tIns="0" rIns="0" bIns="0" rtlCol="0" anchor="ctr"/>
+          <a:lstStyle/>
+          <a:p>
+            <a:pPr marL="0" indent="0">
+              <a:buNone/>
+            </a:pPr>
+            <a:r>
+              <a:rPr lang="en-US" sz="1500" b="1" dirty="0">
+                <a:solidFill>
+                  <a:srgbClr val="00E5A0"/>
+                </a:solidFill>
+                <a:latin typeface="Calibri" pitchFamily="34" charset="0"/>
+                <a:ea typeface="Calibri" pitchFamily="34" charset="-122"/>
+                <a:cs typeface="Calibri" pitchFamily="34" charset="-120"/>
+              </a:rPr>
+              <a:t>GANADOR: Ensemble Optimizado (RP3+TD · EASE^R · RP3+MB+TD)</a:t>
+            </a:r>
+            <a:endParaRPr lang="en-US" sz="1500" dirty="0"/>
+          </a:p>
+        </p:txBody>
+      </p:sp>
+      <p:sp>
+        <p:nvSpPr>
+          <p:cNvPr id="13" name="Text 9"/>
+          <p:cNvSpPr/>
+          <p:nvPr/>
+        </p:nvSpPr>
+        <p:spPr>
+          <a:xfrm>
+            <a:off x="1078992" y="1664208"/>
+            <a:ext cx="7406640" cy="274320"/>
+          </a:xfrm>
+          <a:prstGeom prst="rect">
+            <a:avLst/>
+          </a:prstGeom>
+          <a:noFill/>
+          <a:ln/>
+        </p:spPr>
+        <p:txBody>
+          <a:bodyPr wrap="square" lIns="0" tIns="0" rIns="0" bIns="0" rtlCol="0" anchor="ctr"/>
+          <a:lstStyle/>
+          <a:p>
+            <a:pPr marL="0" indent="0">
+              <a:buNone/>
+            </a:pPr>
+            <a:r>
+              <a:rPr lang="en-US" sz="1200" dirty="0">
+                <a:solidFill>
+                  <a:srgbClr val="A8E6F8"/>
+                </a:solidFill>
+                <a:latin typeface="Calibri" pitchFamily="34" charset="0"/>
+                <a:ea typeface="Calibri" pitchFamily="34" charset="-122"/>
+                <a:cs typeface="Calibri" pitchFamily="34" charset="-120"/>
+              </a:rPr>
+              <a:t>NDCG@10 = 0.0431  ·  +50.8% vs baseline individual  ·  Pesos: 0.023 / 0.021 / 0.956</a:t>
+            </a:r>
+            <a:endParaRPr lang="en-US" sz="1200" dirty="0"/>
+          </a:p>
+        </p:txBody>
+      </p:sp>
+      <p:sp>
+        <p:nvSpPr>
+          <p:cNvPr id="14" name="Shape 10"/>
+          <p:cNvSpPr/>
+          <p:nvPr/>
+        </p:nvSpPr>
+        <p:spPr>
+          <a:xfrm>
+            <a:off x="301752" y="2240280"/>
+            <a:ext cx="2788920" cy="2103120"/>
           </a:xfrm>
           <a:prstGeom prst="rect">
             <a:avLst/>
@@ -9952,14 +10111,14 @@
       </p:sp>
       <p:sp>
         <p:nvSpPr>
-          <p:cNvPr id="10" name="Shape 7"/>
-          <p:cNvSpPr/>
-          <p:nvPr/>
-        </p:nvSpPr>
-        <p:spPr>
-          <a:xfrm>
-            <a:off x="301752" y="1234440"/>
-            <a:ext cx="2788920" cy="64008"/>
+          <p:cNvPr id="15" name="Shape 11"/>
+          <p:cNvSpPr/>
+          <p:nvPr/>
+        </p:nvSpPr>
+        <p:spPr>
+          <a:xfrm>
+            <a:off x="301752" y="2240280"/>
+            <a:ext cx="2788920" cy="54864"/>
           </a:xfrm>
           <a:prstGeom prst="rect">
             <a:avLst/>
@@ -9977,14 +10136,14 @@
       </p:sp>
       <p:sp>
         <p:nvSpPr>
-          <p:cNvPr id="11" name="Text 8"/>
-          <p:cNvSpPr/>
-          <p:nvPr/>
-        </p:nvSpPr>
-        <p:spPr>
-          <a:xfrm>
-            <a:off x="365760" y="1344168"/>
-            <a:ext cx="2660904" cy="347472"/>
+          <p:cNvPr id="16" name="Text 12"/>
+          <p:cNvSpPr/>
+          <p:nvPr/>
+        </p:nvSpPr>
+        <p:spPr>
+          <a:xfrm>
+            <a:off x="365760" y="2331720"/>
+            <a:ext cx="2660904" cy="320040"/>
           </a:xfrm>
           <a:prstGeom prst="rect">
             <a:avLst/>
@@ -10000,7 +10159,7 @@
               <a:buNone/>
             </a:pPr>
             <a:r>
-              <a:rPr lang="en-US" sz="1400" b="1" dirty="0">
+              <a:rPr lang="en-US" sz="1300" b="1" dirty="0">
                 <a:solidFill>
                   <a:srgbClr val="FFFFFF"/>
                 </a:solidFill>
@@ -10008,21 +10167,21 @@
                 <a:ea typeface="Calibri" pitchFamily="34" charset="-122"/>
                 <a:cs typeface="Calibri" pitchFamily="34" charset="-120"/>
               </a:rPr>
-              <a:t>RP3beta</a:t>
-            </a:r>
-            <a:endParaRPr lang="en-US" sz="1400" dirty="0"/>
-          </a:p>
-        </p:txBody>
-      </p:sp>
-      <p:sp>
-        <p:nvSpPr>
-          <p:cNvPr id="12" name="Text 9"/>
-          <p:cNvSpPr/>
-          <p:nvPr/>
-        </p:nvSpPr>
-        <p:spPr>
-          <a:xfrm>
-            <a:off x="365760" y="1709928"/>
+              <a:t>RP3+MB+TD</a:t>
+            </a:r>
+            <a:endParaRPr lang="en-US" sz="1300" dirty="0"/>
+          </a:p>
+        </p:txBody>
+      </p:sp>
+      <p:sp>
+        <p:nvSpPr>
+          <p:cNvPr id="17" name="Text 13"/>
+          <p:cNvSpPr/>
+          <p:nvPr/>
+        </p:nvSpPr>
+        <p:spPr>
+          <a:xfrm>
+            <a:off x="365760" y="2651760"/>
             <a:ext cx="2660904" cy="256032"/>
           </a:xfrm>
           <a:prstGeom prst="rect">
@@ -10039,7 +10198,7 @@
               <a:buNone/>
             </a:pPr>
             <a:r>
-              <a:rPr lang="en-US" sz="1000" i="1" dirty="0">
+              <a:rPr lang="en-US" sz="900" i="1" dirty="0">
                 <a:solidFill>
                   <a:srgbClr val="FF8C00"/>
                 </a:solidFill>
@@ -10047,22 +10206,47 @@
                 <a:ea typeface="Calibri" pitchFamily="34" charset="-122"/>
                 <a:cs typeface="Calibri" pitchFamily="34" charset="-120"/>
               </a:rPr>
-              <a:t>Random Walk CF</a:t>
-            </a:r>
-            <a:endParaRPr lang="en-US" sz="1000" dirty="0"/>
-          </a:p>
-        </p:txBody>
-      </p:sp>
-      <p:sp>
-        <p:nvSpPr>
-          <p:cNvPr id="13" name="Text 10"/>
-          <p:cNvSpPr/>
-          <p:nvPr/>
-        </p:nvSpPr>
-        <p:spPr>
-          <a:xfrm>
-            <a:off x="365760" y="1993392"/>
-            <a:ext cx="2660904" cy="320040"/>
+              <a:t>Componente dominante · peso 0.956</a:t>
+            </a:r>
+            <a:endParaRPr lang="en-US" sz="900" dirty="0"/>
+          </a:p>
+        </p:txBody>
+      </p:sp>
+      <p:sp>
+        <p:nvSpPr>
+          <p:cNvPr id="18" name="Shape 14"/>
+          <p:cNvSpPr/>
+          <p:nvPr/>
+        </p:nvSpPr>
+        <p:spPr>
+          <a:xfrm>
+            <a:off x="466344" y="2944368"/>
+            <a:ext cx="2459736" cy="256032"/>
+          </a:xfrm>
+          <a:prstGeom prst="rect">
+            <a:avLst/>
+          </a:prstGeom>
+          <a:solidFill>
+            <a:srgbClr val="1A3A6A"/>
+          </a:solidFill>
+          <a:ln w="12700">
+            <a:solidFill>
+              <a:srgbClr val="060D1A"/>
+            </a:solidFill>
+            <a:prstDash val="solid"/>
+          </a:ln>
+        </p:spPr>
+      </p:sp>
+      <p:sp>
+        <p:nvSpPr>
+          <p:cNvPr id="19" name="Text 15"/>
+          <p:cNvSpPr/>
+          <p:nvPr/>
+        </p:nvSpPr>
+        <p:spPr>
+          <a:xfrm>
+            <a:off x="466344" y="2944368"/>
+            <a:ext cx="2459736" cy="256032"/>
           </a:xfrm>
           <a:prstGeom prst="rect">
             <a:avLst/>
@@ -10078,38 +10262,38 @@
               <a:buNone/>
             </a:pPr>
             <a:r>
-              <a:rPr lang="en-US" sz="1500" b="1" dirty="0">
-                <a:solidFill>
-                  <a:srgbClr val="FF8C00"/>
-                </a:solidFill>
-                <a:latin typeface="Calibri" pitchFamily="34" charset="0"/>
-                <a:ea typeface="Calibri" pitchFamily="34" charset="-122"/>
-                <a:cs typeface="Calibri" pitchFamily="34" charset="-120"/>
-              </a:rPr>
-              <a:t>NDCG@10: 0.0258</a:t>
-            </a:r>
-            <a:endParaRPr lang="en-US" sz="1500" dirty="0"/>
+              <a:rPr lang="en-US" sz="950" dirty="0">
+                <a:solidFill>
+                  <a:srgbClr val="FFFFFF"/>
+                </a:solidFill>
+                <a:latin typeface="Calibri" pitchFamily="34" charset="0"/>
+                <a:ea typeface="Calibri" pitchFamily="34" charset="-122"/>
+                <a:cs typeface="Calibri" pitchFamily="34" charset="-120"/>
+              </a:rPr>
+              <a:t>Individual: 0.0286  →  En ensemble: 95.6%</a:t>
+            </a:r>
+            <a:endParaRPr lang="en-US" sz="950" dirty="0"/>
           </a:p>
         </p:txBody>
       </p:sp>
       <p:pic>
         <p:nvPicPr>
-          <p:cNvPr id="14" name="Image 1" descr="preencoded.png"/>
+          <p:cNvPr id="20" name="Image 2" descr="preencoded.png"/>
           <p:cNvPicPr>
             <a:picLocks noChangeAspect="1"/>
           </p:cNvPicPr>
           <p:nvPr/>
         </p:nvPicPr>
         <p:blipFill>
-          <a:blip r:embed="rId4"/>
+          <a:blip r:embed="rId5"/>
           <a:stretch>
             <a:fillRect/>
           </a:stretch>
         </p:blipFill>
         <p:spPr>
           <a:xfrm>
-            <a:off x="411480" y="2395728"/>
-            <a:ext cx="201168" cy="201168"/>
+            <a:off x="411480" y="3291840"/>
+            <a:ext cx="182880" cy="182880"/>
           </a:xfrm>
           <a:prstGeom prst="rect">
             <a:avLst/>
@@ -10118,30 +10302,30 @@
       </p:pic>
       <p:sp>
         <p:nvSpPr>
-          <p:cNvPr id="15" name="Text 11"/>
-          <p:cNvSpPr/>
-          <p:nvPr/>
-        </p:nvSpPr>
-        <p:spPr>
-          <a:xfrm>
-            <a:off x="667512" y="2377440"/>
-            <a:ext cx="2331720" cy="347472"/>
-          </a:xfrm>
-          <a:prstGeom prst="rect">
-            <a:avLst/>
-          </a:prstGeom>
-          <a:noFill/>
-          <a:ln/>
-        </p:spPr>
-        <p:txBody>
-          <a:bodyPr wrap="square" lIns="0" tIns="0" rIns="0" bIns="0" rtlCol="0" anchor="ctr"/>
-          <a:lstStyle/>
-          <a:p>
-            <a:pPr marL="0" indent="0">
-              <a:buNone/>
-            </a:pPr>
-            <a:r>
-              <a:rPr lang="en-US" sz="1000" dirty="0">
+          <p:cNvPr id="21" name="Text 16"/>
+          <p:cNvSpPr/>
+          <p:nvPr/>
+        </p:nvSpPr>
+        <p:spPr>
+          <a:xfrm>
+            <a:off x="649224" y="3273552"/>
+            <a:ext cx="2350008" cy="292608"/>
+          </a:xfrm>
+          <a:prstGeom prst="rect">
+            <a:avLst/>
+          </a:prstGeom>
+          <a:noFill/>
+          <a:ln/>
+        </p:spPr>
+        <p:txBody>
+          <a:bodyPr wrap="square" lIns="0" tIns="0" rIns="0" bIns="0" rtlCol="0" anchor="ctr"/>
+          <a:lstStyle/>
+          <a:p>
+            <a:pPr marL="0" indent="0">
+              <a:buNone/>
+            </a:pPr>
+            <a:r>
+              <a:rPr lang="en-US" sz="950" dirty="0">
                 <a:solidFill>
                   <a:srgbClr val="B0C4D8"/>
                 </a:solidFill>
@@ -10149,30 +10333,30 @@
                 <a:ea typeface="Calibri" pitchFamily="34" charset="-122"/>
                 <a:cs typeface="Calibri" pitchFamily="34" charset="-120"/>
               </a:rPr>
-              <a:t>Resistente a sparsidad extrema</a:t>
-            </a:r>
-            <a:endParaRPr lang="en-US" sz="1000" dirty="0"/>
+              <a:t>Multi-evento: view + cart + transaction</a:t>
+            </a:r>
+            <a:endParaRPr lang="en-US" sz="950" dirty="0"/>
           </a:p>
         </p:txBody>
       </p:sp>
       <p:pic>
         <p:nvPicPr>
-          <p:cNvPr id="16" name="Image 2" descr="preencoded.png"/>
+          <p:cNvPr id="22" name="Image 3" descr="preencoded.png"/>
           <p:cNvPicPr>
             <a:picLocks noChangeAspect="1"/>
           </p:cNvPicPr>
           <p:nvPr/>
         </p:nvPicPr>
         <p:blipFill>
-          <a:blip r:embed="rId4"/>
+          <a:blip r:embed="rId5"/>
           <a:stretch>
             <a:fillRect/>
           </a:stretch>
         </p:blipFill>
         <p:spPr>
           <a:xfrm>
-            <a:off x="411480" y="2798064"/>
-            <a:ext cx="201168" cy="201168"/>
+            <a:off x="411480" y="3630168"/>
+            <a:ext cx="182880" cy="182880"/>
           </a:xfrm>
           <a:prstGeom prst="rect">
             <a:avLst/>
@@ -10181,30 +10365,30 @@
       </p:pic>
       <p:sp>
         <p:nvSpPr>
-          <p:cNvPr id="17" name="Text 12"/>
-          <p:cNvSpPr/>
-          <p:nvPr/>
-        </p:nvSpPr>
-        <p:spPr>
-          <a:xfrm>
-            <a:off x="667512" y="2779776"/>
-            <a:ext cx="2331720" cy="347472"/>
-          </a:xfrm>
-          <a:prstGeom prst="rect">
-            <a:avLst/>
-          </a:prstGeom>
-          <a:noFill/>
-          <a:ln/>
-        </p:spPr>
-        <p:txBody>
-          <a:bodyPr wrap="square" lIns="0" tIns="0" rIns="0" bIns="0" rtlCol="0" anchor="ctr"/>
-          <a:lstStyle/>
-          <a:p>
-            <a:pPr marL="0" indent="0">
-              <a:buNone/>
-            </a:pPr>
-            <a:r>
-              <a:rPr lang="en-US" sz="1000" dirty="0">
+          <p:cNvPr id="23" name="Text 17"/>
+          <p:cNvSpPr/>
+          <p:nvPr/>
+        </p:nvSpPr>
+        <p:spPr>
+          <a:xfrm>
+            <a:off x="649224" y="3611880"/>
+            <a:ext cx="2350008" cy="292608"/>
+          </a:xfrm>
+          <a:prstGeom prst="rect">
+            <a:avLst/>
+          </a:prstGeom>
+          <a:noFill/>
+          <a:ln/>
+        </p:spPr>
+        <p:txBody>
+          <a:bodyPr wrap="square" lIns="0" tIns="0" rIns="0" bIns="0" rtlCol="0" anchor="ctr"/>
+          <a:lstStyle/>
+          <a:p>
+            <a:pPr marL="0" indent="0">
+              <a:buNone/>
+            </a:pPr>
+            <a:r>
+              <a:rPr lang="en-US" sz="950" dirty="0">
                 <a:solidFill>
                   <a:srgbClr val="B0C4D8"/>
                 </a:solidFill>
@@ -10212,30 +10396,30 @@
                 <a:ea typeface="Calibri" pitchFamily="34" charset="-122"/>
                 <a:cs typeface="Calibri" pitchFamily="34" charset="-120"/>
               </a:rPr>
-              <a:t>β-penaliza popularidad → Coverage 6%</a:t>
-            </a:r>
-            <a:endParaRPr lang="en-US" sz="1000" dirty="0"/>
+              <a:t>Temporal decay → interacciones recientes valen más</a:t>
+            </a:r>
+            <a:endParaRPr lang="en-US" sz="950" dirty="0"/>
           </a:p>
         </p:txBody>
       </p:sp>
       <p:pic>
         <p:nvPicPr>
-          <p:cNvPr id="18" name="Image 3" descr="preencoded.png"/>
+          <p:cNvPr id="24" name="Image 4" descr="preencoded.png"/>
           <p:cNvPicPr>
             <a:picLocks noChangeAspect="1"/>
           </p:cNvPicPr>
           <p:nvPr/>
         </p:nvPicPr>
         <p:blipFill>
-          <a:blip r:embed="rId4"/>
+          <a:blip r:embed="rId5"/>
           <a:stretch>
             <a:fillRect/>
           </a:stretch>
         </p:blipFill>
         <p:spPr>
           <a:xfrm>
-            <a:off x="411480" y="3200400"/>
-            <a:ext cx="201168" cy="201168"/>
+            <a:off x="411480" y="3968496"/>
+            <a:ext cx="182880" cy="182880"/>
           </a:xfrm>
           <a:prstGeom prst="rect">
             <a:avLst/>
@@ -10244,30 +10428,30 @@
       </p:pic>
       <p:sp>
         <p:nvSpPr>
-          <p:cNvPr id="19" name="Text 13"/>
-          <p:cNvSpPr/>
-          <p:nvPr/>
-        </p:nvSpPr>
-        <p:spPr>
-          <a:xfrm>
-            <a:off x="667512" y="3182112"/>
-            <a:ext cx="2331720" cy="347472"/>
-          </a:xfrm>
-          <a:prstGeom prst="rect">
-            <a:avLst/>
-          </a:prstGeom>
-          <a:noFill/>
-          <a:ln/>
-        </p:spPr>
-        <p:txBody>
-          <a:bodyPr wrap="square" lIns="0" tIns="0" rIns="0" bIns="0" rtlCol="0" anchor="ctr"/>
-          <a:lstStyle/>
-          <a:p>
-            <a:pPr marL="0" indent="0">
-              <a:buNone/>
-            </a:pPr>
-            <a:r>
-              <a:rPr lang="en-US" sz="1000" dirty="0">
+          <p:cNvPr id="25" name="Text 18"/>
+          <p:cNvSpPr/>
+          <p:nvPr/>
+        </p:nvSpPr>
+        <p:spPr>
+          <a:xfrm>
+            <a:off x="649224" y="3950208"/>
+            <a:ext cx="2350008" cy="292608"/>
+          </a:xfrm>
+          <a:prstGeom prst="rect">
+            <a:avLst/>
+          </a:prstGeom>
+          <a:noFill/>
+          <a:ln/>
+        </p:spPr>
+        <p:txBody>
+          <a:bodyPr wrap="square" lIns="0" tIns="0" rIns="0" bIns="0" rtlCol="0" anchor="ctr"/>
+          <a:lstStyle/>
+          <a:p>
+            <a:pPr marL="0" indent="0">
+              <a:buNone/>
+            </a:pPr>
+            <a:r>
+              <a:rPr lang="en-US" sz="950" dirty="0">
                 <a:solidFill>
                   <a:srgbClr val="B0C4D8"/>
                 </a:solidFill>
@@ -10275,149 +10459,22 @@
                 <a:ea typeface="Calibri" pitchFamily="34" charset="-122"/>
                 <a:cs typeface="Calibri" pitchFamily="34" charset="-120"/>
               </a:rPr>
-              <a:t>Sin gradient descent: 6s entrenamiento</a:t>
-            </a:r>
-            <a:endParaRPr lang="en-US" sz="1000" dirty="0"/>
-          </a:p>
-        </p:txBody>
-      </p:sp>
-      <p:pic>
-        <p:nvPicPr>
-          <p:cNvPr id="20" name="Image 4" descr="preencoded.png"/>
-          <p:cNvPicPr>
-            <a:picLocks noChangeAspect="1"/>
-          </p:cNvPicPr>
-          <p:nvPr/>
-        </p:nvPicPr>
-        <p:blipFill>
-          <a:blip r:embed="rId4"/>
-          <a:stretch>
-            <a:fillRect/>
-          </a:stretch>
-        </p:blipFill>
-        <p:spPr>
-          <a:xfrm>
-            <a:off x="411480" y="3602736"/>
-            <a:ext cx="201168" cy="201168"/>
-          </a:xfrm>
-          <a:prstGeom prst="rect">
-            <a:avLst/>
-          </a:prstGeom>
-        </p:spPr>
-      </p:pic>
-      <p:sp>
-        <p:nvSpPr>
-          <p:cNvPr id="21" name="Text 14"/>
-          <p:cNvSpPr/>
-          <p:nvPr/>
-        </p:nvSpPr>
-        <p:spPr>
-          <a:xfrm>
-            <a:off x="667512" y="3584448"/>
-            <a:ext cx="2331720" cy="347472"/>
-          </a:xfrm>
-          <a:prstGeom prst="rect">
-            <a:avLst/>
-          </a:prstGeom>
-          <a:noFill/>
-          <a:ln/>
-        </p:spPr>
-        <p:txBody>
-          <a:bodyPr wrap="square" lIns="0" tIns="0" rIns="0" bIns="0" rtlCol="0" anchor="ctr"/>
-          <a:lstStyle/>
-          <a:p>
-            <a:pPr marL="0" indent="0">
-              <a:buNone/>
-            </a:pPr>
-            <a:r>
-              <a:rPr lang="en-US" sz="1000" dirty="0">
-                <a:solidFill>
-                  <a:srgbClr val="B0C4D8"/>
-                </a:solidFill>
-                <a:latin typeface="Calibri" pitchFamily="34" charset="0"/>
-                <a:ea typeface="Calibri" pitchFamily="34" charset="-122"/>
-                <a:cs typeface="Calibri" pitchFamily="34" charset="-120"/>
-              </a:rPr>
-              <a:t>ρ=-0.664 con popularidad (no filter bubble)</a:t>
-            </a:r>
-            <a:endParaRPr lang="en-US" sz="1000" dirty="0"/>
-          </a:p>
-        </p:txBody>
-      </p:sp>
-      <p:sp>
-        <p:nvSpPr>
-          <p:cNvPr id="22" name="Shape 15"/>
-          <p:cNvSpPr/>
-          <p:nvPr/>
-        </p:nvSpPr>
-        <p:spPr>
-          <a:xfrm>
-            <a:off x="301752" y="4041648"/>
-            <a:ext cx="2788920" cy="27432"/>
-          </a:xfrm>
-          <a:prstGeom prst="rect">
-            <a:avLst/>
-          </a:prstGeom>
-          <a:solidFill>
-            <a:srgbClr val="FF8C00"/>
-          </a:solidFill>
-          <a:ln w="12700">
-            <a:solidFill>
-              <a:srgbClr val="FF8C00"/>
-            </a:solidFill>
-            <a:prstDash val="solid"/>
-          </a:ln>
-        </p:spPr>
-      </p:sp>
-      <p:sp>
-        <p:nvSpPr>
-          <p:cNvPr id="23" name="Text 16"/>
-          <p:cNvSpPr/>
-          <p:nvPr/>
-        </p:nvSpPr>
-        <p:spPr>
-          <a:xfrm>
-            <a:off x="301752" y="4069080"/>
-            <a:ext cx="2788920" cy="256032"/>
-          </a:xfrm>
-          <a:prstGeom prst="rect">
-            <a:avLst/>
-          </a:prstGeom>
-          <a:noFill/>
-          <a:ln/>
-        </p:spPr>
-        <p:txBody>
-          <a:bodyPr wrap="square" lIns="0" tIns="0" rIns="0" bIns="0" rtlCol="0" anchor="ctr"/>
-          <a:lstStyle/>
-          <a:p>
-            <a:pPr marL="0" indent="0" algn="ctr">
-              <a:buNone/>
-            </a:pPr>
-            <a:r>
-              <a:rPr lang="en-US" sz="1000" b="1" dirty="0">
-                <a:solidFill>
-                  <a:srgbClr val="FF8C00"/>
-                </a:solidFill>
-                <a:latin typeface="Calibri" pitchFamily="34" charset="0"/>
-                <a:ea typeface="Calibri" pitchFamily="34" charset="-122"/>
-                <a:cs typeface="Calibri" pitchFamily="34" charset="-120"/>
-              </a:rPr>
-              <a:t>✓ EN ENSEMBLE FINAL</a:t>
-            </a:r>
-            <a:endParaRPr lang="en-US" sz="1000" dirty="0"/>
-          </a:p>
-        </p:txBody>
-      </p:sp>
-      <p:sp>
-        <p:nvSpPr>
-          <p:cNvPr id="24" name="Shape 17"/>
-          <p:cNvSpPr/>
-          <p:nvPr/>
-        </p:nvSpPr>
-        <p:spPr>
-          <a:xfrm>
-            <a:off x="3227832" y="1234440"/>
-            <a:ext cx="2788920" cy="2834640"/>
+              <a:t>β-penalización de popularidad → no filter bubble</a:t>
+            </a:r>
+            <a:endParaRPr lang="en-US" sz="950" dirty="0"/>
+          </a:p>
+        </p:txBody>
+      </p:sp>
+      <p:sp>
+        <p:nvSpPr>
+          <p:cNvPr id="26" name="Shape 19"/>
+          <p:cNvSpPr/>
+          <p:nvPr/>
+        </p:nvSpPr>
+        <p:spPr>
+          <a:xfrm>
+            <a:off x="3227832" y="2240280"/>
+            <a:ext cx="2788920" cy="2103120"/>
           </a:xfrm>
           <a:prstGeom prst="rect">
             <a:avLst/>
@@ -10442,14 +10499,14 @@
       </p:sp>
       <p:sp>
         <p:nvSpPr>
-          <p:cNvPr id="25" name="Shape 18"/>
-          <p:cNvSpPr/>
-          <p:nvPr/>
-        </p:nvSpPr>
-        <p:spPr>
-          <a:xfrm>
-            <a:off x="3227832" y="1234440"/>
-            <a:ext cx="2788920" cy="64008"/>
+          <p:cNvPr id="27" name="Shape 20"/>
+          <p:cNvSpPr/>
+          <p:nvPr/>
+        </p:nvSpPr>
+        <p:spPr>
+          <a:xfrm>
+            <a:off x="3227832" y="2240280"/>
+            <a:ext cx="2788920" cy="54864"/>
           </a:xfrm>
           <a:prstGeom prst="rect">
             <a:avLst/>
@@ -10467,14 +10524,14 @@
       </p:sp>
       <p:sp>
         <p:nvSpPr>
-          <p:cNvPr id="26" name="Text 19"/>
-          <p:cNvSpPr/>
-          <p:nvPr/>
-        </p:nvSpPr>
-        <p:spPr>
-          <a:xfrm>
-            <a:off x="3291840" y="1344168"/>
-            <a:ext cx="2660904" cy="347472"/>
+          <p:cNvPr id="28" name="Text 21"/>
+          <p:cNvSpPr/>
+          <p:nvPr/>
+        </p:nvSpPr>
+        <p:spPr>
+          <a:xfrm>
+            <a:off x="3291840" y="2331720"/>
+            <a:ext cx="2660904" cy="320040"/>
           </a:xfrm>
           <a:prstGeom prst="rect">
             <a:avLst/>
@@ -10490,7 +10547,7 @@
               <a:buNone/>
             </a:pPr>
             <a:r>
-              <a:rPr lang="en-US" sz="1400" b="1" dirty="0">
+              <a:rPr lang="en-US" sz="1300" b="1" dirty="0">
                 <a:solidFill>
                   <a:srgbClr val="FFFFFF"/>
                 </a:solidFill>
@@ -10498,21 +10555,21 @@
                 <a:ea typeface="Calibri" pitchFamily="34" charset="-122"/>
                 <a:cs typeface="Calibri" pitchFamily="34" charset="-120"/>
               </a:rPr>
-              <a:t>EASE^R</a:t>
-            </a:r>
-            <a:endParaRPr lang="en-US" sz="1400" dirty="0"/>
-          </a:p>
-        </p:txBody>
-      </p:sp>
-      <p:sp>
-        <p:nvSpPr>
-          <p:cNvPr id="27" name="Text 20"/>
-          <p:cNvSpPr/>
-          <p:nvPr/>
-        </p:nvSpPr>
-        <p:spPr>
-          <a:xfrm>
-            <a:off x="3291840" y="1709928"/>
+              <a:t>EASE^R (λ=500)</a:t>
+            </a:r>
+            <a:endParaRPr lang="en-US" sz="1300" dirty="0"/>
+          </a:p>
+        </p:txBody>
+      </p:sp>
+      <p:sp>
+        <p:nvSpPr>
+          <p:cNvPr id="29" name="Text 22"/>
+          <p:cNvSpPr/>
+          <p:nvPr/>
+        </p:nvSpPr>
+        <p:spPr>
+          <a:xfrm>
+            <a:off x="3291840" y="2651760"/>
             <a:ext cx="2660904" cy="256032"/>
           </a:xfrm>
           <a:prstGeom prst="rect">
@@ -10529,7 +10586,7 @@
               <a:buNone/>
             </a:pPr>
             <a:r>
-              <a:rPr lang="en-US" sz="1000" i="1" dirty="0">
+              <a:rPr lang="en-US" sz="900" i="1" dirty="0">
                 <a:solidFill>
                   <a:srgbClr val="9B59B6"/>
                 </a:solidFill>
@@ -10537,22 +10594,47 @@
                 <a:ea typeface="Calibri" pitchFamily="34" charset="-122"/>
                 <a:cs typeface="Calibri" pitchFamily="34" charset="-120"/>
               </a:rPr>
-              <a:t>Lineal CF (solución cerrada)</a:t>
-            </a:r>
-            <a:endParaRPr lang="en-US" sz="1000" dirty="0"/>
-          </a:p>
-        </p:txBody>
-      </p:sp>
-      <p:sp>
-        <p:nvSpPr>
-          <p:cNvPr id="28" name="Text 21"/>
-          <p:cNvSpPr/>
-          <p:nvPr/>
-        </p:nvSpPr>
-        <p:spPr>
-          <a:xfrm>
-            <a:off x="3291840" y="1993392"/>
-            <a:ext cx="2660904" cy="320040"/>
+              <a:t>Componente de diversidad · peso 0.021</a:t>
+            </a:r>
+            <a:endParaRPr lang="en-US" sz="900" dirty="0"/>
+          </a:p>
+        </p:txBody>
+      </p:sp>
+      <p:sp>
+        <p:nvSpPr>
+          <p:cNvPr id="30" name="Shape 23"/>
+          <p:cNvSpPr/>
+          <p:nvPr/>
+        </p:nvSpPr>
+        <p:spPr>
+          <a:xfrm>
+            <a:off x="3392424" y="2944368"/>
+            <a:ext cx="2459736" cy="256032"/>
+          </a:xfrm>
+          <a:prstGeom prst="rect">
+            <a:avLst/>
+          </a:prstGeom>
+          <a:solidFill>
+            <a:srgbClr val="1A3A6A"/>
+          </a:solidFill>
+          <a:ln w="12700">
+            <a:solidFill>
+              <a:srgbClr val="060D1A"/>
+            </a:solidFill>
+            <a:prstDash val="solid"/>
+          </a:ln>
+        </p:spPr>
+      </p:sp>
+      <p:sp>
+        <p:nvSpPr>
+          <p:cNvPr id="31" name="Text 24"/>
+          <p:cNvSpPr/>
+          <p:nvPr/>
+        </p:nvSpPr>
+        <p:spPr>
+          <a:xfrm>
+            <a:off x="3392424" y="2944368"/>
+            <a:ext cx="2459736" cy="256032"/>
           </a:xfrm>
           <a:prstGeom prst="rect">
             <a:avLst/>
@@ -10568,38 +10650,38 @@
               <a:buNone/>
             </a:pPr>
             <a:r>
-              <a:rPr lang="en-US" sz="1500" b="1" dirty="0">
-                <a:solidFill>
-                  <a:srgbClr val="9B59B6"/>
-                </a:solidFill>
-                <a:latin typeface="Calibri" pitchFamily="34" charset="0"/>
-                <a:ea typeface="Calibri" pitchFamily="34" charset="-122"/>
-                <a:cs typeface="Calibri" pitchFamily="34" charset="-120"/>
-              </a:rPr>
-              <a:t>NDCG@10: 0.0193</a:t>
-            </a:r>
-            <a:endParaRPr lang="en-US" sz="1500" dirty="0"/>
+              <a:rPr lang="en-US" sz="950" dirty="0">
+                <a:solidFill>
+                  <a:srgbClr val="FFFFFF"/>
+                </a:solidFill>
+                <a:latin typeface="Calibri" pitchFamily="34" charset="0"/>
+                <a:ea typeface="Calibri" pitchFamily="34" charset="-122"/>
+                <a:cs typeface="Calibri" pitchFamily="34" charset="-120"/>
+              </a:rPr>
+              <a:t>Individual: 0.0193  →  En ensemble: 2.1%</a:t>
+            </a:r>
+            <a:endParaRPr lang="en-US" sz="950" dirty="0"/>
           </a:p>
         </p:txBody>
       </p:sp>
       <p:pic>
         <p:nvPicPr>
-          <p:cNvPr id="29" name="Image 5" descr="preencoded.png"/>
+          <p:cNvPr id="32" name="Image 5" descr="preencoded.png"/>
           <p:cNvPicPr>
             <a:picLocks noChangeAspect="1"/>
           </p:cNvPicPr>
           <p:nvPr/>
         </p:nvPicPr>
         <p:blipFill>
-          <a:blip r:embed="rId4"/>
+          <a:blip r:embed="rId5"/>
           <a:stretch>
             <a:fillRect/>
           </a:stretch>
         </p:blipFill>
         <p:spPr>
           <a:xfrm>
-            <a:off x="3337560" y="2395728"/>
-            <a:ext cx="201168" cy="201168"/>
+            <a:off x="3337560" y="3291840"/>
+            <a:ext cx="182880" cy="182880"/>
           </a:xfrm>
           <a:prstGeom prst="rect">
             <a:avLst/>
@@ -10608,30 +10690,30 @@
       </p:pic>
       <p:sp>
         <p:nvSpPr>
-          <p:cNvPr id="30" name="Text 22"/>
-          <p:cNvSpPr/>
-          <p:nvPr/>
-        </p:nvSpPr>
-        <p:spPr>
-          <a:xfrm>
-            <a:off x="3593592" y="2377440"/>
-            <a:ext cx="2331720" cy="347472"/>
-          </a:xfrm>
-          <a:prstGeom prst="rect">
-            <a:avLst/>
-          </a:prstGeom>
-          <a:noFill/>
-          <a:ln/>
-        </p:spPr>
-        <p:txBody>
-          <a:bodyPr wrap="square" lIns="0" tIns="0" rIns="0" bIns="0" rtlCol="0" anchor="ctr"/>
-          <a:lstStyle/>
-          <a:p>
-            <a:pPr marL="0" indent="0">
-              <a:buNone/>
-            </a:pPr>
-            <a:r>
-              <a:rPr lang="en-US" sz="1000" dirty="0">
+          <p:cNvPr id="33" name="Text 25"/>
+          <p:cNvSpPr/>
+          <p:nvPr/>
+        </p:nvSpPr>
+        <p:spPr>
+          <a:xfrm>
+            <a:off x="3575304" y="3273552"/>
+            <a:ext cx="2350008" cy="292608"/>
+          </a:xfrm>
+          <a:prstGeom prst="rect">
+            <a:avLst/>
+          </a:prstGeom>
+          <a:noFill/>
+          <a:ln/>
+        </p:spPr>
+        <p:txBody>
+          <a:bodyPr wrap="square" lIns="0" tIns="0" rIns="0" bIns="0" rtlCol="0" anchor="ctr"/>
+          <a:lstStyle/>
+          <a:p>
+            <a:pPr marL="0" indent="0">
+              <a:buNone/>
+            </a:pPr>
+            <a:r>
+              <a:rPr lang="en-US" sz="950" dirty="0">
                 <a:solidFill>
                   <a:srgbClr val="B0C4D8"/>
                 </a:solidFill>
@@ -10639,30 +10721,30 @@
                 <a:ea typeface="Calibri" pitchFamily="34" charset="-122"/>
                 <a:cs typeface="Calibri" pitchFamily="34" charset="-120"/>
               </a:rPr>
-              <a:t>Solución analítica: B=inv(X^TX+λI)</a:t>
-            </a:r>
-            <a:endParaRPr lang="en-US" sz="1000" dirty="0"/>
+              <a:t>Solución analítica cerrada — sin gradient descent</a:t>
+            </a:r>
+            <a:endParaRPr lang="en-US" sz="950" dirty="0"/>
           </a:p>
         </p:txBody>
       </p:sp>
       <p:pic>
         <p:nvPicPr>
-          <p:cNvPr id="31" name="Image 6" descr="preencoded.png"/>
+          <p:cNvPr id="34" name="Image 6" descr="preencoded.png"/>
           <p:cNvPicPr>
             <a:picLocks noChangeAspect="1"/>
           </p:cNvPicPr>
           <p:nvPr/>
         </p:nvPicPr>
         <p:blipFill>
-          <a:blip r:embed="rId4"/>
+          <a:blip r:embed="rId5"/>
           <a:stretch>
             <a:fillRect/>
           </a:stretch>
         </p:blipFill>
         <p:spPr>
           <a:xfrm>
-            <a:off x="3337560" y="2798064"/>
-            <a:ext cx="201168" cy="201168"/>
+            <a:off x="3337560" y="3630168"/>
+            <a:ext cx="182880" cy="182880"/>
           </a:xfrm>
           <a:prstGeom prst="rect">
             <a:avLst/>
@@ -10671,30 +10753,30 @@
       </p:pic>
       <p:sp>
         <p:nvSpPr>
-          <p:cNvPr id="32" name="Text 23"/>
-          <p:cNvSpPr/>
-          <p:nvPr/>
-        </p:nvSpPr>
-        <p:spPr>
-          <a:xfrm>
-            <a:off x="3593592" y="2779776"/>
-            <a:ext cx="2331720" cy="347472"/>
-          </a:xfrm>
-          <a:prstGeom prst="rect">
-            <a:avLst/>
-          </a:prstGeom>
-          <a:noFill/>
-          <a:ln/>
-        </p:spPr>
-        <p:txBody>
-          <a:bodyPr wrap="square" lIns="0" tIns="0" rIns="0" bIns="0" rtlCol="0" anchor="ctr"/>
-          <a:lstStyle/>
-          <a:p>
-            <a:pPr marL="0" indent="0">
-              <a:buNone/>
-            </a:pPr>
-            <a:r>
-              <a:rPr lang="en-US" sz="1000" dirty="0">
+          <p:cNvPr id="35" name="Text 26"/>
+          <p:cNvSpPr/>
+          <p:nvPr/>
+        </p:nvSpPr>
+        <p:spPr>
+          <a:xfrm>
+            <a:off x="3575304" y="3611880"/>
+            <a:ext cx="2350008" cy="292608"/>
+          </a:xfrm>
+          <a:prstGeom prst="rect">
+            <a:avLst/>
+          </a:prstGeom>
+          <a:noFill/>
+          <a:ln/>
+        </p:spPr>
+        <p:txBody>
+          <a:bodyPr wrap="square" lIns="0" tIns="0" rIns="0" bIns="0" rtlCol="0" anchor="ctr"/>
+          <a:lstStyle/>
+          <a:p>
+            <a:pPr marL="0" indent="0">
+              <a:buNone/>
+            </a:pPr>
+            <a:r>
+              <a:rPr lang="en-US" sz="950" dirty="0">
                 <a:solidFill>
                   <a:srgbClr val="B0C4D8"/>
                 </a:solidFill>
@@ -10702,30 +10784,30 @@
                 <a:ea typeface="Calibri" pitchFamily="34" charset="-122"/>
                 <a:cs typeface="Calibri" pitchFamily="34" charset="-120"/>
               </a:rPr>
-              <a:t>Ningún ítem se recomienda a sí mismo (diag=0)</a:t>
-            </a:r>
-            <a:endParaRPr lang="en-US" sz="1000" dirty="0"/>
+              <a:t>ρ_Spearman=0.216 con RP3 → señal genuinamente distinta</a:t>
+            </a:r>
+            <a:endParaRPr lang="en-US" sz="950" dirty="0"/>
           </a:p>
         </p:txBody>
       </p:sp>
       <p:pic>
         <p:nvPicPr>
-          <p:cNvPr id="33" name="Image 7" descr="preencoded.png"/>
+          <p:cNvPr id="36" name="Image 7" descr="preencoded.png"/>
           <p:cNvPicPr>
             <a:picLocks noChangeAspect="1"/>
           </p:cNvPicPr>
           <p:nvPr/>
         </p:nvPicPr>
         <p:blipFill>
-          <a:blip r:embed="rId4"/>
+          <a:blip r:embed="rId5"/>
           <a:stretch>
             <a:fillRect/>
           </a:stretch>
         </p:blipFill>
         <p:spPr>
           <a:xfrm>
-            <a:off x="3337560" y="3200400"/>
-            <a:ext cx="201168" cy="201168"/>
+            <a:off x="3337560" y="3968496"/>
+            <a:ext cx="182880" cy="182880"/>
           </a:xfrm>
           <a:prstGeom prst="rect">
             <a:avLst/>
@@ -10734,30 +10816,30 @@
       </p:pic>
       <p:sp>
         <p:nvSpPr>
-          <p:cNvPr id="34" name="Text 24"/>
-          <p:cNvSpPr/>
-          <p:nvPr/>
-        </p:nvSpPr>
-        <p:spPr>
-          <a:xfrm>
-            <a:off x="3593592" y="3182112"/>
-            <a:ext cx="2331720" cy="347472"/>
-          </a:xfrm>
-          <a:prstGeom prst="rect">
-            <a:avLst/>
-          </a:prstGeom>
-          <a:noFill/>
-          <a:ln/>
-        </p:spPr>
-        <p:txBody>
-          <a:bodyPr wrap="square" lIns="0" tIns="0" rIns="0" bIns="0" rtlCol="0" anchor="ctr"/>
-          <a:lstStyle/>
-          <a:p>
-            <a:pPr marL="0" indent="0">
-              <a:buNone/>
-            </a:pPr>
-            <a:r>
-              <a:rPr lang="en-US" sz="1000" dirty="0">
+          <p:cNvPr id="37" name="Text 27"/>
+          <p:cNvSpPr/>
+          <p:nvPr/>
+        </p:nvSpPr>
+        <p:spPr>
+          <a:xfrm>
+            <a:off x="3575304" y="3950208"/>
+            <a:ext cx="2350008" cy="292608"/>
+          </a:xfrm>
+          <a:prstGeom prst="rect">
+            <a:avLst/>
+          </a:prstGeom>
+          <a:noFill/>
+          <a:ln/>
+        </p:spPr>
+        <p:txBody>
+          <a:bodyPr wrap="square" lIns="0" tIns="0" rIns="0" bIns="0" rtlCol="0" anchor="ctr"/>
+          <a:lstStyle/>
+          <a:p>
+            <a:pPr marL="0" indent="0">
+              <a:buNone/>
+            </a:pPr>
+            <a:r>
+              <a:rPr lang="en-US" sz="950" dirty="0">
                 <a:solidFill>
                   <a:srgbClr val="B0C4D8"/>
                 </a:solidFill>
@@ -10765,159 +10847,32 @@
                 <a:ea typeface="Calibri" pitchFamily="34" charset="-122"/>
                 <a:cs typeface="Calibri" pitchFamily="34" charset="-120"/>
               </a:rPr>
-              <a:t>Diversidad genuina vs RP3 (ρ=0.216)</a:t>
-            </a:r>
-            <a:endParaRPr lang="en-US" sz="1000" dirty="0"/>
-          </a:p>
-        </p:txBody>
-      </p:sp>
-      <p:pic>
-        <p:nvPicPr>
-          <p:cNvPr id="35" name="Image 8" descr="preencoded.png"/>
-          <p:cNvPicPr>
-            <a:picLocks noChangeAspect="1"/>
-          </p:cNvPicPr>
-          <p:nvPr/>
-        </p:nvPicPr>
-        <p:blipFill>
-          <a:blip r:embed="rId4"/>
-          <a:stretch>
-            <a:fillRect/>
-          </a:stretch>
-        </p:blipFill>
-        <p:spPr>
-          <a:xfrm>
-            <a:off x="3337560" y="3602736"/>
-            <a:ext cx="201168" cy="201168"/>
-          </a:xfrm>
-          <a:prstGeom prst="rect">
-            <a:avLst/>
-          </a:prstGeom>
-        </p:spPr>
-      </p:pic>
-      <p:sp>
-        <p:nvSpPr>
-          <p:cNvPr id="36" name="Text 25"/>
-          <p:cNvSpPr/>
-          <p:nvPr/>
-        </p:nvSpPr>
-        <p:spPr>
-          <a:xfrm>
-            <a:off x="3593592" y="3584448"/>
-            <a:ext cx="2331720" cy="347472"/>
-          </a:xfrm>
-          <a:prstGeom prst="rect">
-            <a:avLst/>
-          </a:prstGeom>
-          <a:noFill/>
-          <a:ln/>
-        </p:spPr>
-        <p:txBody>
-          <a:bodyPr wrap="square" lIns="0" tIns="0" rIns="0" bIns="0" rtlCol="0" anchor="ctr"/>
-          <a:lstStyle/>
-          <a:p>
-            <a:pPr marL="0" indent="0">
-              <a:buNone/>
-            </a:pPr>
-            <a:r>
-              <a:rPr lang="en-US" sz="1000" dirty="0">
-                <a:solidFill>
-                  <a:srgbClr val="B0C4D8"/>
-                </a:solidFill>
-                <a:latin typeface="Calibri" pitchFamily="34" charset="0"/>
-                <a:ea typeface="Calibri" pitchFamily="34" charset="-122"/>
-                <a:cs typeface="Calibri" pitchFamily="34" charset="-120"/>
-              </a:rPr>
-              <a:t>Complementario → activa el ensemble</a:t>
-            </a:r>
-            <a:endParaRPr lang="en-US" sz="1000" dirty="0"/>
-          </a:p>
-        </p:txBody>
-      </p:sp>
-      <p:sp>
-        <p:nvSpPr>
-          <p:cNvPr id="37" name="Shape 26"/>
-          <p:cNvSpPr/>
-          <p:nvPr/>
-        </p:nvSpPr>
-        <p:spPr>
-          <a:xfrm>
-            <a:off x="3227832" y="4041648"/>
-            <a:ext cx="2788920" cy="27432"/>
+              <a:t>Pequeño peso, gran impacto en diversidad del ensemble</a:t>
+            </a:r>
+            <a:endParaRPr lang="en-US" sz="950" dirty="0"/>
+          </a:p>
+        </p:txBody>
+      </p:sp>
+      <p:sp>
+        <p:nvSpPr>
+          <p:cNvPr id="38" name="Shape 28"/>
+          <p:cNvSpPr/>
+          <p:nvPr/>
+        </p:nvSpPr>
+        <p:spPr>
+          <a:xfrm>
+            <a:off x="6153912" y="2240280"/>
+            <a:ext cx="2788920" cy="2103120"/>
           </a:xfrm>
           <a:prstGeom prst="rect">
             <a:avLst/>
           </a:prstGeom>
           <a:solidFill>
-            <a:srgbClr val="9B59B6"/>
+            <a:srgbClr val="041530"/>
           </a:solidFill>
           <a:ln w="12700">
             <a:solidFill>
-              <a:srgbClr val="9B59B6"/>
-            </a:solidFill>
-            <a:prstDash val="solid"/>
-          </a:ln>
-        </p:spPr>
-      </p:sp>
-      <p:sp>
-        <p:nvSpPr>
-          <p:cNvPr id="38" name="Text 27"/>
-          <p:cNvSpPr/>
-          <p:nvPr/>
-        </p:nvSpPr>
-        <p:spPr>
-          <a:xfrm>
-            <a:off x="3227832" y="4069080"/>
-            <a:ext cx="2788920" cy="256032"/>
-          </a:xfrm>
-          <a:prstGeom prst="rect">
-            <a:avLst/>
-          </a:prstGeom>
-          <a:noFill/>
-          <a:ln/>
-        </p:spPr>
-        <p:txBody>
-          <a:bodyPr wrap="square" lIns="0" tIns="0" rIns="0" bIns="0" rtlCol="0" anchor="ctr"/>
-          <a:lstStyle/>
-          <a:p>
-            <a:pPr marL="0" indent="0" algn="ctr">
-              <a:buNone/>
-            </a:pPr>
-            <a:r>
-              <a:rPr lang="en-US" sz="1000" b="1" dirty="0">
-                <a:solidFill>
-                  <a:srgbClr val="9B59B6"/>
-                </a:solidFill>
-                <a:latin typeface="Calibri" pitchFamily="34" charset="0"/>
-                <a:ea typeface="Calibri" pitchFamily="34" charset="-122"/>
-                <a:cs typeface="Calibri" pitchFamily="34" charset="-120"/>
-              </a:rPr>
-              <a:t>✓ EN ENSEMBLE FINAL</a:t>
-            </a:r>
-            <a:endParaRPr lang="en-US" sz="1000" dirty="0"/>
-          </a:p>
-        </p:txBody>
-      </p:sp>
-      <p:sp>
-        <p:nvSpPr>
-          <p:cNvPr id="39" name="Shape 28"/>
-          <p:cNvSpPr/>
-          <p:nvPr/>
-        </p:nvSpPr>
-        <p:spPr>
-          <a:xfrm>
-            <a:off x="6153912" y="1234440"/>
-            <a:ext cx="2788920" cy="2834640"/>
-          </a:xfrm>
-          <a:prstGeom prst="rect">
-            <a:avLst/>
-          </a:prstGeom>
-          <a:solidFill>
-            <a:srgbClr val="050A00"/>
-          </a:solidFill>
-          <a:ln w="12700">
-            <a:solidFill>
-              <a:srgbClr val="6B8CAE"/>
+              <a:srgbClr val="0EA5DC"/>
             </a:solidFill>
             <a:prstDash val="solid"/>
           </a:ln>
@@ -10932,24 +10887,24 @@
       </p:sp>
       <p:sp>
         <p:nvSpPr>
-          <p:cNvPr id="40" name="Shape 29"/>
-          <p:cNvSpPr/>
-          <p:nvPr/>
-        </p:nvSpPr>
-        <p:spPr>
-          <a:xfrm>
-            <a:off x="6153912" y="1234440"/>
-            <a:ext cx="2788920" cy="64008"/>
+          <p:cNvPr id="39" name="Shape 29"/>
+          <p:cNvSpPr/>
+          <p:nvPr/>
+        </p:nvSpPr>
+        <p:spPr>
+          <a:xfrm>
+            <a:off x="6153912" y="2240280"/>
+            <a:ext cx="2788920" cy="54864"/>
           </a:xfrm>
           <a:prstGeom prst="rect">
             <a:avLst/>
           </a:prstGeom>
           <a:solidFill>
-            <a:srgbClr val="6B8CAE"/>
+            <a:srgbClr val="0EA5DC"/>
           </a:solidFill>
           <a:ln w="12700">
             <a:solidFill>
-              <a:srgbClr val="6B8CAE"/>
+              <a:srgbClr val="0EA5DC"/>
             </a:solidFill>
             <a:prstDash val="solid"/>
           </a:ln>
@@ -10957,14 +10912,14 @@
       </p:sp>
       <p:sp>
         <p:nvSpPr>
-          <p:cNvPr id="41" name="Text 30"/>
-          <p:cNvSpPr/>
-          <p:nvPr/>
-        </p:nvSpPr>
-        <p:spPr>
-          <a:xfrm>
-            <a:off x="6217920" y="1344168"/>
-            <a:ext cx="2660904" cy="347472"/>
+          <p:cNvPr id="40" name="Text 30"/>
+          <p:cNvSpPr/>
+          <p:nvPr/>
+        </p:nvSpPr>
+        <p:spPr>
+          <a:xfrm>
+            <a:off x="6217920" y="2331720"/>
+            <a:ext cx="2660904" cy="320040"/>
           </a:xfrm>
           <a:prstGeom prst="rect">
             <a:avLst/>
@@ -10980,29 +10935,29 @@
               <a:buNone/>
             </a:pPr>
             <a:r>
-              <a:rPr lang="en-US" sz="1400" b="1" dirty="0">
-                <a:solidFill>
-                  <a:srgbClr val="6B8CAE"/>
-                </a:solidFill>
-                <a:latin typeface="Calibri" pitchFamily="34" charset="0"/>
-                <a:ea typeface="Calibri" pitchFamily="34" charset="-122"/>
-                <a:cs typeface="Calibri" pitchFamily="34" charset="-120"/>
-              </a:rPr>
-              <a:t>Mult-VAE^PR</a:t>
-            </a:r>
-            <a:endParaRPr lang="en-US" sz="1400" dirty="0"/>
-          </a:p>
-        </p:txBody>
-      </p:sp>
-      <p:sp>
-        <p:nvSpPr>
-          <p:cNvPr id="42" name="Text 31"/>
-          <p:cNvSpPr/>
-          <p:nvPr/>
-        </p:nvSpPr>
-        <p:spPr>
-          <a:xfrm>
-            <a:off x="6217920" y="1709928"/>
+              <a:rPr lang="en-US" sz="1300" b="1" dirty="0">
+                <a:solidFill>
+                  <a:srgbClr val="FFFFFF"/>
+                </a:solidFill>
+                <a:latin typeface="Calibri" pitchFamily="34" charset="0"/>
+                <a:ea typeface="Calibri" pitchFamily="34" charset="-122"/>
+                <a:cs typeface="Calibri" pitchFamily="34" charset="-120"/>
+              </a:rPr>
+              <a:t>RP3+TD</a:t>
+            </a:r>
+            <a:endParaRPr lang="en-US" sz="1300" dirty="0"/>
+          </a:p>
+        </p:txBody>
+      </p:sp>
+      <p:sp>
+        <p:nvSpPr>
+          <p:cNvPr id="41" name="Text 31"/>
+          <p:cNvSpPr/>
+          <p:nvPr/>
+        </p:nvSpPr>
+        <p:spPr>
+          <a:xfrm>
+            <a:off x="6217920" y="2651760"/>
             <a:ext cx="2660904" cy="256032"/>
           </a:xfrm>
           <a:prstGeom prst="rect">
@@ -11019,30 +10974,55 @@
               <a:buNone/>
             </a:pPr>
             <a:r>
-              <a:rPr lang="en-US" sz="1000" i="1" dirty="0">
-                <a:solidFill>
-                  <a:srgbClr val="6B8CAE"/>
-                </a:solidFill>
-                <a:latin typeface="Calibri" pitchFamily="34" charset="0"/>
-                <a:ea typeface="Calibri" pitchFamily="34" charset="-122"/>
-                <a:cs typeface="Calibri" pitchFamily="34" charset="-120"/>
-              </a:rPr>
-              <a:t>VAE Generativo</a:t>
-            </a:r>
-            <a:endParaRPr lang="en-US" sz="1000" dirty="0"/>
-          </a:p>
-        </p:txBody>
-      </p:sp>
-      <p:sp>
-        <p:nvSpPr>
-          <p:cNvPr id="43" name="Text 32"/>
-          <p:cNvSpPr/>
-          <p:nvPr/>
-        </p:nvSpPr>
-        <p:spPr>
-          <a:xfrm>
-            <a:off x="6217920" y="1993392"/>
-            <a:ext cx="2660904" cy="320040"/>
+              <a:rPr lang="en-US" sz="900" i="1" dirty="0">
+                <a:solidFill>
+                  <a:srgbClr val="0EA5DC"/>
+                </a:solidFill>
+                <a:latin typeface="Calibri" pitchFamily="34" charset="0"/>
+                <a:ea typeface="Calibri" pitchFamily="34" charset="-122"/>
+                <a:cs typeface="Calibri" pitchFamily="34" charset="-120"/>
+              </a:rPr>
+              <a:t>Complemento base · peso 0.023</a:t>
+            </a:r>
+            <a:endParaRPr lang="en-US" sz="900" dirty="0"/>
+          </a:p>
+        </p:txBody>
+      </p:sp>
+      <p:sp>
+        <p:nvSpPr>
+          <p:cNvPr id="42" name="Shape 32"/>
+          <p:cNvSpPr/>
+          <p:nvPr/>
+        </p:nvSpPr>
+        <p:spPr>
+          <a:xfrm>
+            <a:off x="6318504" y="2944368"/>
+            <a:ext cx="2459736" cy="256032"/>
+          </a:xfrm>
+          <a:prstGeom prst="rect">
+            <a:avLst/>
+          </a:prstGeom>
+          <a:solidFill>
+            <a:srgbClr val="1A3A6A"/>
+          </a:solidFill>
+          <a:ln w="12700">
+            <a:solidFill>
+              <a:srgbClr val="060D1A"/>
+            </a:solidFill>
+            <a:prstDash val="solid"/>
+          </a:ln>
+        </p:spPr>
+      </p:sp>
+      <p:sp>
+        <p:nvSpPr>
+          <p:cNvPr id="43" name="Text 33"/>
+          <p:cNvSpPr/>
+          <p:nvPr/>
+        </p:nvSpPr>
+        <p:spPr>
+          <a:xfrm>
+            <a:off x="6318504" y="2944368"/>
+            <a:ext cx="2459736" cy="256032"/>
           </a:xfrm>
           <a:prstGeom prst="rect">
             <a:avLst/>
@@ -11058,23 +11038,23 @@
               <a:buNone/>
             </a:pPr>
             <a:r>
-              <a:rPr lang="en-US" sz="1500" b="1" dirty="0">
-                <a:solidFill>
-                  <a:srgbClr val="6B8CAE"/>
-                </a:solidFill>
-                <a:latin typeface="Calibri" pitchFamily="34" charset="0"/>
-                <a:ea typeface="Calibri" pitchFamily="34" charset="-122"/>
-                <a:cs typeface="Calibri" pitchFamily="34" charset="-120"/>
-              </a:rPr>
-              <a:t>NDCG@10: 0.0255</a:t>
-            </a:r>
-            <a:endParaRPr lang="en-US" sz="1500" dirty="0"/>
+              <a:rPr lang="en-US" sz="950" dirty="0">
+                <a:solidFill>
+                  <a:srgbClr val="FFFFFF"/>
+                </a:solidFill>
+                <a:latin typeface="Calibri" pitchFamily="34" charset="0"/>
+                <a:ea typeface="Calibri" pitchFamily="34" charset="-122"/>
+                <a:cs typeface="Calibri" pitchFamily="34" charset="-120"/>
+              </a:rPr>
+              <a:t>Individual: 0.0286  →  En ensemble: 2.3%</a:t>
+            </a:r>
+            <a:endParaRPr lang="en-US" sz="950" dirty="0"/>
           </a:p>
         </p:txBody>
       </p:sp>
       <p:pic>
         <p:nvPicPr>
-          <p:cNvPr id="44" name="Image 9" descr="preencoded.png"/>
+          <p:cNvPr id="44" name="Image 8" descr="preencoded.png"/>
           <p:cNvPicPr>
             <a:picLocks noChangeAspect="1"/>
           </p:cNvPicPr>
@@ -11088,8 +11068,8 @@
         </p:blipFill>
         <p:spPr>
           <a:xfrm>
-            <a:off x="6263640" y="2395728"/>
-            <a:ext cx="201168" cy="201168"/>
+            <a:off x="6263640" y="3291840"/>
+            <a:ext cx="182880" cy="182880"/>
           </a:xfrm>
           <a:prstGeom prst="rect">
             <a:avLst/>
@@ -11098,46 +11078,46 @@
       </p:pic>
       <p:sp>
         <p:nvSpPr>
-          <p:cNvPr id="45" name="Text 33"/>
-          <p:cNvSpPr/>
-          <p:nvPr/>
-        </p:nvSpPr>
-        <p:spPr>
-          <a:xfrm>
-            <a:off x="6519672" y="2377440"/>
-            <a:ext cx="2331720" cy="347472"/>
-          </a:xfrm>
-          <a:prstGeom prst="rect">
-            <a:avLst/>
-          </a:prstGeom>
-          <a:noFill/>
-          <a:ln/>
-        </p:spPr>
-        <p:txBody>
-          <a:bodyPr wrap="square" lIns="0" tIns="0" rIns="0" bIns="0" rtlCol="0" anchor="ctr"/>
-          <a:lstStyle/>
-          <a:p>
-            <a:pPr marL="0" indent="0">
-              <a:buNone/>
-            </a:pPr>
-            <a:r>
-              <a:rPr lang="en-US" sz="1000" dirty="0">
-                <a:solidFill>
-                  <a:srgbClr val="6B8CAE"/>
-                </a:solidFill>
-                <a:latin typeface="Calibri" pitchFamily="34" charset="0"/>
-                <a:ea typeface="Calibri" pitchFamily="34" charset="-122"/>
-                <a:cs typeface="Calibri" pitchFamily="34" charset="-120"/>
-              </a:rPr>
-              <a:t>Precision@10 superior (+6.6% vs RP3)</a:t>
-            </a:r>
-            <a:endParaRPr lang="en-US" sz="1000" dirty="0"/>
+          <p:cNvPr id="45" name="Text 34"/>
+          <p:cNvSpPr/>
+          <p:nvPr/>
+        </p:nvSpPr>
+        <p:spPr>
+          <a:xfrm>
+            <a:off x="6501384" y="3273552"/>
+            <a:ext cx="2350008" cy="292608"/>
+          </a:xfrm>
+          <a:prstGeom prst="rect">
+            <a:avLst/>
+          </a:prstGeom>
+          <a:noFill/>
+          <a:ln/>
+        </p:spPr>
+        <p:txBody>
+          <a:bodyPr wrap="square" lIns="0" tIns="0" rIns="0" bIns="0" rtlCol="0" anchor="ctr"/>
+          <a:lstStyle/>
+          <a:p>
+            <a:pPr marL="0" indent="0">
+              <a:buNone/>
+            </a:pPr>
+            <a:r>
+              <a:rPr lang="en-US" sz="950" dirty="0">
+                <a:solidFill>
+                  <a:srgbClr val="B0C4D8"/>
+                </a:solidFill>
+                <a:latin typeface="Calibri" pitchFamily="34" charset="0"/>
+                <a:ea typeface="Calibri" pitchFamily="34" charset="-122"/>
+                <a:cs typeface="Calibri" pitchFamily="34" charset="-120"/>
+              </a:rPr>
+              <a:t>Mismo score base sin multi-evento</a:t>
+            </a:r>
+            <a:endParaRPr lang="en-US" sz="950" dirty="0"/>
           </a:p>
         </p:txBody>
       </p:sp>
       <p:pic>
         <p:nvPicPr>
-          <p:cNvPr id="46" name="Image 10" descr="preencoded.png"/>
+          <p:cNvPr id="46" name="Image 9" descr="preencoded.png"/>
           <p:cNvPicPr>
             <a:picLocks noChangeAspect="1"/>
           </p:cNvPicPr>
@@ -11151,8 +11131,8 @@
         </p:blipFill>
         <p:spPr>
           <a:xfrm>
-            <a:off x="6263640" y="2798064"/>
-            <a:ext cx="201168" cy="201168"/>
+            <a:off x="6263640" y="3630168"/>
+            <a:ext cx="182880" cy="182880"/>
           </a:xfrm>
           <a:prstGeom prst="rect">
             <a:avLst/>
@@ -11161,46 +11141,46 @@
       </p:pic>
       <p:sp>
         <p:nvSpPr>
-          <p:cNvPr id="47" name="Text 34"/>
-          <p:cNvSpPr/>
-          <p:nvPr/>
-        </p:nvSpPr>
-        <p:spPr>
-          <a:xfrm>
-            <a:off x="6519672" y="2779776"/>
-            <a:ext cx="2331720" cy="347472"/>
-          </a:xfrm>
-          <a:prstGeom prst="rect">
-            <a:avLst/>
-          </a:prstGeom>
-          <a:noFill/>
-          <a:ln/>
-        </p:spPr>
-        <p:txBody>
-          <a:bodyPr wrap="square" lIns="0" tIns="0" rIns="0" bIns="0" rtlCol="0" anchor="ctr"/>
-          <a:lstStyle/>
-          <a:p>
-            <a:pPr marL="0" indent="0">
-              <a:buNone/>
-            </a:pPr>
-            <a:r>
-              <a:rPr lang="en-US" sz="1000" dirty="0">
-                <a:solidFill>
-                  <a:srgbClr val="6B8CAE"/>
-                </a:solidFill>
-                <a:latin typeface="Calibri" pitchFamily="34" charset="0"/>
-                <a:ea typeface="Calibri" pitchFamily="34" charset="-122"/>
-                <a:cs typeface="Calibri" pitchFamily="34" charset="-120"/>
-              </a:rPr>
-              <a:t>Architectura flexible</a:t>
-            </a:r>
-            <a:endParaRPr lang="en-US" sz="1000" dirty="0"/>
+          <p:cNvPr id="47" name="Text 35"/>
+          <p:cNvSpPr/>
+          <p:nvPr/>
+        </p:nvSpPr>
+        <p:spPr>
+          <a:xfrm>
+            <a:off x="6501384" y="3611880"/>
+            <a:ext cx="2350008" cy="292608"/>
+          </a:xfrm>
+          <a:prstGeom prst="rect">
+            <a:avLst/>
+          </a:prstGeom>
+          <a:noFill/>
+          <a:ln/>
+        </p:spPr>
+        <p:txBody>
+          <a:bodyPr wrap="square" lIns="0" tIns="0" rIns="0" bIns="0" rtlCol="0" anchor="ctr"/>
+          <a:lstStyle/>
+          <a:p>
+            <a:pPr marL="0" indent="0">
+              <a:buNone/>
+            </a:pPr>
+            <a:r>
+              <a:rPr lang="en-US" sz="950" dirty="0">
+                <a:solidFill>
+                  <a:srgbClr val="B0C4D8"/>
+                </a:solidFill>
+                <a:latin typeface="Calibri" pitchFamily="34" charset="0"/>
+                <a:ea typeface="Calibri" pitchFamily="34" charset="-122"/>
+                <a:cs typeface="Calibri" pitchFamily="34" charset="-120"/>
+              </a:rPr>
+              <a:t>Aporta señal temporal desacoplada</a:t>
+            </a:r>
+            <a:endParaRPr lang="en-US" sz="950" dirty="0"/>
           </a:p>
         </p:txBody>
       </p:sp>
       <p:pic>
         <p:nvPicPr>
-          <p:cNvPr id="48" name="Image 11" descr="preencoded.png"/>
+          <p:cNvPr id="48" name="Image 10" descr="preencoded.png"/>
           <p:cNvPicPr>
             <a:picLocks noChangeAspect="1"/>
           </p:cNvPicPr>
@@ -11214,8 +11194,8 @@
         </p:blipFill>
         <p:spPr>
           <a:xfrm>
-            <a:off x="6263640" y="3200400"/>
-            <a:ext cx="201168" cy="201168"/>
+            <a:off x="6263640" y="3968496"/>
+            <a:ext cx="182880" cy="182880"/>
           </a:xfrm>
           <a:prstGeom prst="rect">
             <a:avLst/>
@@ -11224,116 +11204,53 @@
       </p:pic>
       <p:sp>
         <p:nvSpPr>
-          <p:cNvPr id="49" name="Text 35"/>
-          <p:cNvSpPr/>
-          <p:nvPr/>
-        </p:nvSpPr>
-        <p:spPr>
-          <a:xfrm>
-            <a:off x="6519672" y="3182112"/>
-            <a:ext cx="2331720" cy="347472"/>
-          </a:xfrm>
-          <a:prstGeom prst="rect">
-            <a:avLst/>
-          </a:prstGeom>
-          <a:noFill/>
-          <a:ln/>
-        </p:spPr>
-        <p:txBody>
-          <a:bodyPr wrap="square" lIns="0" tIns="0" rIns="0" bIns="0" rtlCol="0" anchor="ctr"/>
-          <a:lstStyle/>
-          <a:p>
-            <a:pPr marL="0" indent="0">
-              <a:buNone/>
-            </a:pPr>
-            <a:r>
-              <a:rPr lang="en-US" sz="1000" dirty="0">
-                <a:solidFill>
-                  <a:srgbClr val="6B8CAE"/>
-                </a:solidFill>
-                <a:latin typeface="Calibri" pitchFamily="34" charset="0"/>
-                <a:ea typeface="Calibri" pitchFamily="34" charset="-122"/>
-                <a:cs typeface="Calibri" pitchFamily="34" charset="-120"/>
-              </a:rPr>
-              <a:t>Pero: 7091s entrenamiento vs 6s</a:t>
-            </a:r>
-            <a:endParaRPr lang="en-US" sz="1000" dirty="0"/>
-          </a:p>
-        </p:txBody>
-      </p:sp>
-      <p:pic>
-        <p:nvPicPr>
-          <p:cNvPr id="50" name="Image 12" descr="preencoded.png"/>
-          <p:cNvPicPr>
-            <a:picLocks noChangeAspect="1"/>
-          </p:cNvPicPr>
-          <p:nvPr/>
-        </p:nvPicPr>
-        <p:blipFill>
-          <a:blip r:embed="rId5"/>
-          <a:stretch>
-            <a:fillRect/>
-          </a:stretch>
-        </p:blipFill>
-        <p:spPr>
-          <a:xfrm>
-            <a:off x="6263640" y="3602736"/>
-            <a:ext cx="201168" cy="201168"/>
-          </a:xfrm>
-          <a:prstGeom prst="rect">
-            <a:avLst/>
-          </a:prstGeom>
-        </p:spPr>
-      </p:pic>
-      <p:sp>
-        <p:nvSpPr>
-          <p:cNvPr id="51" name="Text 36"/>
-          <p:cNvSpPr/>
-          <p:nvPr/>
-        </p:nvSpPr>
-        <p:spPr>
-          <a:xfrm>
-            <a:off x="6519672" y="3584448"/>
-            <a:ext cx="2331720" cy="347472"/>
-          </a:xfrm>
-          <a:prstGeom prst="rect">
-            <a:avLst/>
-          </a:prstGeom>
-          <a:noFill/>
-          <a:ln/>
-        </p:spPr>
-        <p:txBody>
-          <a:bodyPr wrap="square" lIns="0" tIns="0" rIns="0" bIns="0" rtlCol="0" anchor="ctr"/>
-          <a:lstStyle/>
-          <a:p>
-            <a:pPr marL="0" indent="0">
-              <a:buNone/>
-            </a:pPr>
-            <a:r>
-              <a:rPr lang="en-US" sz="1000" dirty="0">
-                <a:solidFill>
-                  <a:srgbClr val="6B8CAE"/>
-                </a:solidFill>
-                <a:latin typeface="Calibri" pitchFamily="34" charset="0"/>
-                <a:ea typeface="Calibri" pitchFamily="34" charset="-122"/>
-                <a:cs typeface="Calibri" pitchFamily="34" charset="-120"/>
-              </a:rPr>
-              <a:t>No generaliza mejor en test</a:t>
-            </a:r>
-            <a:endParaRPr lang="en-US" sz="1000" dirty="0"/>
-          </a:p>
-        </p:txBody>
-      </p:sp>
-      <p:sp>
-        <p:nvSpPr>
-          <p:cNvPr id="52" name="Shape 37"/>
-          <p:cNvSpPr/>
-          <p:nvPr/>
-        </p:nvSpPr>
-        <p:spPr>
-          <a:xfrm>
-            <a:off x="0" y="4434840"/>
-            <a:ext cx="9144000" cy="685800"/>
+          <p:cNvPr id="49" name="Text 36"/>
+          <p:cNvSpPr/>
+          <p:nvPr/>
+        </p:nvSpPr>
+        <p:spPr>
+          <a:xfrm>
+            <a:off x="6501384" y="3950208"/>
+            <a:ext cx="2350008" cy="292608"/>
+          </a:xfrm>
+          <a:prstGeom prst="rect">
+            <a:avLst/>
+          </a:prstGeom>
+          <a:noFill/>
+          <a:ln/>
+        </p:spPr>
+        <p:txBody>
+          <a:bodyPr wrap="square" lIns="0" tIns="0" rIns="0" bIns="0" rtlCol="0" anchor="ctr"/>
+          <a:lstStyle/>
+          <a:p>
+            <a:pPr marL="0" indent="0">
+              <a:buNone/>
+            </a:pPr>
+            <a:r>
+              <a:rPr lang="en-US" sz="950" dirty="0">
+                <a:solidFill>
+                  <a:srgbClr val="B0C4D8"/>
+                </a:solidFill>
+                <a:latin typeface="Calibri" pitchFamily="34" charset="0"/>
+                <a:ea typeface="Calibri" pitchFamily="34" charset="-122"/>
+                <a:cs typeface="Calibri" pitchFamily="34" charset="-120"/>
+              </a:rPr>
+              <a:t>Trío óptimo confirmado: +modelos no ayudan (NB15)</a:t>
+            </a:r>
+            <a:endParaRPr lang="en-US" sz="950" dirty="0"/>
+          </a:p>
+        </p:txBody>
+      </p:sp>
+      <p:sp>
+        <p:nvSpPr>
+          <p:cNvPr id="50" name="Shape 37"/>
+          <p:cNvSpPr/>
+          <p:nvPr/>
+        </p:nvSpPr>
+        <p:spPr>
+          <a:xfrm>
+            <a:off x="0" y="4443984"/>
+            <a:ext cx="9144000" cy="694944"/>
           </a:xfrm>
           <a:prstGeom prst="rect">
             <a:avLst/>
@@ -11349,16 +11266,40 @@
           </a:ln>
         </p:spPr>
       </p:sp>
-      <p:sp>
-        <p:nvSpPr>
-          <p:cNvPr id="53" name="Text 38"/>
-          <p:cNvSpPr/>
-          <p:nvPr/>
-        </p:nvSpPr>
-        <p:spPr>
-          <a:xfrm>
-            <a:off x="457200" y="4480560"/>
-            <a:ext cx="8229600" cy="502920"/>
+      <p:pic>
+        <p:nvPicPr>
+          <p:cNvPr id="51" name="Image 11" descr="preencoded.png"/>
+          <p:cNvPicPr>
+            <a:picLocks noChangeAspect="1"/>
+          </p:cNvPicPr>
+          <p:nvPr/>
+        </p:nvPicPr>
+        <p:blipFill>
+          <a:blip r:embed="rId6"/>
+          <a:stretch>
+            <a:fillRect/>
+          </a:stretch>
+        </p:blipFill>
+        <p:spPr>
+          <a:xfrm>
+            <a:off x="411480" y="4617720"/>
+            <a:ext cx="228600" cy="228600"/>
+          </a:xfrm>
+          <a:prstGeom prst="rect">
+            <a:avLst/>
+          </a:prstGeom>
+        </p:spPr>
+      </p:pic>
+      <p:sp>
+        <p:nvSpPr>
+          <p:cNvPr id="52" name="Text 38"/>
+          <p:cNvSpPr/>
+          <p:nvPr/>
+        </p:nvSpPr>
+        <p:spPr>
+          <a:xfrm>
+            <a:off x="749808" y="4480560"/>
+            <a:ext cx="8138160" cy="548640"/>
           </a:xfrm>
           <a:prstGeom prst="rect">
             <a:avLst/>
@@ -11382,7 +11323,7 @@
                 <a:ea typeface="Calibri" pitchFamily="34" charset="-122"/>
                 <a:cs typeface="Calibri" pitchFamily="34" charset="-120"/>
               </a:rPr>
-              <a:t>📚 Dacrema et al. (2019) "Are We Really Making Much Progress?" (RecSys 2019): EASE^R y RP3beta están consistentemente entre los mejores métodos CF para datasets de e-commerce implícito. El resultado del proyecto está en línea con la literatura.</a:t>
+              <a:t>¿Por qué el ensemble supera a los individuales? EASE^R ve el espacio diferente (ρ=0.216). Juntos capturan señales complementarias → 0.0431 vs 0.0286 solo. Dacrema et al. (2019): métodos CF clásicos bien combinados superan DL en sparsidad alta.</a:t>
             </a:r>
             <a:endParaRPr lang="en-US" sz="1000" dirty="0"/>
           </a:p>
@@ -13046,11 +12987,11 @@
             <a:avLst/>
           </a:prstGeom>
           <a:solidFill>
-            <a:srgbClr val="00C8FF"/>
+            <a:srgbClr val="00E5A0"/>
           </a:solidFill>
           <a:ln w="12700">
             <a:solidFill>
-              <a:srgbClr val="00C8FF"/>
+              <a:srgbClr val="00E5A0"/>
             </a:solidFill>
             <a:prstDash val="solid"/>
           </a:ln>
@@ -13071,11 +13012,38 @@
             <a:avLst/>
           </a:prstGeom>
           <a:solidFill>
-            <a:srgbClr val="00C8FF"/>
+            <a:srgbClr val="00E5A0"/>
           </a:solidFill>
           <a:ln w="12700">
             <a:solidFill>
-              <a:srgbClr val="00C8FF"/>
+              <a:srgbClr val="00E5A0"/>
+            </a:solidFill>
+            <a:prstDash val="solid"/>
+          </a:ln>
+        </p:spPr>
+      </p:sp>
+      <p:sp>
+        <p:nvSpPr>
+          <p:cNvPr id="5" name="Shape 3"/>
+          <p:cNvSpPr/>
+          <p:nvPr/>
+        </p:nvSpPr>
+        <p:spPr>
+          <a:xfrm>
+            <a:off x="-914400" y="-914400"/>
+            <a:ext cx="4572000" cy="4572000"/>
+          </a:xfrm>
+          <a:prstGeom prst="ellipse">
+            <a:avLst/>
+          </a:prstGeom>
+          <a:solidFill>
+            <a:srgbClr val="001535">
+              <a:alpha val="50000"/>
+            </a:srgbClr>
+          </a:solidFill>
+          <a:ln w="12700">
+            <a:solidFill>
+              <a:srgbClr val="001535"/>
             </a:solidFill>
             <a:prstDash val="solid"/>
           </a:ln>
@@ -13140,8 +13108,8 @@
         </p:nvSpPr>
         <p:spPr>
           <a:xfrm>
-            <a:off x="457200" y="2011680"/>
-            <a:ext cx="8229600" cy="384048"/>
+            <a:off x="457200" y="1993392"/>
+            <a:ext cx="8229600" cy="365760"/>
           </a:xfrm>
           <a:prstGeom prst="rect">
             <a:avLst/>
@@ -13165,7 +13133,7 @@
                 <a:ea typeface="Calibri" pitchFamily="34" charset="-122"/>
                 <a:cs typeface="Calibri" pitchFamily="34" charset="-120"/>
               </a:rPr>
-              <a:t>25+ modelos evaluados en 15 notebooks.</a:t>
+              <a:t>25+ modelos. 15 notebooks. Dataset real.</a:t>
             </a:r>
             <a:endParaRPr lang="en-US" sz="1600" dirty="0"/>
           </a:p>
@@ -13179,8 +13147,8 @@
         </p:nvSpPr>
         <p:spPr>
           <a:xfrm>
-            <a:off x="457200" y="2423160"/>
-            <a:ext cx="8229600" cy="384048"/>
+            <a:off x="457200" y="2395728"/>
+            <a:ext cx="8229600" cy="365760"/>
           </a:xfrm>
           <a:prstGeom prst="rect">
             <a:avLst/>
@@ -13204,7 +13172,7 @@
                 <a:ea typeface="Calibri" pitchFamily="34" charset="-122"/>
                 <a:cs typeface="Calibri" pitchFamily="34" charset="-120"/>
               </a:rPr>
-              <a:t>Split temporal sin data leakage.</a:t>
+              <a:t>El deep learning falló — los métodos clásicos ganaron.</a:t>
             </a:r>
             <a:endParaRPr lang="en-US" sz="1600" dirty="0"/>
           </a:p>
@@ -13218,8 +13186,8 @@
         </p:nvSpPr>
         <p:spPr>
           <a:xfrm>
-            <a:off x="457200" y="2834640"/>
-            <a:ext cx="8229600" cy="384048"/>
+            <a:off x="457200" y="2798064"/>
+            <a:ext cx="8229600" cy="365760"/>
           </a:xfrm>
           <a:prstGeom prst="rect">
             <a:avLst/>
@@ -13237,13 +13205,13 @@
             <a:r>
               <a:rPr lang="en-US" sz="1600" dirty="0">
                 <a:solidFill>
-                  <a:srgbClr val="A8E6F8"/>
-                </a:solidFill>
-                <a:latin typeface="Calibri" pitchFamily="34" charset="0"/>
-                <a:ea typeface="Calibri" pitchFamily="34" charset="-122"/>
-                <a:cs typeface="Calibri" pitchFamily="34" charset="-120"/>
-              </a:rPr>
-              <a:t>Deep learning: confirmación de Dacrema et al. (2019).</a:t>
+                  <a:srgbClr val="B0C4D8"/>
+                </a:solidFill>
+                <a:latin typeface="Calibri" pitchFamily="34" charset="0"/>
+                <a:ea typeface="Calibri" pitchFamily="34" charset="-122"/>
+                <a:cs typeface="Calibri" pitchFamily="34" charset="-120"/>
+              </a:rPr>
+              <a:t>La clave no fue el mejor modelo individual...</a:t>
             </a:r>
             <a:endParaRPr lang="en-US" sz="1600" dirty="0"/>
           </a:p>
@@ -13257,8 +13225,8 @@
         </p:nvSpPr>
         <p:spPr>
           <a:xfrm>
-            <a:off x="3200400" y="3337560"/>
-            <a:ext cx="2743200" cy="36576"/>
+            <a:off x="3200400" y="3291840"/>
+            <a:ext cx="2743200" cy="45720"/>
           </a:xfrm>
           <a:prstGeom prst="rect">
             <a:avLst/>
@@ -13282,8 +13250,8 @@
         </p:nvSpPr>
         <p:spPr>
           <a:xfrm>
-            <a:off x="457200" y="3474720"/>
-            <a:ext cx="8229600" cy="530352"/>
+            <a:off x="457200" y="3401568"/>
+            <a:ext cx="8229600" cy="475488"/>
           </a:xfrm>
           <a:prstGeom prst="rect">
             <a:avLst/>
@@ -13299,7 +13267,102 @@
               <a:buNone/>
             </a:pPr>
             <a:r>
-              <a:rPr lang="en-US" sz="2400" b="1" dirty="0">
+              <a:rPr lang="en-US" sz="2200" b="1" dirty="0">
+                <a:solidFill>
+                  <a:srgbClr val="00E5A0"/>
+                </a:solidFill>
+                <a:latin typeface="Calibri" pitchFamily="34" charset="0"/>
+                <a:ea typeface="Calibri" pitchFamily="34" charset="-122"/>
+                <a:cs typeface="Calibri" pitchFamily="34" charset="-120"/>
+              </a:rPr>
+              <a:t>...sino combinarlos inteligentemente.</a:t>
+            </a:r>
+            <a:endParaRPr lang="en-US" sz="2200" dirty="0"/>
+          </a:p>
+        </p:txBody>
+      </p:sp>
+      <p:sp>
+        <p:nvSpPr>
+          <p:cNvPr id="13" name="Shape 10"/>
+          <p:cNvSpPr/>
+          <p:nvPr/>
+        </p:nvSpPr>
+        <p:spPr>
+          <a:xfrm>
+            <a:off x="1371600" y="3977640"/>
+            <a:ext cx="6400800" cy="868680"/>
+          </a:xfrm>
+          <a:prstGeom prst="rect">
+            <a:avLst/>
+          </a:prstGeom>
+          <a:solidFill>
+            <a:srgbClr val="001A0A"/>
+          </a:solidFill>
+          <a:ln w="12700">
+            <a:solidFill>
+              <a:srgbClr val="00E5A0"/>
+            </a:solidFill>
+            <a:prstDash val="solid"/>
+          </a:ln>
+          <a:effectLst>
+            <a:outerShdw blurRad="76200" dist="25400" dir="8100000" algn="bl" rotWithShape="0">
+              <a:srgbClr val="000000">
+                <a:alpha val="25000"/>
+              </a:srgbClr>
+            </a:outerShdw>
+          </a:effectLst>
+        </p:spPr>
+      </p:sp>
+      <p:pic>
+        <p:nvPicPr>
+          <p:cNvPr id="14" name="Image 1" descr="preencoded.png"/>
+          <p:cNvPicPr>
+            <a:picLocks noChangeAspect="1"/>
+          </p:cNvPicPr>
+          <p:nvPr/>
+        </p:nvPicPr>
+        <p:blipFill>
+          <a:blip r:embed="rId4"/>
+          <a:stretch>
+            <a:fillRect/>
+          </a:stretch>
+        </p:blipFill>
+        <p:spPr>
+          <a:xfrm>
+            <a:off x="1572768" y="4114800"/>
+            <a:ext cx="411480" cy="411480"/>
+          </a:xfrm>
+          <a:prstGeom prst="rect">
+            <a:avLst/>
+          </a:prstGeom>
+        </p:spPr>
+      </p:pic>
+      <p:sp>
+        <p:nvSpPr>
+          <p:cNvPr id="15" name="Text 11"/>
+          <p:cNvSpPr/>
+          <p:nvPr/>
+        </p:nvSpPr>
+        <p:spPr>
+          <a:xfrm>
+            <a:off x="2084832" y="4023360"/>
+            <a:ext cx="5486400" cy="411480"/>
+          </a:xfrm>
+          <a:prstGeom prst="rect">
+            <a:avLst/>
+          </a:prstGeom>
+          <a:noFill/>
+          <a:ln/>
+        </p:spPr>
+        <p:txBody>
+          <a:bodyPr wrap="square" lIns="0" tIns="0" rIns="0" bIns="0" rtlCol="0" anchor="ctr"/>
+          <a:lstStyle/>
+          <a:p>
+            <a:pPr marL="0" indent="0" algn="ctr">
+              <a:buNone/>
+            </a:pPr>
+            <a:r>
+              <a:rPr lang="en-US" sz="1500" b="1" dirty="0">
                 <a:solidFill>
                   <a:srgbClr val="FFFFFF"/>
                 </a:solidFill>
@@ -13307,22 +13370,22 @@
                 <a:ea typeface="Calibri" pitchFamily="34" charset="-122"/>
                 <a:cs typeface="Calibri" pitchFamily="34" charset="-120"/>
               </a:rPr>
-              <a:t>Ensemble Optimizado · NDCG@10 = 0.0431 · +50.8%</a:t>
-            </a:r>
-            <a:endParaRPr lang="en-US" sz="2400" dirty="0"/>
-          </a:p>
-        </p:txBody>
-      </p:sp>
-      <p:sp>
-        <p:nvSpPr>
-          <p:cNvPr id="13" name="Text 10"/>
-          <p:cNvSpPr/>
-          <p:nvPr/>
-        </p:nvSpPr>
-        <p:spPr>
-          <a:xfrm>
-            <a:off x="457200" y="4114800"/>
-            <a:ext cx="8229600" cy="457200"/>
+              <a:t>Ensemble Optimizado  ·  NDCG@10 = 0.0431  ·  +50.8% vs baseline</a:t>
+            </a:r>
+            <a:endParaRPr lang="en-US" sz="1500" dirty="0"/>
+          </a:p>
+        </p:txBody>
+      </p:sp>
+      <p:sp>
+        <p:nvSpPr>
+          <p:cNvPr id="16" name="Text 12"/>
+          <p:cNvSpPr/>
+          <p:nvPr/>
+        </p:nvSpPr>
+        <p:spPr>
+          <a:xfrm>
+            <a:off x="2084832" y="4434840"/>
+            <a:ext cx="5486400" cy="256032"/>
           </a:xfrm>
           <a:prstGeom prst="rect">
             <a:avLst/>
@@ -13338,39 +13401,17 @@
               <a:buNone/>
             </a:pPr>
             <a:r>
-              <a:rPr lang="en-US" sz="1600" b="1" i="1" dirty="0">
-                <a:solidFill>
-                  <a:srgbClr val="00C8FF"/>
-                </a:solidFill>
-                <a:latin typeface="Calibri" pitchFamily="34" charset="0"/>
-                <a:ea typeface="Calibri" pitchFamily="34" charset="-122"/>
-                <a:cs typeface="Calibri" pitchFamily="34" charset="-120"/>
-              </a:rPr>
-              <a:t>¿</a:t>
-            </a:r>
-            <a:r>
-              <a:rPr lang="en-US" sz="1600" b="1" i="1" dirty="0" err="1">
-                <a:solidFill>
-                  <a:srgbClr val="00C8FF"/>
-                </a:solidFill>
-                <a:latin typeface="Calibri" pitchFamily="34" charset="0"/>
-                <a:ea typeface="Calibri" pitchFamily="34" charset="-122"/>
-                <a:cs typeface="Calibri" pitchFamily="34" charset="-120"/>
-              </a:rPr>
-              <a:t>Preguntas</a:t>
-            </a:r>
-            <a:r>
-              <a:rPr lang="en-US" sz="1600" b="1" i="1" dirty="0">
-                <a:solidFill>
-                  <a:srgbClr val="00C8FF"/>
-                </a:solidFill>
-                <a:latin typeface="Calibri" pitchFamily="34" charset="0"/>
-                <a:ea typeface="Calibri" pitchFamily="34" charset="-122"/>
-                <a:cs typeface="Calibri" pitchFamily="34" charset="-120"/>
-              </a:rPr>
-              <a:t>?</a:t>
-            </a:r>
-            <a:endParaRPr lang="en-US" sz="1600" dirty="0"/>
+              <a:rPr lang="en-US" sz="1000" dirty="0">
+                <a:solidFill>
+                  <a:srgbClr val="A8E6F8"/>
+                </a:solidFill>
+                <a:latin typeface="Calibri" pitchFamily="34" charset="0"/>
+                <a:ea typeface="Calibri" pitchFamily="34" charset="-122"/>
+                <a:cs typeface="Calibri" pitchFamily="34" charset="-120"/>
+              </a:rPr>
+              <a:t>RP3+TD · EASE^R · RP3+MB+TD  |  Pesos: 0.023 / 0.021 / 0.956  |  Spearman ρ=0.216</a:t>
+            </a:r>
+            <a:endParaRPr lang="en-US" sz="1000" dirty="0"/>
           </a:p>
         </p:txBody>
       </p:sp>
@@ -28208,7 +28249,7 @@
                 <a:ea typeface="Calibri" pitchFamily="34" charset="-122"/>
                 <a:cs typeface="Calibri" pitchFamily="34" charset="-120"/>
               </a:rPr>
-              <a:t>¿Por qué gana RP3beta?</a:t>
+              <a:t>¿Por qué RP3beta es el mejor individual?</a:t>
             </a:r>
             <a:endParaRPr lang="en-US" sz="1200" dirty="0"/>
           </a:p>

--- a/presentacion/nexus_tecnico_v2.pptx
+++ b/presentacion/nexus_tecnico_v2.pptx
@@ -124,6 +124,295 @@
     </p:ext>
   </p:extLst>
 </p:presentation>
+</file>
+
+<file path=ppt/changesInfos/changesInfo1.xml><?xml version="1.0" encoding="utf-8"?>
+<pc:chgInfo xmlns:a="http://schemas.openxmlformats.org/drawingml/2006/main" xmlns:r="http://schemas.openxmlformats.org/officeDocument/2006/relationships" xmlns:ac="http://schemas.microsoft.com/office/drawing/2013/main/command" xmlns:pc="http://schemas.microsoft.com/office/powerpoint/2013/main/command">
+  <pc:docChgLst>
+    <pc:chgData name="Leila Maria Abduca" userId="b2eb59c3-4a0c-4042-a308-940cfd8606aa" providerId="ADAL" clId="{3096589E-A249-4E20-8EE7-251CDCC4F39D}"/>
+    <pc:docChg chg="undo custSel modSld">
+      <pc:chgData name="Leila Maria Abduca" userId="b2eb59c3-4a0c-4042-a308-940cfd8606aa" providerId="ADAL" clId="{3096589E-A249-4E20-8EE7-251CDCC4F39D}" dt="2026-03-23T21:41:35.968" v="582" actId="108"/>
+      <pc:docMkLst>
+        <pc:docMk/>
+      </pc:docMkLst>
+      <pc:sldChg chg="modSp mod">
+        <pc:chgData name="Leila Maria Abduca" userId="b2eb59c3-4a0c-4042-a308-940cfd8606aa" providerId="ADAL" clId="{3096589E-A249-4E20-8EE7-251CDCC4F39D}" dt="2026-03-23T15:41:52.502" v="0" actId="6549"/>
+        <pc:sldMkLst>
+          <pc:docMk/>
+          <pc:sldMk cId="0" sldId="257"/>
+        </pc:sldMkLst>
+        <pc:spChg chg="mod">
+          <ac:chgData name="Leila Maria Abduca" userId="b2eb59c3-4a0c-4042-a308-940cfd8606aa" providerId="ADAL" clId="{3096589E-A249-4E20-8EE7-251CDCC4F39D}" dt="2026-03-23T15:41:52.502" v="0" actId="6549"/>
+          <ac:spMkLst>
+            <pc:docMk/>
+            <pc:sldMk cId="0" sldId="257"/>
+            <ac:spMk id="22" creationId="{00000000-0000-0000-0000-000000000000}"/>
+          </ac:spMkLst>
+        </pc:spChg>
+      </pc:sldChg>
+      <pc:sldChg chg="addSp delSp modSp mod">
+        <pc:chgData name="Leila Maria Abduca" userId="b2eb59c3-4a0c-4042-a308-940cfd8606aa" providerId="ADAL" clId="{3096589E-A249-4E20-8EE7-251CDCC4F39D}" dt="2026-03-23T21:41:35.968" v="582" actId="108"/>
+        <pc:sldMkLst>
+          <pc:docMk/>
+          <pc:sldMk cId="0" sldId="258"/>
+        </pc:sldMkLst>
+        <pc:spChg chg="mod">
+          <ac:chgData name="Leila Maria Abduca" userId="b2eb59c3-4a0c-4042-a308-940cfd8606aa" providerId="ADAL" clId="{3096589E-A249-4E20-8EE7-251CDCC4F39D}" dt="2026-03-23T15:43:37.988" v="41" actId="1038"/>
+          <ac:spMkLst>
+            <pc:docMk/>
+            <pc:sldMk cId="0" sldId="258"/>
+            <ac:spMk id="2" creationId="{00000000-0000-0000-0000-000000000000}"/>
+          </ac:spMkLst>
+        </pc:spChg>
+        <pc:spChg chg="del">
+          <ac:chgData name="Leila Maria Abduca" userId="b2eb59c3-4a0c-4042-a308-940cfd8606aa" providerId="ADAL" clId="{3096589E-A249-4E20-8EE7-251CDCC4F39D}" dt="2026-03-23T15:44:48.193" v="44" actId="478"/>
+          <ac:spMkLst>
+            <pc:docMk/>
+            <pc:sldMk cId="0" sldId="258"/>
+            <ac:spMk id="8" creationId="{00000000-0000-0000-0000-000000000000}"/>
+          </ac:spMkLst>
+        </pc:spChg>
+        <pc:spChg chg="mod">
+          <ac:chgData name="Leila Maria Abduca" userId="b2eb59c3-4a0c-4042-a308-940cfd8606aa" providerId="ADAL" clId="{3096589E-A249-4E20-8EE7-251CDCC4F39D}" dt="2026-03-23T20:34:49.572" v="422" actId="20577"/>
+          <ac:spMkLst>
+            <pc:docMk/>
+            <pc:sldMk cId="0" sldId="258"/>
+            <ac:spMk id="22" creationId="{00000000-0000-0000-0000-000000000000}"/>
+          </ac:spMkLst>
+        </pc:spChg>
+        <pc:spChg chg="mod">
+          <ac:chgData name="Leila Maria Abduca" userId="b2eb59c3-4a0c-4042-a308-940cfd8606aa" providerId="ADAL" clId="{3096589E-A249-4E20-8EE7-251CDCC4F39D}" dt="2026-03-23T20:26:23.909" v="394" actId="20577"/>
+          <ac:spMkLst>
+            <pc:docMk/>
+            <pc:sldMk cId="0" sldId="258"/>
+            <ac:spMk id="23" creationId="{00000000-0000-0000-0000-000000000000}"/>
+          </ac:spMkLst>
+        </pc:spChg>
+        <pc:spChg chg="mod">
+          <ac:chgData name="Leila Maria Abduca" userId="b2eb59c3-4a0c-4042-a308-940cfd8606aa" providerId="ADAL" clId="{3096589E-A249-4E20-8EE7-251CDCC4F39D}" dt="2026-03-23T20:31:12.499" v="421" actId="20577"/>
+          <ac:spMkLst>
+            <pc:docMk/>
+            <pc:sldMk cId="0" sldId="258"/>
+            <ac:spMk id="24" creationId="{00000000-0000-0000-0000-000000000000}"/>
+          </ac:spMkLst>
+        </pc:spChg>
+        <pc:spChg chg="mod">
+          <ac:chgData name="Leila Maria Abduca" userId="b2eb59c3-4a0c-4042-a308-940cfd8606aa" providerId="ADAL" clId="{3096589E-A249-4E20-8EE7-251CDCC4F39D}" dt="2026-03-23T21:37:42.870" v="504" actId="20577"/>
+          <ac:spMkLst>
+            <pc:docMk/>
+            <pc:sldMk cId="0" sldId="258"/>
+            <ac:spMk id="25" creationId="{00000000-0000-0000-0000-000000000000}"/>
+          </ac:spMkLst>
+        </pc:spChg>
+        <pc:spChg chg="mod">
+          <ac:chgData name="Leila Maria Abduca" userId="b2eb59c3-4a0c-4042-a308-940cfd8606aa" providerId="ADAL" clId="{3096589E-A249-4E20-8EE7-251CDCC4F39D}" dt="2026-03-23T15:43:37.988" v="41" actId="1038"/>
+          <ac:spMkLst>
+            <pc:docMk/>
+            <pc:sldMk cId="0" sldId="258"/>
+            <ac:spMk id="29" creationId="{00000000-0000-0000-0000-000000000000}"/>
+          </ac:spMkLst>
+        </pc:spChg>
+        <pc:spChg chg="mod">
+          <ac:chgData name="Leila Maria Abduca" userId="b2eb59c3-4a0c-4042-a308-940cfd8606aa" providerId="ADAL" clId="{3096589E-A249-4E20-8EE7-251CDCC4F39D}" dt="2026-03-23T15:43:37.988" v="41" actId="1038"/>
+          <ac:spMkLst>
+            <pc:docMk/>
+            <pc:sldMk cId="0" sldId="258"/>
+            <ac:spMk id="32" creationId="{00000000-0000-0000-0000-000000000000}"/>
+          </ac:spMkLst>
+        </pc:spChg>
+        <pc:spChg chg="mod">
+          <ac:chgData name="Leila Maria Abduca" userId="b2eb59c3-4a0c-4042-a308-940cfd8606aa" providerId="ADAL" clId="{3096589E-A249-4E20-8EE7-251CDCC4F39D}" dt="2026-03-23T15:43:37.988" v="41" actId="1038"/>
+          <ac:spMkLst>
+            <pc:docMk/>
+            <pc:sldMk cId="0" sldId="258"/>
+            <ac:spMk id="35" creationId="{00000000-0000-0000-0000-000000000000}"/>
+          </ac:spMkLst>
+        </pc:spChg>
+        <pc:spChg chg="mod">
+          <ac:chgData name="Leila Maria Abduca" userId="b2eb59c3-4a0c-4042-a308-940cfd8606aa" providerId="ADAL" clId="{3096589E-A249-4E20-8EE7-251CDCC4F39D}" dt="2026-03-23T21:41:06.202" v="579" actId="1076"/>
+          <ac:spMkLst>
+            <pc:docMk/>
+            <pc:sldMk cId="0" sldId="258"/>
+            <ac:spMk id="36" creationId="{00000000-0000-0000-0000-000000000000}"/>
+          </ac:spMkLst>
+        </pc:spChg>
+        <pc:spChg chg="mod">
+          <ac:chgData name="Leila Maria Abduca" userId="b2eb59c3-4a0c-4042-a308-940cfd8606aa" providerId="ADAL" clId="{3096589E-A249-4E20-8EE7-251CDCC4F39D}" dt="2026-03-23T21:41:35.968" v="582" actId="108"/>
+          <ac:spMkLst>
+            <pc:docMk/>
+            <pc:sldMk cId="0" sldId="258"/>
+            <ac:spMk id="39" creationId="{00000000-0000-0000-0000-000000000000}"/>
+          </ac:spMkLst>
+        </pc:spChg>
+        <pc:spChg chg="add mod">
+          <ac:chgData name="Leila Maria Abduca" userId="b2eb59c3-4a0c-4042-a308-940cfd8606aa" providerId="ADAL" clId="{3096589E-A249-4E20-8EE7-251CDCC4F39D}" dt="2026-03-23T21:38:11.189" v="516" actId="1076"/>
+          <ac:spMkLst>
+            <pc:docMk/>
+            <pc:sldMk cId="0" sldId="258"/>
+            <ac:spMk id="47" creationId="{7B53D529-C7B9-7C6C-085B-0A6EB65E1DDD}"/>
+          </ac:spMkLst>
+        </pc:spChg>
+        <pc:spChg chg="add mod">
+          <ac:chgData name="Leila Maria Abduca" userId="b2eb59c3-4a0c-4042-a308-940cfd8606aa" providerId="ADAL" clId="{3096589E-A249-4E20-8EE7-251CDCC4F39D}" dt="2026-03-23T21:40:51.232" v="577" actId="1076"/>
+          <ac:spMkLst>
+            <pc:docMk/>
+            <pc:sldMk cId="0" sldId="258"/>
+            <ac:spMk id="49" creationId="{C9546C0B-1849-41B9-E320-7E86027248C2}"/>
+          </ac:spMkLst>
+        </pc:spChg>
+        <pc:picChg chg="add mod">
+          <ac:chgData name="Leila Maria Abduca" userId="b2eb59c3-4a0c-4042-a308-940cfd8606aa" providerId="ADAL" clId="{3096589E-A249-4E20-8EE7-251CDCC4F39D}" dt="2026-03-23T21:35:31.754" v="493" actId="1076"/>
+          <ac:picMkLst>
+            <pc:docMk/>
+            <pc:sldMk cId="0" sldId="258"/>
+            <ac:picMk id="46" creationId="{0F4E32E8-778B-A395-1C09-6130001C59A3}"/>
+          </ac:picMkLst>
+        </pc:picChg>
+        <pc:picChg chg="add del mod">
+          <ac:chgData name="Leila Maria Abduca" userId="b2eb59c3-4a0c-4042-a308-940cfd8606aa" providerId="ADAL" clId="{3096589E-A249-4E20-8EE7-251CDCC4F39D}" dt="2026-03-23T21:36:35.666" v="496" actId="478"/>
+          <ac:picMkLst>
+            <pc:docMk/>
+            <pc:sldMk cId="0" sldId="258"/>
+            <ac:picMk id="48" creationId="{78D313B6-50C8-5F0D-E1B3-CEADC7992FAF}"/>
+          </ac:picMkLst>
+        </pc:picChg>
+      </pc:sldChg>
+      <pc:sldChg chg="modSp mod">
+        <pc:chgData name="Leila Maria Abduca" userId="b2eb59c3-4a0c-4042-a308-940cfd8606aa" providerId="ADAL" clId="{3096589E-A249-4E20-8EE7-251CDCC4F39D}" dt="2026-03-23T15:46:37.502" v="51"/>
+        <pc:sldMkLst>
+          <pc:docMk/>
+          <pc:sldMk cId="0" sldId="259"/>
+        </pc:sldMkLst>
+        <pc:spChg chg="mod">
+          <ac:chgData name="Leila Maria Abduca" userId="b2eb59c3-4a0c-4042-a308-940cfd8606aa" providerId="ADAL" clId="{3096589E-A249-4E20-8EE7-251CDCC4F39D}" dt="2026-03-23T15:46:06.305" v="46" actId="1076"/>
+          <ac:spMkLst>
+            <pc:docMk/>
+            <pc:sldMk cId="0" sldId="259"/>
+            <ac:spMk id="21" creationId="{00000000-0000-0000-0000-000000000000}"/>
+          </ac:spMkLst>
+        </pc:spChg>
+        <pc:spChg chg="mod">
+          <ac:chgData name="Leila Maria Abduca" userId="b2eb59c3-4a0c-4042-a308-940cfd8606aa" providerId="ADAL" clId="{3096589E-A249-4E20-8EE7-251CDCC4F39D}" dt="2026-03-23T15:46:26.132" v="48" actId="21"/>
+          <ac:spMkLst>
+            <pc:docMk/>
+            <pc:sldMk cId="0" sldId="259"/>
+            <ac:spMk id="28" creationId="{00000000-0000-0000-0000-000000000000}"/>
+          </ac:spMkLst>
+        </pc:spChg>
+        <pc:spChg chg="mod">
+          <ac:chgData name="Leila Maria Abduca" userId="b2eb59c3-4a0c-4042-a308-940cfd8606aa" providerId="ADAL" clId="{3096589E-A249-4E20-8EE7-251CDCC4F39D}" dt="2026-03-23T15:46:34.701" v="50" actId="21"/>
+          <ac:spMkLst>
+            <pc:docMk/>
+            <pc:sldMk cId="0" sldId="259"/>
+            <ac:spMk id="30" creationId="{00000000-0000-0000-0000-000000000000}"/>
+          </ac:spMkLst>
+        </pc:spChg>
+        <pc:spChg chg="mod">
+          <ac:chgData name="Leila Maria Abduca" userId="b2eb59c3-4a0c-4042-a308-940cfd8606aa" providerId="ADAL" clId="{3096589E-A249-4E20-8EE7-251CDCC4F39D}" dt="2026-03-23T15:46:37.502" v="51"/>
+          <ac:spMkLst>
+            <pc:docMk/>
+            <pc:sldMk cId="0" sldId="259"/>
+            <ac:spMk id="32" creationId="{00000000-0000-0000-0000-000000000000}"/>
+          </ac:spMkLst>
+        </pc:spChg>
+      </pc:sldChg>
+      <pc:sldChg chg="modSp mod">
+        <pc:chgData name="Leila Maria Abduca" userId="b2eb59c3-4a0c-4042-a308-940cfd8606aa" providerId="ADAL" clId="{3096589E-A249-4E20-8EE7-251CDCC4F39D}" dt="2026-03-23T19:25:55.791" v="62" actId="20577"/>
+        <pc:sldMkLst>
+          <pc:docMk/>
+          <pc:sldMk cId="0" sldId="260"/>
+        </pc:sldMkLst>
+        <pc:spChg chg="mod">
+          <ac:chgData name="Leila Maria Abduca" userId="b2eb59c3-4a0c-4042-a308-940cfd8606aa" providerId="ADAL" clId="{3096589E-A249-4E20-8EE7-251CDCC4F39D}" dt="2026-03-23T19:25:55.791" v="62" actId="20577"/>
+          <ac:spMkLst>
+            <pc:docMk/>
+            <pc:sldMk cId="0" sldId="260"/>
+            <ac:spMk id="35" creationId="{00000000-0000-0000-0000-000000000000}"/>
+          </ac:spMkLst>
+        </pc:spChg>
+      </pc:sldChg>
+      <pc:sldChg chg="modSp mod">
+        <pc:chgData name="Leila Maria Abduca" userId="b2eb59c3-4a0c-4042-a308-940cfd8606aa" providerId="ADAL" clId="{3096589E-A249-4E20-8EE7-251CDCC4F39D}" dt="2026-03-23T19:38:54.147" v="363" actId="20577"/>
+        <pc:sldMkLst>
+          <pc:docMk/>
+          <pc:sldMk cId="0" sldId="261"/>
+        </pc:sldMkLst>
+        <pc:spChg chg="mod">
+          <ac:chgData name="Leila Maria Abduca" userId="b2eb59c3-4a0c-4042-a308-940cfd8606aa" providerId="ADAL" clId="{3096589E-A249-4E20-8EE7-251CDCC4F39D}" dt="2026-03-23T19:35:19.554" v="346" actId="20577"/>
+          <ac:spMkLst>
+            <pc:docMk/>
+            <pc:sldMk cId="0" sldId="261"/>
+            <ac:spMk id="2" creationId="{00000000-0000-0000-0000-000000000000}"/>
+          </ac:spMkLst>
+        </pc:spChg>
+        <pc:spChg chg="mod">
+          <ac:chgData name="Leila Maria Abduca" userId="b2eb59c3-4a0c-4042-a308-940cfd8606aa" providerId="ADAL" clId="{3096589E-A249-4E20-8EE7-251CDCC4F39D}" dt="2026-03-23T19:35:23.128" v="357" actId="20577"/>
+          <ac:spMkLst>
+            <pc:docMk/>
+            <pc:sldMk cId="0" sldId="261"/>
+            <ac:spMk id="7" creationId="{00000000-0000-0000-0000-000000000000}"/>
+          </ac:spMkLst>
+        </pc:spChg>
+        <pc:spChg chg="mod">
+          <ac:chgData name="Leila Maria Abduca" userId="b2eb59c3-4a0c-4042-a308-940cfd8606aa" providerId="ADAL" clId="{3096589E-A249-4E20-8EE7-251CDCC4F39D}" dt="2026-03-23T19:29:17.932" v="96" actId="20577"/>
+          <ac:spMkLst>
+            <pc:docMk/>
+            <pc:sldMk cId="0" sldId="261"/>
+            <ac:spMk id="16" creationId="{00000000-0000-0000-0000-000000000000}"/>
+          </ac:spMkLst>
+        </pc:spChg>
+        <pc:spChg chg="mod">
+          <ac:chgData name="Leila Maria Abduca" userId="b2eb59c3-4a0c-4042-a308-940cfd8606aa" providerId="ADAL" clId="{3096589E-A249-4E20-8EE7-251CDCC4F39D}" dt="2026-03-23T19:27:09.710" v="95" actId="20577"/>
+          <ac:spMkLst>
+            <pc:docMk/>
+            <pc:sldMk cId="0" sldId="261"/>
+            <ac:spMk id="17" creationId="{00000000-0000-0000-0000-000000000000}"/>
+          </ac:spMkLst>
+        </pc:spChg>
+        <pc:spChg chg="mod">
+          <ac:chgData name="Leila Maria Abduca" userId="b2eb59c3-4a0c-4042-a308-940cfd8606aa" providerId="ADAL" clId="{3096589E-A249-4E20-8EE7-251CDCC4F39D}" dt="2026-03-23T19:31:13.405" v="270" actId="20577"/>
+          <ac:spMkLst>
+            <pc:docMk/>
+            <pc:sldMk cId="0" sldId="261"/>
+            <ac:spMk id="25" creationId="{00000000-0000-0000-0000-000000000000}"/>
+          </ac:spMkLst>
+        </pc:spChg>
+        <pc:spChg chg="mod">
+          <ac:chgData name="Leila Maria Abduca" userId="b2eb59c3-4a0c-4042-a308-940cfd8606aa" providerId="ADAL" clId="{3096589E-A249-4E20-8EE7-251CDCC4F39D}" dt="2026-03-23T19:30:31.087" v="196" actId="20577"/>
+          <ac:spMkLst>
+            <pc:docMk/>
+            <pc:sldMk cId="0" sldId="261"/>
+            <ac:spMk id="29" creationId="{00000000-0000-0000-0000-000000000000}"/>
+          </ac:spMkLst>
+        </pc:spChg>
+        <pc:spChg chg="mod">
+          <ac:chgData name="Leila Maria Abduca" userId="b2eb59c3-4a0c-4042-a308-940cfd8606aa" providerId="ADAL" clId="{3096589E-A249-4E20-8EE7-251CDCC4F39D}" dt="2026-03-23T19:38:54.147" v="363" actId="20577"/>
+          <ac:spMkLst>
+            <pc:docMk/>
+            <pc:sldMk cId="0" sldId="261"/>
+            <ac:spMk id="33" creationId="{00000000-0000-0000-0000-000000000000}"/>
+          </ac:spMkLst>
+        </pc:spChg>
+        <pc:spChg chg="mod">
+          <ac:chgData name="Leila Maria Abduca" userId="b2eb59c3-4a0c-4042-a308-940cfd8606aa" providerId="ADAL" clId="{3096589E-A249-4E20-8EE7-251CDCC4F39D}" dt="2026-03-23T19:26:27.859" v="63" actId="20577"/>
+          <ac:spMkLst>
+            <pc:docMk/>
+            <pc:sldMk cId="0" sldId="261"/>
+            <ac:spMk id="40" creationId="{00000000-0000-0000-0000-000000000000}"/>
+          </ac:spMkLst>
+        </pc:spChg>
+        <pc:spChg chg="mod">
+          <ac:chgData name="Leila Maria Abduca" userId="b2eb59c3-4a0c-4042-a308-940cfd8606aa" providerId="ADAL" clId="{3096589E-A249-4E20-8EE7-251CDCC4F39D}" dt="2026-03-23T19:26:36.152" v="64" actId="20577"/>
+          <ac:spMkLst>
+            <pc:docMk/>
+            <pc:sldMk cId="0" sldId="261"/>
+            <ac:spMk id="41" creationId="{00000000-0000-0000-0000-000000000000}"/>
+          </ac:spMkLst>
+        </pc:spChg>
+      </pc:sldChg>
+    </pc:docChg>
+  </pc:docChgLst>
+</pc:chgInfo>
 </file>
 
 <file path=ppt/notesMasters/notesMaster1.xml><?xml version="1.0" encoding="utf-8"?>
@@ -14170,7 +14459,7 @@
                 <a:ea typeface="Calibri" pitchFamily="34" charset="-122"/>
                 <a:cs typeface="Calibri" pitchFamily="34" charset="-120"/>
               </a:rPr>
-              <a:t>Base (NB07-08)</a:t>
+              <a:t>Base</a:t>
             </a:r>
             <a:endParaRPr lang="en-US" sz="1300" dirty="0"/>
           </a:p>
@@ -14921,7 +15210,7 @@
         </p:nvSpPr>
         <p:spPr>
           <a:xfrm>
-            <a:off x="0" y="0"/>
+            <a:off x="-139750" y="45720"/>
             <a:ext cx="9144000" cy="5143500"/>
           </a:xfrm>
           <a:prstGeom prst="rect">
@@ -15087,45 +15376,6 @@
               <a:t>Dataset: RetailRocket (Kaggle)</a:t>
             </a:r>
             <a:endParaRPr lang="en-US" sz="2600" dirty="0"/>
-          </a:p>
-        </p:txBody>
-      </p:sp>
-      <p:sp>
-        <p:nvSpPr>
-          <p:cNvPr id="8" name="Text 5"/>
-          <p:cNvSpPr/>
-          <p:nvPr/>
-        </p:nvSpPr>
-        <p:spPr>
-          <a:xfrm>
-            <a:off x="457200" y="704088"/>
-            <a:ext cx="7498080" cy="256032"/>
-          </a:xfrm>
-          <a:prstGeom prst="rect">
-            <a:avLst/>
-          </a:prstGeom>
-          <a:noFill/>
-          <a:ln/>
-        </p:spPr>
-        <p:txBody>
-          <a:bodyPr wrap="square" lIns="0" tIns="0" rIns="0" bIns="0" rtlCol="0" anchor="ctr"/>
-          <a:lstStyle/>
-          <a:p>
-            <a:pPr marL="0" indent="0">
-              <a:buNone/>
-            </a:pPr>
-            <a:r>
-              <a:rPr lang="en-US" sz="1200" dirty="0">
-                <a:solidFill>
-                  <a:srgbClr val="00C8FF"/>
-                </a:solidFill>
-                <a:latin typeface="Calibri" pitchFamily="34" charset="0"/>
-                <a:ea typeface="Calibri" pitchFamily="34" charset="-122"/>
-                <a:cs typeface="Calibri" pitchFamily="34" charset="-120"/>
-              </a:rPr>
-              <a:t>NB01–NB03 · 2.75M eventos reales de e-commerce</a:t>
-            </a:r>
-            <a:endParaRPr lang="en-US" sz="1200" dirty="0"/>
           </a:p>
         </p:txBody>
       </p:sp>
@@ -15641,7 +15891,7 @@
                 <a:ea typeface="Calibri" pitchFamily="34" charset="-122"/>
                 <a:cs typeface="Calibri" pitchFamily="34" charset="-120"/>
               </a:rPr>
-              <a:t>99.999%</a:t>
+              <a:t>99.8%</a:t>
             </a:r>
             <a:endParaRPr lang="en-US" sz="2200" dirty="0"/>
           </a:p>
@@ -15672,6 +15922,17 @@
               <a:buNone/>
             </a:pPr>
             <a:r>
+              <a:rPr lang="en-US" sz="1100" b="1" dirty="0" err="1">
+                <a:solidFill>
+                  <a:srgbClr val="FFFFFF"/>
+                </a:solidFill>
+                <a:latin typeface="Calibri" pitchFamily="34" charset="0"/>
+                <a:ea typeface="Calibri" pitchFamily="34" charset="-122"/>
+                <a:cs typeface="Calibri" pitchFamily="34" charset="-120"/>
+              </a:rPr>
+              <a:t>Propiedades</a:t>
+            </a:r>
+            <a:r>
               <a:rPr lang="en-US" sz="1100" b="1" dirty="0">
                 <a:solidFill>
                   <a:srgbClr val="FFFFFF"/>
@@ -15680,7 +15941,18 @@
                 <a:ea typeface="Calibri" pitchFamily="34" charset="-122"/>
                 <a:cs typeface="Calibri" pitchFamily="34" charset="-120"/>
               </a:rPr>
-              <a:t>Sparsidad</a:t>
+              <a:t> </a:t>
+            </a:r>
+            <a:r>
+              <a:rPr lang="en-US" sz="1100" b="1" dirty="0" err="1">
+                <a:solidFill>
+                  <a:srgbClr val="FFFFFF"/>
+                </a:solidFill>
+                <a:latin typeface="Calibri" pitchFamily="34" charset="0"/>
+                <a:ea typeface="Calibri" pitchFamily="34" charset="-122"/>
+                <a:cs typeface="Calibri" pitchFamily="34" charset="-120"/>
+              </a:rPr>
+              <a:t>hasheadas</a:t>
             </a:r>
             <a:endParaRPr lang="en-US" sz="1100" dirty="0"/>
           </a:p>
@@ -15719,7 +15991,106 @@
                 <a:ea typeface="Calibri" pitchFamily="34" charset="-122"/>
                 <a:cs typeface="Calibri" pitchFamily="34" charset="-120"/>
               </a:rPr>
-              <a:t>de la matriz usuario-ítem</a:t>
+              <a:t>Se </a:t>
+            </a:r>
+            <a:r>
+              <a:rPr lang="en-US" sz="900" i="1" dirty="0" err="1">
+                <a:solidFill>
+                  <a:srgbClr val="6B8CAE"/>
+                </a:solidFill>
+                <a:latin typeface="Calibri" pitchFamily="34" charset="0"/>
+                <a:ea typeface="Calibri" pitchFamily="34" charset="-122"/>
+                <a:cs typeface="Calibri" pitchFamily="34" charset="-120"/>
+              </a:rPr>
+              <a:t>descartan</a:t>
+            </a:r>
+            <a:r>
+              <a:rPr lang="en-US" sz="900" i="1" dirty="0">
+                <a:solidFill>
+                  <a:srgbClr val="6B8CAE"/>
+                </a:solidFill>
+                <a:latin typeface="Calibri" pitchFamily="34" charset="0"/>
+                <a:ea typeface="Calibri" pitchFamily="34" charset="-122"/>
+                <a:cs typeface="Calibri" pitchFamily="34" charset="-120"/>
+              </a:rPr>
+              <a:t> </a:t>
+            </a:r>
+            <a:r>
+              <a:rPr lang="en-US" sz="900" i="1" dirty="0" err="1">
+                <a:solidFill>
+                  <a:srgbClr val="6B8CAE"/>
+                </a:solidFill>
+                <a:latin typeface="Calibri" pitchFamily="34" charset="0"/>
+                <a:ea typeface="Calibri" pitchFamily="34" charset="-122"/>
+                <a:cs typeface="Calibri" pitchFamily="34" charset="-120"/>
+              </a:rPr>
+              <a:t>modelos</a:t>
+            </a:r>
+            <a:r>
+              <a:rPr lang="en-US" sz="900" i="1" dirty="0">
+                <a:solidFill>
+                  <a:srgbClr val="6B8CAE"/>
+                </a:solidFill>
+                <a:latin typeface="Calibri" pitchFamily="34" charset="0"/>
+                <a:ea typeface="Calibri" pitchFamily="34" charset="-122"/>
+                <a:cs typeface="Calibri" pitchFamily="34" charset="-120"/>
+              </a:rPr>
+              <a:t> </a:t>
+            </a:r>
+            <a:r>
+              <a:rPr lang="en-US" sz="900" i="1" dirty="0" err="1">
+                <a:solidFill>
+                  <a:srgbClr val="6B8CAE"/>
+                </a:solidFill>
+                <a:latin typeface="Calibri" pitchFamily="34" charset="0"/>
+                <a:ea typeface="Calibri" pitchFamily="34" charset="-122"/>
+                <a:cs typeface="Calibri" pitchFamily="34" charset="-120"/>
+              </a:rPr>
+              <a:t>basados</a:t>
+            </a:r>
+            <a:r>
+              <a:rPr lang="en-US" sz="900" i="1" dirty="0">
+                <a:solidFill>
+                  <a:srgbClr val="6B8CAE"/>
+                </a:solidFill>
+                <a:latin typeface="Calibri" pitchFamily="34" charset="0"/>
+                <a:ea typeface="Calibri" pitchFamily="34" charset="-122"/>
+                <a:cs typeface="Calibri" pitchFamily="34" charset="-120"/>
+              </a:rPr>
+              <a:t> </a:t>
+            </a:r>
+            <a:r>
+              <a:rPr lang="en-US" sz="900" i="1" dirty="0" err="1">
+                <a:solidFill>
+                  <a:srgbClr val="6B8CAE"/>
+                </a:solidFill>
+                <a:latin typeface="Calibri" pitchFamily="34" charset="0"/>
+                <a:ea typeface="Calibri" pitchFamily="34" charset="-122"/>
+                <a:cs typeface="Calibri" pitchFamily="34" charset="-120"/>
+              </a:rPr>
+              <a:t>en</a:t>
+            </a:r>
+            <a:r>
+              <a:rPr lang="en-US" sz="900" i="1" dirty="0">
+                <a:solidFill>
+                  <a:srgbClr val="6B8CAE"/>
+                </a:solidFill>
+                <a:latin typeface="Calibri" pitchFamily="34" charset="0"/>
+                <a:ea typeface="Calibri" pitchFamily="34" charset="-122"/>
+                <a:cs typeface="Calibri" pitchFamily="34" charset="-120"/>
+              </a:rPr>
+              <a:t> </a:t>
+            </a:r>
+            <a:r>
+              <a:rPr lang="en-US" sz="900" i="1" dirty="0" err="1">
+                <a:solidFill>
+                  <a:srgbClr val="6B8CAE"/>
+                </a:solidFill>
+                <a:latin typeface="Calibri" pitchFamily="34" charset="0"/>
+                <a:ea typeface="Calibri" pitchFamily="34" charset="-122"/>
+                <a:cs typeface="Calibri" pitchFamily="34" charset="-120"/>
+              </a:rPr>
+              <a:t>contenido</a:t>
             </a:r>
             <a:endParaRPr lang="en-US" sz="900" dirty="0"/>
           </a:p>
@@ -15733,8 +16104,8 @@
         </p:nvSpPr>
         <p:spPr>
           <a:xfrm>
-            <a:off x="320040" y="2651760"/>
-            <a:ext cx="4206240" cy="2194560"/>
+            <a:off x="301752" y="2624328"/>
+            <a:ext cx="4206240" cy="2368296"/>
           </a:xfrm>
           <a:prstGeom prst="rect">
             <a:avLst/>
@@ -15756,6 +16127,13 @@
             </a:outerShdw>
           </a:effectLst>
         </p:spPr>
+        <p:txBody>
+          <a:bodyPr/>
+          <a:lstStyle/>
+          <a:p>
+            <a:endParaRPr lang="es-AR" dirty="0"/>
+          </a:p>
+        </p:txBody>
       </p:sp>
       <p:sp>
         <p:nvSpPr>
@@ -15868,7 +16246,7 @@
         </p:nvSpPr>
         <p:spPr>
           <a:xfrm>
-            <a:off x="4297680" y="3127248"/>
+            <a:off x="4047510" y="3135874"/>
             <a:ext cx="1645920" cy="274320"/>
           </a:xfrm>
           <a:prstGeom prst="rect">
@@ -15893,7 +16271,7 @@
                 <a:ea typeface="Calibri" pitchFamily="34" charset="-122"/>
                 <a:cs typeface="Calibri" pitchFamily="34" charset="-120"/>
               </a:rPr>
-              <a:t>89.7%  ~2.46M</a:t>
+              <a:t>89.7%</a:t>
             </a:r>
             <a:endParaRPr lang="en-US" sz="1000" dirty="0"/>
           </a:p>
@@ -15971,7 +16349,7 @@
         </p:nvSpPr>
         <p:spPr>
           <a:xfrm>
-            <a:off x="4297680" y="3675888"/>
+            <a:off x="4047510" y="3684514"/>
             <a:ext cx="1645920" cy="274320"/>
           </a:xfrm>
           <a:prstGeom prst="rect">
@@ -15996,7 +16374,7 @@
                 <a:ea typeface="Calibri" pitchFamily="34" charset="-122"/>
                 <a:cs typeface="Calibri" pitchFamily="34" charset="-120"/>
               </a:rPr>
-              <a:t>7.5%  ~200K</a:t>
+              <a:t>7.5%</a:t>
             </a:r>
             <a:endParaRPr lang="en-US" sz="1000" dirty="0"/>
           </a:p>
@@ -16074,7 +16452,7 @@
         </p:nvSpPr>
         <p:spPr>
           <a:xfrm>
-            <a:off x="4297680" y="4224528"/>
+            <a:off x="4047510" y="4233154"/>
             <a:ext cx="1645920" cy="274320"/>
           </a:xfrm>
           <a:prstGeom prst="rect">
@@ -16099,7 +16477,7 @@
                 <a:ea typeface="Calibri" pitchFamily="34" charset="-122"/>
                 <a:cs typeface="Calibri" pitchFamily="34" charset="-120"/>
               </a:rPr>
-              <a:t>2.8%  ~75K</a:t>
+              <a:t>2.8%</a:t>
             </a:r>
             <a:endParaRPr lang="en-US" sz="1000" dirty="0"/>
           </a:p>
@@ -16113,8 +16491,8 @@
         </p:nvSpPr>
         <p:spPr>
           <a:xfrm>
-            <a:off x="4754880" y="2651760"/>
-            <a:ext cx="4069080" cy="2194560"/>
+            <a:off x="4645152" y="2651760"/>
+            <a:ext cx="4069080" cy="2340864"/>
           </a:xfrm>
           <a:prstGeom prst="rect">
             <a:avLst/>
@@ -16221,20 +16599,44 @@
           <a:bodyPr wrap="square" lIns="0" tIns="0" rIns="0" bIns="0" rtlCol="0" anchor="ctr"/>
           <a:lstStyle/>
           <a:p>
+            <a:r>
+              <a:rPr lang="es-AR" sz="1100" dirty="0">
+                <a:solidFill>
+                  <a:srgbClr val="B0C4D8"/>
+                </a:solidFill>
+                <a:latin typeface="Calibri" pitchFamily="34" charset="0"/>
+                <a:ea typeface="Calibri" pitchFamily="34" charset="-122"/>
+                <a:cs typeface="Calibri" pitchFamily="34" charset="-120"/>
+              </a:rPr>
+              <a:t>89.8% de usuarios son </a:t>
+            </a:r>
+            <a:r>
+              <a:rPr lang="es-AR" sz="1100" dirty="0" err="1">
+                <a:solidFill>
+                  <a:srgbClr val="B0C4D8"/>
+                </a:solidFill>
+                <a:latin typeface="Calibri" pitchFamily="34" charset="0"/>
+                <a:ea typeface="Calibri" pitchFamily="34" charset="-122"/>
+                <a:cs typeface="Calibri" pitchFamily="34" charset="-120"/>
+              </a:rPr>
+              <a:t>one</a:t>
+            </a:r>
+            <a:r>
+              <a:rPr lang="es-AR" sz="1100" dirty="0">
+                <a:solidFill>
+                  <a:srgbClr val="B0C4D8"/>
+                </a:solidFill>
+                <a:latin typeface="Calibri" pitchFamily="34" charset="0"/>
+                <a:ea typeface="Calibri" pitchFamily="34" charset="-122"/>
+                <a:cs typeface="Calibri" pitchFamily="34" charset="-120"/>
+              </a:rPr>
+              <a:t>-time</a:t>
+            </a:r>
+          </a:p>
+          <a:p>
             <a:pPr marL="0" indent="0">
               <a:buNone/>
             </a:pPr>
-            <a:r>
-              <a:rPr lang="en-US" sz="1100" dirty="0">
-                <a:solidFill>
-                  <a:srgbClr val="B0C4D8"/>
-                </a:solidFill>
-                <a:latin typeface="Calibri" pitchFamily="34" charset="0"/>
-                <a:ea typeface="Calibri" pitchFamily="34" charset="-122"/>
-                <a:cs typeface="Calibri" pitchFamily="34" charset="-120"/>
-              </a:rPr>
-              <a:t>Solo 1.4% de views terminan en compra</a:t>
-            </a:r>
             <a:endParaRPr lang="en-US" sz="1100" dirty="0"/>
           </a:p>
         </p:txBody>
@@ -16423,6 +16825,257 @@
                 <a:cs typeface="Calibri" pitchFamily="34" charset="-120"/>
               </a:rPr>
               <a:t>Mediana de ítems por usuario = 1 (cold start masivo)</a:t>
+            </a:r>
+            <a:endParaRPr lang="en-US" sz="1100" dirty="0"/>
+          </a:p>
+        </p:txBody>
+      </p:sp>
+      <p:pic>
+        <p:nvPicPr>
+          <p:cNvPr id="46" name="Image 1" descr="preencoded.png">
+            <a:extLst>
+              <a:ext uri="{FF2B5EF4-FFF2-40B4-BE49-F238E27FC236}">
+                <a16:creationId xmlns:a16="http://schemas.microsoft.com/office/drawing/2014/main" id="{0F4E32E8-778B-A395-1C09-6130001C59A3}"/>
+              </a:ext>
+            </a:extLst>
+          </p:cNvPr>
+          <p:cNvPicPr>
+            <a:picLocks noChangeAspect="1"/>
+          </p:cNvPicPr>
+          <p:nvPr/>
+        </p:nvPicPr>
+        <p:blipFill>
+          <a:blip r:embed="rId4"/>
+          <a:stretch>
+            <a:fillRect/>
+          </a:stretch>
+        </p:blipFill>
+        <p:spPr>
+          <a:xfrm>
+            <a:off x="328666" y="4734710"/>
+            <a:ext cx="210255" cy="210255"/>
+          </a:xfrm>
+          <a:prstGeom prst="rect">
+            <a:avLst/>
+          </a:prstGeom>
+        </p:spPr>
+      </p:pic>
+      <p:sp>
+        <p:nvSpPr>
+          <p:cNvPr id="47" name="Text 35">
+            <a:extLst>
+              <a:ext uri="{FF2B5EF4-FFF2-40B4-BE49-F238E27FC236}">
+                <a16:creationId xmlns:a16="http://schemas.microsoft.com/office/drawing/2014/main" id="{7B53D529-C7B9-7C6C-085B-0A6EB65E1DDD}"/>
+              </a:ext>
+            </a:extLst>
+          </p:cNvPr>
+          <p:cNvSpPr/>
+          <p:nvPr/>
+        </p:nvSpPr>
+        <p:spPr>
+          <a:xfrm>
+            <a:off x="630361" y="4691335"/>
+            <a:ext cx="1940496" cy="285346"/>
+          </a:xfrm>
+          <a:prstGeom prst="rect">
+            <a:avLst/>
+          </a:prstGeom>
+          <a:noFill/>
+          <a:ln/>
+        </p:spPr>
+        <p:txBody>
+          <a:bodyPr wrap="square" lIns="0" tIns="0" rIns="0" bIns="0" rtlCol="0" anchor="ctr"/>
+          <a:lstStyle/>
+          <a:p>
+            <a:r>
+              <a:rPr lang="en-US" sz="1100" dirty="0">
+                <a:solidFill>
+                  <a:srgbClr val="B0C4D8"/>
+                </a:solidFill>
+                <a:latin typeface="Calibri" pitchFamily="34" charset="0"/>
+                <a:ea typeface="Calibri" pitchFamily="34" charset="-122"/>
+                <a:cs typeface="Calibri" pitchFamily="34" charset="-120"/>
+              </a:rPr>
+              <a:t>Punto </a:t>
+            </a:r>
+            <a:r>
+              <a:rPr lang="en-US" sz="1100" dirty="0" err="1">
+                <a:solidFill>
+                  <a:srgbClr val="B0C4D8"/>
+                </a:solidFill>
+                <a:latin typeface="Calibri" pitchFamily="34" charset="0"/>
+                <a:ea typeface="Calibri" pitchFamily="34" charset="-122"/>
+                <a:cs typeface="Calibri" pitchFamily="34" charset="-120"/>
+              </a:rPr>
+              <a:t>crítico</a:t>
+            </a:r>
+            <a:r>
+              <a:rPr lang="en-US" sz="1100" dirty="0">
+                <a:solidFill>
+                  <a:srgbClr val="B0C4D8"/>
+                </a:solidFill>
+                <a:latin typeface="Calibri" pitchFamily="34" charset="0"/>
+                <a:ea typeface="Calibri" pitchFamily="34" charset="-122"/>
+                <a:cs typeface="Calibri" pitchFamily="34" charset="-120"/>
+              </a:rPr>
+              <a:t>: view </a:t>
+            </a:r>
+            <a:r>
+              <a:rPr lang="en-US" sz="1100" dirty="0">
+                <a:solidFill>
+                  <a:srgbClr val="B0C4D8"/>
+                </a:solidFill>
+                <a:latin typeface="Calibri" pitchFamily="34" charset="0"/>
+                <a:ea typeface="Calibri" pitchFamily="34" charset="-122"/>
+                <a:cs typeface="Calibri" pitchFamily="34" charset="-120"/>
+                <a:sym typeface="Wingdings" panose="05000000000000000000" pitchFamily="2" charset="2"/>
+              </a:rPr>
+              <a:t> </a:t>
+            </a:r>
+            <a:r>
+              <a:rPr lang="en-US" sz="1100" dirty="0" err="1">
+                <a:solidFill>
+                  <a:srgbClr val="B0C4D8"/>
+                </a:solidFill>
+                <a:latin typeface="Calibri" pitchFamily="34" charset="0"/>
+                <a:ea typeface="Calibri" pitchFamily="34" charset="-122"/>
+                <a:cs typeface="Calibri" pitchFamily="34" charset="-120"/>
+                <a:sym typeface="Wingdings" panose="05000000000000000000" pitchFamily="2" charset="2"/>
+              </a:rPr>
+              <a:t>addtocart</a:t>
+            </a:r>
+            <a:r>
+              <a:rPr lang="en-US" sz="1100" dirty="0">
+                <a:solidFill>
+                  <a:srgbClr val="B0C4D8"/>
+                </a:solidFill>
+                <a:latin typeface="Calibri" pitchFamily="34" charset="0"/>
+                <a:ea typeface="Calibri" pitchFamily="34" charset="-122"/>
+                <a:cs typeface="Calibri" pitchFamily="34" charset="-120"/>
+                <a:sym typeface="Wingdings" panose="05000000000000000000" pitchFamily="2" charset="2"/>
+              </a:rPr>
+              <a:t>: </a:t>
+            </a:r>
+            <a:r>
+              <a:rPr lang="es-AR" sz="1100" b="0" dirty="0">
+                <a:solidFill>
+                  <a:srgbClr val="CE9178"/>
+                </a:solidFill>
+                <a:effectLst/>
+                <a:latin typeface="Consolas" panose="020B0609020204030204" pitchFamily="49" charset="0"/>
+              </a:rPr>
+              <a:t>2.7%</a:t>
+            </a:r>
+            <a:endParaRPr lang="en-US" sz="1100" dirty="0"/>
+          </a:p>
+        </p:txBody>
+      </p:sp>
+      <p:sp>
+        <p:nvSpPr>
+          <p:cNvPr id="49" name="Text 35">
+            <a:extLst>
+              <a:ext uri="{FF2B5EF4-FFF2-40B4-BE49-F238E27FC236}">
+                <a16:creationId xmlns:a16="http://schemas.microsoft.com/office/drawing/2014/main" id="{C9546C0B-1849-41B9-E320-7E86027248C2}"/>
+              </a:ext>
+            </a:extLst>
+          </p:cNvPr>
+          <p:cNvSpPr/>
+          <p:nvPr/>
+        </p:nvSpPr>
+        <p:spPr>
+          <a:xfrm>
+            <a:off x="2662297" y="4667054"/>
+            <a:ext cx="1940496" cy="285346"/>
+          </a:xfrm>
+          <a:prstGeom prst="rect">
+            <a:avLst/>
+          </a:prstGeom>
+          <a:noFill/>
+          <a:ln/>
+        </p:spPr>
+        <p:txBody>
+          <a:bodyPr wrap="square" lIns="0" tIns="0" rIns="0" bIns="0" rtlCol="0" anchor="ctr"/>
+          <a:lstStyle/>
+          <a:p>
+            <a:pPr marL="0" indent="0">
+              <a:buNone/>
+            </a:pPr>
+            <a:r>
+              <a:rPr lang="en-US" sz="1100" dirty="0">
+                <a:solidFill>
+                  <a:srgbClr val="B0C4D8"/>
+                </a:solidFill>
+                <a:latin typeface="Calibri" pitchFamily="34" charset="0"/>
+                <a:ea typeface="Calibri" pitchFamily="34" charset="-122"/>
+                <a:cs typeface="Calibri" pitchFamily="34" charset="-120"/>
+              </a:rPr>
+              <a:t>Solo 1.4% de view </a:t>
+            </a:r>
+            <a:r>
+              <a:rPr lang="en-US" sz="1100" dirty="0" err="1">
+                <a:solidFill>
+                  <a:srgbClr val="B0C4D8"/>
+                </a:solidFill>
+                <a:latin typeface="Calibri" pitchFamily="34" charset="0"/>
+                <a:ea typeface="Calibri" pitchFamily="34" charset="-122"/>
+                <a:cs typeface="Calibri" pitchFamily="34" charset="-120"/>
+              </a:rPr>
+              <a:t>terminan</a:t>
+            </a:r>
+            <a:r>
+              <a:rPr lang="en-US" sz="1100" dirty="0">
+                <a:solidFill>
+                  <a:srgbClr val="B0C4D8"/>
+                </a:solidFill>
+                <a:latin typeface="Calibri" pitchFamily="34" charset="0"/>
+                <a:ea typeface="Calibri" pitchFamily="34" charset="-122"/>
+                <a:cs typeface="Calibri" pitchFamily="34" charset="-120"/>
+              </a:rPr>
+              <a:t> </a:t>
+            </a:r>
+            <a:r>
+              <a:rPr lang="en-US" sz="1100" dirty="0" err="1">
+                <a:solidFill>
+                  <a:srgbClr val="B0C4D8"/>
+                </a:solidFill>
+                <a:latin typeface="Calibri" pitchFamily="34" charset="0"/>
+                <a:ea typeface="Calibri" pitchFamily="34" charset="-122"/>
+                <a:cs typeface="Calibri" pitchFamily="34" charset="-120"/>
+              </a:rPr>
+              <a:t>en</a:t>
+            </a:r>
+            <a:r>
+              <a:rPr lang="en-US" sz="1100" dirty="0">
+                <a:solidFill>
+                  <a:srgbClr val="B0C4D8"/>
+                </a:solidFill>
+                <a:latin typeface="Calibri" pitchFamily="34" charset="0"/>
+                <a:ea typeface="Calibri" pitchFamily="34" charset="-122"/>
+                <a:cs typeface="Calibri" pitchFamily="34" charset="-120"/>
+              </a:rPr>
+              <a:t> </a:t>
+            </a:r>
+            <a:r>
+              <a:rPr lang="en-US" sz="1100" dirty="0" err="1">
+                <a:solidFill>
+                  <a:srgbClr val="B0C4D8"/>
+                </a:solidFill>
+                <a:latin typeface="Calibri" pitchFamily="34" charset="0"/>
+                <a:ea typeface="Calibri" pitchFamily="34" charset="-122"/>
+                <a:cs typeface="Calibri" pitchFamily="34" charset="-120"/>
+              </a:rPr>
+              <a:t>compra</a:t>
+            </a:r>
+            <a:r>
+              <a:rPr lang="en-US" sz="1100" dirty="0">
+                <a:solidFill>
+                  <a:srgbClr val="B0C4D8"/>
+                </a:solidFill>
+                <a:latin typeface="Calibri" pitchFamily="34" charset="0"/>
+                <a:ea typeface="Calibri" pitchFamily="34" charset="-122"/>
+                <a:cs typeface="Calibri" pitchFamily="34" charset="-120"/>
+              </a:rPr>
+              <a:t>.</a:t>
             </a:r>
             <a:endParaRPr lang="en-US" sz="1100" dirty="0"/>
           </a:p>
@@ -17299,9 +17952,17 @@
           <a:bodyPr wrap="square" lIns="0" tIns="0" rIns="0" bIns="0" rtlCol="0" anchor="ctr"/>
           <a:lstStyle/>
           <a:p>
-            <a:pPr marL="0" indent="0">
-              <a:buNone/>
-            </a:pPr>
+            <a:r>
+              <a:rPr lang="en-US" sz="1000" dirty="0" err="1">
+                <a:solidFill>
+                  <a:srgbClr val="B0C4D8"/>
+                </a:solidFill>
+                <a:latin typeface="Calibri" pitchFamily="34" charset="0"/>
+                <a:ea typeface="Calibri" pitchFamily="34" charset="-122"/>
+                <a:cs typeface="Calibri" pitchFamily="34" charset="-120"/>
+              </a:rPr>
+              <a:t>Requiere</a:t>
+            </a:r>
             <a:r>
               <a:rPr lang="en-US" sz="1000" dirty="0">
                 <a:solidFill>
@@ -17311,7 +17972,84 @@
                 <a:ea typeface="Calibri" pitchFamily="34" charset="-122"/>
                 <a:cs typeface="Calibri" pitchFamily="34" charset="-120"/>
               </a:rPr>
-              <a:t>View = 1 punto, Cart = 2, Transaction = 3</a:t>
+              <a:t> </a:t>
+            </a:r>
+            <a:r>
+              <a:rPr lang="en-US" sz="1000" dirty="0" err="1">
+                <a:solidFill>
+                  <a:srgbClr val="B0C4D8"/>
+                </a:solidFill>
+                <a:latin typeface="Calibri" pitchFamily="34" charset="0"/>
+                <a:ea typeface="Calibri" pitchFamily="34" charset="-122"/>
+                <a:cs typeface="Calibri" pitchFamily="34" charset="-120"/>
+              </a:rPr>
+              <a:t>ponderación</a:t>
+            </a:r>
+            <a:r>
+              <a:rPr lang="en-US" sz="1000" dirty="0">
+                <a:solidFill>
+                  <a:srgbClr val="B0C4D8"/>
+                </a:solidFill>
+                <a:latin typeface="Calibri" pitchFamily="34" charset="0"/>
+                <a:ea typeface="Calibri" pitchFamily="34" charset="-122"/>
+                <a:cs typeface="Calibri" pitchFamily="34" charset="-120"/>
+              </a:rPr>
+              <a:t> </a:t>
+            </a:r>
+            <a:r>
+              <a:rPr lang="en-US" sz="1000" dirty="0" err="1">
+                <a:solidFill>
+                  <a:srgbClr val="B0C4D8"/>
+                </a:solidFill>
+                <a:latin typeface="Calibri" pitchFamily="34" charset="0"/>
+                <a:ea typeface="Calibri" pitchFamily="34" charset="-122"/>
+                <a:cs typeface="Calibri" pitchFamily="34" charset="-120"/>
+              </a:rPr>
+              <a:t>por</a:t>
+            </a:r>
+            <a:r>
+              <a:rPr lang="en-US" sz="1000" dirty="0">
+                <a:solidFill>
+                  <a:srgbClr val="B0C4D8"/>
+                </a:solidFill>
+                <a:latin typeface="Calibri" pitchFamily="34" charset="0"/>
+                <a:ea typeface="Calibri" pitchFamily="34" charset="-122"/>
+                <a:cs typeface="Calibri" pitchFamily="34" charset="-120"/>
+              </a:rPr>
+              <a:t> </a:t>
+            </a:r>
+            <a:r>
+              <a:rPr lang="en-US" sz="1000" dirty="0" err="1">
+                <a:solidFill>
+                  <a:srgbClr val="B0C4D8"/>
+                </a:solidFill>
+                <a:latin typeface="Calibri" pitchFamily="34" charset="0"/>
+                <a:ea typeface="Calibri" pitchFamily="34" charset="-122"/>
+                <a:cs typeface="Calibri" pitchFamily="34" charset="-120"/>
+              </a:rPr>
+              <a:t>tipo</a:t>
+            </a:r>
+            <a:r>
+              <a:rPr lang="en-US" sz="1000" dirty="0">
+                <a:solidFill>
+                  <a:srgbClr val="B0C4D8"/>
+                </a:solidFill>
+                <a:latin typeface="Calibri" pitchFamily="34" charset="0"/>
+                <a:ea typeface="Calibri" pitchFamily="34" charset="-122"/>
+                <a:cs typeface="Calibri" pitchFamily="34" charset="-120"/>
+              </a:rPr>
+              <a:t> de </a:t>
+            </a:r>
+            <a:r>
+              <a:rPr lang="en-US" sz="1000" dirty="0" err="1">
+                <a:solidFill>
+                  <a:srgbClr val="B0C4D8"/>
+                </a:solidFill>
+                <a:latin typeface="Calibri" pitchFamily="34" charset="0"/>
+                <a:ea typeface="Calibri" pitchFamily="34" charset="-122"/>
+                <a:cs typeface="Calibri" pitchFamily="34" charset="-120"/>
+              </a:rPr>
+              <a:t>evento</a:t>
             </a:r>
             <a:endParaRPr lang="en-US" sz="1000" dirty="0"/>
           </a:p>
@@ -17362,9 +18100,6 @@
           <a:bodyPr wrap="square" lIns="0" tIns="0" rIns="0" bIns="0" rtlCol="0" anchor="ctr"/>
           <a:lstStyle/>
           <a:p>
-            <a:pPr marL="0" indent="0">
-              <a:buNone/>
-            </a:pPr>
             <a:r>
               <a:rPr lang="en-US" sz="1000" dirty="0">
                 <a:solidFill>
@@ -17374,7 +18109,7 @@
                 <a:ea typeface="Calibri" pitchFamily="34" charset="-122"/>
                 <a:cs typeface="Calibri" pitchFamily="34" charset="-120"/>
               </a:rPr>
-              <a:t>Señal de confianza, no preferencia directa</a:t>
+              <a:t>View = 1 punto, Cart = 2, Transaction = 3</a:t>
             </a:r>
             <a:endParaRPr lang="en-US" sz="1000" dirty="0"/>
           </a:p>
@@ -17429,6 +18164,17 @@
               <a:buNone/>
             </a:pPr>
             <a:r>
+              <a:rPr lang="en-US" sz="1000" dirty="0" err="1">
+                <a:solidFill>
+                  <a:srgbClr val="B0C4D8"/>
+                </a:solidFill>
+                <a:latin typeface="Calibri" pitchFamily="34" charset="0"/>
+                <a:ea typeface="Calibri" pitchFamily="34" charset="-122"/>
+                <a:cs typeface="Calibri" pitchFamily="34" charset="-120"/>
+              </a:rPr>
+              <a:t>Señal</a:t>
+            </a:r>
+            <a:r>
               <a:rPr lang="en-US" sz="1000" dirty="0">
                 <a:solidFill>
                   <a:srgbClr val="B0C4D8"/>
@@ -17437,7 +18183,62 @@
                 <a:ea typeface="Calibri" pitchFamily="34" charset="-122"/>
                 <a:cs typeface="Calibri" pitchFamily="34" charset="-120"/>
               </a:rPr>
-              <a:t>Requiere ponderación por tipo de evento</a:t>
+              <a:t> de </a:t>
+            </a:r>
+            <a:r>
+              <a:rPr lang="en-US" sz="1000" dirty="0" err="1">
+                <a:solidFill>
+                  <a:srgbClr val="B0C4D8"/>
+                </a:solidFill>
+                <a:latin typeface="Calibri" pitchFamily="34" charset="0"/>
+                <a:ea typeface="Calibri" pitchFamily="34" charset="-122"/>
+                <a:cs typeface="Calibri" pitchFamily="34" charset="-120"/>
+              </a:rPr>
+              <a:t>confianza</a:t>
+            </a:r>
+            <a:r>
+              <a:rPr lang="en-US" sz="1000" dirty="0">
+                <a:solidFill>
+                  <a:srgbClr val="B0C4D8"/>
+                </a:solidFill>
+                <a:latin typeface="Calibri" pitchFamily="34" charset="0"/>
+                <a:ea typeface="Calibri" pitchFamily="34" charset="-122"/>
+                <a:cs typeface="Calibri" pitchFamily="34" charset="-120"/>
+              </a:rPr>
+              <a:t>, no </a:t>
+            </a:r>
+            <a:r>
+              <a:rPr lang="en-US" sz="1000" dirty="0" err="1">
+                <a:solidFill>
+                  <a:srgbClr val="B0C4D8"/>
+                </a:solidFill>
+                <a:latin typeface="Calibri" pitchFamily="34" charset="0"/>
+                <a:ea typeface="Calibri" pitchFamily="34" charset="-122"/>
+                <a:cs typeface="Calibri" pitchFamily="34" charset="-120"/>
+              </a:rPr>
+              <a:t>preferencia</a:t>
+            </a:r>
+            <a:r>
+              <a:rPr lang="en-US" sz="1000" dirty="0">
+                <a:solidFill>
+                  <a:srgbClr val="B0C4D8"/>
+                </a:solidFill>
+                <a:latin typeface="Calibri" pitchFamily="34" charset="0"/>
+                <a:ea typeface="Calibri" pitchFamily="34" charset="-122"/>
+                <a:cs typeface="Calibri" pitchFamily="34" charset="-120"/>
+              </a:rPr>
+              <a:t> </a:t>
+            </a:r>
+            <a:r>
+              <a:rPr lang="en-US" sz="1000" dirty="0" err="1">
+                <a:solidFill>
+                  <a:srgbClr val="B0C4D8"/>
+                </a:solidFill>
+                <a:latin typeface="Calibri" pitchFamily="34" charset="0"/>
+                <a:ea typeface="Calibri" pitchFamily="34" charset="-122"/>
+                <a:cs typeface="Calibri" pitchFamily="34" charset="-120"/>
+              </a:rPr>
+              <a:t>directa</a:t>
             </a:r>
             <a:endParaRPr lang="en-US" sz="1000" dirty="0"/>
           </a:p>
@@ -19072,7 +19873,7 @@
               <a:buNone/>
             </a:pPr>
             <a:r>
-              <a:rPr lang="en-US" sz="1200" b="1" dirty="0">
+              <a:rPr lang="en-US" sz="1200" b="1" dirty="0" err="1">
                 <a:solidFill>
                   <a:srgbClr val="FFFFFF"/>
                 </a:solidFill>
@@ -19080,7 +19881,7 @@
                 <a:ea typeface="Calibri" pitchFamily="34" charset="-122"/>
                 <a:cs typeface="Calibri" pitchFamily="34" charset="-120"/>
               </a:rPr>
-              <a:t>Matrices</a:t>
+              <a:t>Matriz</a:t>
             </a:r>
             <a:endParaRPr lang="en-US" sz="1200" dirty="0"/>
           </a:p>
@@ -19088,17 +19889,6 @@
             <a:pPr marL="0" indent="0" algn="ctr">
               <a:buNone/>
             </a:pPr>
-            <a:r>
-              <a:rPr lang="en-US" sz="1200" b="1" dirty="0">
-                <a:solidFill>
-                  <a:srgbClr val="FFFFFF"/>
-                </a:solidFill>
-                <a:latin typeface="Calibri" pitchFamily="34" charset="0"/>
-                <a:ea typeface="Calibri" pitchFamily="34" charset="-122"/>
-                <a:cs typeface="Calibri" pitchFamily="34" charset="-120"/>
-              </a:rPr>
-              <a:t>Esparsa</a:t>
-            </a:r>
             <a:endParaRPr lang="en-US" sz="1200" dirty="0"/>
           </a:p>
         </p:txBody>
@@ -19459,6 +20249,13 @@
             <a:prstDash val="solid"/>
           </a:ln>
         </p:spPr>
+        <p:txBody>
+          <a:bodyPr/>
+          <a:lstStyle/>
+          <a:p>
+            <a:endParaRPr lang="es-AR" dirty="0"/>
+          </a:p>
+        </p:txBody>
       </p:sp>
       <p:sp>
         <p:nvSpPr>
@@ -19606,7 +20403,40 @@
                 <a:ea typeface="Calibri" pitchFamily="34" charset="-122"/>
                 <a:cs typeface="Calibri" pitchFamily="34" charset="-120"/>
               </a:rPr>
-              <a:t>Metodología de Evaluación</a:t>
+              <a:t>Metodología de </a:t>
+            </a:r>
+            <a:r>
+              <a:rPr lang="en-US" sz="2600" b="1" dirty="0" err="1">
+                <a:solidFill>
+                  <a:srgbClr val="FFFFFF"/>
+                </a:solidFill>
+                <a:latin typeface="Calibri" pitchFamily="34" charset="0"/>
+                <a:ea typeface="Calibri" pitchFamily="34" charset="-122"/>
+                <a:cs typeface="Calibri" pitchFamily="34" charset="-120"/>
+              </a:rPr>
+              <a:t>Evaluación</a:t>
+            </a:r>
+            <a:r>
+              <a:rPr lang="en-US" sz="2600" b="1" dirty="0">
+                <a:solidFill>
+                  <a:srgbClr val="FFFFFF"/>
+                </a:solidFill>
+                <a:latin typeface="Calibri" pitchFamily="34" charset="0"/>
+                <a:ea typeface="Calibri" pitchFamily="34" charset="-122"/>
+                <a:cs typeface="Calibri" pitchFamily="34" charset="-120"/>
+              </a:rPr>
+              <a:t> de </a:t>
+            </a:r>
+            <a:r>
+              <a:rPr lang="en-US" sz="2600" b="1" dirty="0" err="1">
+                <a:solidFill>
+                  <a:srgbClr val="FFFFFF"/>
+                </a:solidFill>
+                <a:latin typeface="Calibri" pitchFamily="34" charset="0"/>
+                <a:ea typeface="Calibri" pitchFamily="34" charset="-122"/>
+                <a:cs typeface="Calibri" pitchFamily="34" charset="-120"/>
+              </a:rPr>
+              <a:t>Modelos</a:t>
             </a:r>
             <a:endParaRPr lang="en-US" sz="2600" dirty="0"/>
           </a:p>
@@ -19906,6 +20736,13 @@
             </a:outerShdw>
           </a:effectLst>
         </p:spPr>
+        <p:txBody>
+          <a:bodyPr/>
+          <a:lstStyle/>
+          <a:p>
+            <a:endParaRPr lang="es-AR" dirty="0"/>
+          </a:p>
+        </p:txBody>
       </p:sp>
       <p:sp>
         <p:nvSpPr>
@@ -19940,7 +20777,84 @@
                 <a:ea typeface="Calibri" pitchFamily="34" charset="-122"/>
                 <a:cs typeface="Calibri" pitchFamily="34" charset="-120"/>
               </a:rPr>
-              <a:t>Métricas de Evaluación</a:t>
+              <a:t>Métricas de </a:t>
+            </a:r>
+            <a:r>
+              <a:rPr lang="en-US" sz="1300" b="1" dirty="0" err="1">
+                <a:solidFill>
+                  <a:srgbClr val="FFFFFF"/>
+                </a:solidFill>
+                <a:latin typeface="Calibri" pitchFamily="34" charset="0"/>
+                <a:ea typeface="Calibri" pitchFamily="34" charset="-122"/>
+                <a:cs typeface="Calibri" pitchFamily="34" charset="-120"/>
+              </a:rPr>
+              <a:t>Evaluación</a:t>
+            </a:r>
+            <a:r>
+              <a:rPr lang="en-US" sz="1300" b="1" dirty="0">
+                <a:solidFill>
+                  <a:srgbClr val="FFFFFF"/>
+                </a:solidFill>
+                <a:latin typeface="Calibri" pitchFamily="34" charset="0"/>
+                <a:ea typeface="Calibri" pitchFamily="34" charset="-122"/>
+                <a:cs typeface="Calibri" pitchFamily="34" charset="-120"/>
+              </a:rPr>
+              <a:t>, </a:t>
+            </a:r>
+            <a:r>
+              <a:rPr lang="en-US" sz="1300" b="1" dirty="0" err="1">
+                <a:solidFill>
+                  <a:srgbClr val="FFFFFF"/>
+                </a:solidFill>
+                <a:latin typeface="Calibri" pitchFamily="34" charset="0"/>
+                <a:ea typeface="Calibri" pitchFamily="34" charset="-122"/>
+                <a:cs typeface="Calibri" pitchFamily="34" charset="-120"/>
+              </a:rPr>
+              <a:t>en</a:t>
+            </a:r>
+            <a:r>
+              <a:rPr lang="en-US" sz="1300" b="1" dirty="0">
+                <a:solidFill>
+                  <a:srgbClr val="FFFFFF"/>
+                </a:solidFill>
+                <a:latin typeface="Calibri" pitchFamily="34" charset="0"/>
+                <a:ea typeface="Calibri" pitchFamily="34" charset="-122"/>
+                <a:cs typeface="Calibri" pitchFamily="34" charset="-120"/>
+              </a:rPr>
+              <a:t> </a:t>
+            </a:r>
+            <a:r>
+              <a:rPr lang="en-US" sz="1300" b="1" dirty="0" err="1">
+                <a:solidFill>
+                  <a:srgbClr val="FFFFFF"/>
+                </a:solidFill>
+                <a:latin typeface="Calibri" pitchFamily="34" charset="0"/>
+                <a:ea typeface="Calibri" pitchFamily="34" charset="-122"/>
+                <a:cs typeface="Calibri" pitchFamily="34" charset="-120"/>
+              </a:rPr>
+              <a:t>primeras</a:t>
+            </a:r>
+            <a:r>
+              <a:rPr lang="en-US" sz="1300" b="1" dirty="0">
+                <a:solidFill>
+                  <a:srgbClr val="FFFFFF"/>
+                </a:solidFill>
+                <a:latin typeface="Calibri" pitchFamily="34" charset="0"/>
+                <a:ea typeface="Calibri" pitchFamily="34" charset="-122"/>
+                <a:cs typeface="Calibri" pitchFamily="34" charset="-120"/>
+              </a:rPr>
+              <a:t> k </a:t>
+            </a:r>
+            <a:r>
+              <a:rPr lang="en-US" sz="1300" b="1" dirty="0" err="1">
+                <a:solidFill>
+                  <a:srgbClr val="FFFFFF"/>
+                </a:solidFill>
+                <a:latin typeface="Calibri" pitchFamily="34" charset="0"/>
+                <a:ea typeface="Calibri" pitchFamily="34" charset="-122"/>
+                <a:cs typeface="Calibri" pitchFamily="34" charset="-120"/>
+              </a:rPr>
+              <a:t>recomendaciones</a:t>
             </a:r>
             <a:endParaRPr lang="en-US" sz="1300" dirty="0"/>
           </a:p>
@@ -20216,6 +21130,17 @@
               <a:buNone/>
             </a:pPr>
             <a:r>
+              <a:rPr lang="en-US" sz="1000" dirty="0" err="1">
+                <a:solidFill>
+                  <a:srgbClr val="6B8CAE"/>
+                </a:solidFill>
+                <a:latin typeface="Calibri" pitchFamily="34" charset="0"/>
+                <a:ea typeface="Calibri" pitchFamily="34" charset="-122"/>
+                <a:cs typeface="Calibri" pitchFamily="34" charset="-120"/>
+              </a:rPr>
+              <a:t>Aciertos</a:t>
+            </a:r>
+            <a:r>
               <a:rPr lang="en-US" sz="1000" dirty="0">
                 <a:solidFill>
                   <a:srgbClr val="6B8CAE"/>
@@ -20224,7 +21149,139 @@
                 <a:ea typeface="Calibri" pitchFamily="34" charset="-122"/>
                 <a:cs typeface="Calibri" pitchFamily="34" charset="-120"/>
               </a:rPr>
-              <a:t>Interpretable: aciertos directos</a:t>
+              <a:t>: de </a:t>
+            </a:r>
+            <a:r>
+              <a:rPr lang="en-US" sz="1000" dirty="0" err="1">
+                <a:solidFill>
+                  <a:srgbClr val="6B8CAE"/>
+                </a:solidFill>
+                <a:latin typeface="Calibri" pitchFamily="34" charset="0"/>
+                <a:ea typeface="Calibri" pitchFamily="34" charset="-122"/>
+                <a:cs typeface="Calibri" pitchFamily="34" charset="-120"/>
+              </a:rPr>
+              <a:t>productos</a:t>
+            </a:r>
+            <a:r>
+              <a:rPr lang="en-US" sz="1000" dirty="0">
+                <a:solidFill>
+                  <a:srgbClr val="6B8CAE"/>
+                </a:solidFill>
+                <a:latin typeface="Calibri" pitchFamily="34" charset="0"/>
+                <a:ea typeface="Calibri" pitchFamily="34" charset="-122"/>
+                <a:cs typeface="Calibri" pitchFamily="34" charset="-120"/>
+              </a:rPr>
+              <a:t> </a:t>
+            </a:r>
+            <a:r>
+              <a:rPr lang="en-US" sz="1000" dirty="0" err="1">
+                <a:solidFill>
+                  <a:srgbClr val="6B8CAE"/>
+                </a:solidFill>
+                <a:latin typeface="Calibri" pitchFamily="34" charset="0"/>
+                <a:ea typeface="Calibri" pitchFamily="34" charset="-122"/>
+                <a:cs typeface="Calibri" pitchFamily="34" charset="-120"/>
+              </a:rPr>
+              <a:t>recomendados</a:t>
+            </a:r>
+            <a:r>
+              <a:rPr lang="en-US" sz="1000" dirty="0">
+                <a:solidFill>
+                  <a:srgbClr val="6B8CAE"/>
+                </a:solidFill>
+                <a:latin typeface="Calibri" pitchFamily="34" charset="0"/>
+                <a:ea typeface="Calibri" pitchFamily="34" charset="-122"/>
+                <a:cs typeface="Calibri" pitchFamily="34" charset="-120"/>
+              </a:rPr>
+              <a:t>, </a:t>
+            </a:r>
+            <a:r>
+              <a:rPr lang="en-US" sz="1000" dirty="0" err="1">
+                <a:solidFill>
+                  <a:srgbClr val="6B8CAE"/>
+                </a:solidFill>
+                <a:latin typeface="Calibri" pitchFamily="34" charset="0"/>
+                <a:ea typeface="Calibri" pitchFamily="34" charset="-122"/>
+                <a:cs typeface="Calibri" pitchFamily="34" charset="-120"/>
+              </a:rPr>
+              <a:t>cuántos</a:t>
+            </a:r>
+            <a:r>
+              <a:rPr lang="en-US" sz="1000" dirty="0">
+                <a:solidFill>
+                  <a:srgbClr val="6B8CAE"/>
+                </a:solidFill>
+                <a:latin typeface="Calibri" pitchFamily="34" charset="0"/>
+                <a:ea typeface="Calibri" pitchFamily="34" charset="-122"/>
+                <a:cs typeface="Calibri" pitchFamily="34" charset="-120"/>
+              </a:rPr>
+              <a:t> </a:t>
+            </a:r>
+            <a:r>
+              <a:rPr lang="en-US" sz="1000" dirty="0" err="1">
+                <a:solidFill>
+                  <a:srgbClr val="6B8CAE"/>
+                </a:solidFill>
+                <a:latin typeface="Calibri" pitchFamily="34" charset="0"/>
+                <a:ea typeface="Calibri" pitchFamily="34" charset="-122"/>
+                <a:cs typeface="Calibri" pitchFamily="34" charset="-120"/>
+              </a:rPr>
+              <a:t>eligió</a:t>
+            </a:r>
+            <a:r>
+              <a:rPr lang="en-US" sz="1000" dirty="0">
+                <a:solidFill>
+                  <a:srgbClr val="6B8CAE"/>
+                </a:solidFill>
+                <a:latin typeface="Calibri" pitchFamily="34" charset="0"/>
+                <a:ea typeface="Calibri" pitchFamily="34" charset="-122"/>
+                <a:cs typeface="Calibri" pitchFamily="34" charset="-120"/>
+              </a:rPr>
+              <a:t> </a:t>
+            </a:r>
+            <a:r>
+              <a:rPr lang="en-US" sz="1000" dirty="0" err="1">
+                <a:solidFill>
+                  <a:srgbClr val="6B8CAE"/>
+                </a:solidFill>
+                <a:latin typeface="Calibri" pitchFamily="34" charset="0"/>
+                <a:ea typeface="Calibri" pitchFamily="34" charset="-122"/>
+                <a:cs typeface="Calibri" pitchFamily="34" charset="-120"/>
+              </a:rPr>
+              <a:t>el</a:t>
+            </a:r>
+            <a:r>
+              <a:rPr lang="en-US" sz="1000" dirty="0">
+                <a:solidFill>
+                  <a:srgbClr val="6B8CAE"/>
+                </a:solidFill>
+                <a:latin typeface="Calibri" pitchFamily="34" charset="0"/>
+                <a:ea typeface="Calibri" pitchFamily="34" charset="-122"/>
+                <a:cs typeface="Calibri" pitchFamily="34" charset="-120"/>
+              </a:rPr>
+              <a:t> </a:t>
+            </a:r>
+            <a:r>
+              <a:rPr lang="en-US" sz="1000" dirty="0" err="1">
+                <a:solidFill>
+                  <a:srgbClr val="6B8CAE"/>
+                </a:solidFill>
+                <a:latin typeface="Calibri" pitchFamily="34" charset="0"/>
+                <a:ea typeface="Calibri" pitchFamily="34" charset="-122"/>
+                <a:cs typeface="Calibri" pitchFamily="34" charset="-120"/>
+              </a:rPr>
+              <a:t>usuario</a:t>
+            </a:r>
+            <a:r>
+              <a:rPr lang="en-US" sz="1000" dirty="0">
+                <a:solidFill>
+                  <a:srgbClr val="6B8CAE"/>
+                </a:solidFill>
+                <a:latin typeface="Calibri" pitchFamily="34" charset="0"/>
+                <a:ea typeface="Calibri" pitchFamily="34" charset="-122"/>
+                <a:cs typeface="Calibri" pitchFamily="34" charset="-120"/>
+              </a:rPr>
+              <a:t>.?</a:t>
             </a:r>
             <a:endParaRPr lang="en-US" sz="1000" dirty="0"/>
           </a:p>
@@ -20366,7 +21423,117 @@
                 <a:ea typeface="Calibri" pitchFamily="34" charset="-122"/>
                 <a:cs typeface="Calibri" pitchFamily="34" charset="-120"/>
               </a:rPr>
-              <a:t>Cobertura de preferencias del usuario</a:t>
+              <a:t>Cobertura de preferencias del Usuario. De </a:t>
+            </a:r>
+            <a:r>
+              <a:rPr lang="en-US" sz="1000" dirty="0" err="1">
+                <a:solidFill>
+                  <a:srgbClr val="6B8CAE"/>
+                </a:solidFill>
+                <a:latin typeface="Calibri" pitchFamily="34" charset="0"/>
+                <a:ea typeface="Calibri" pitchFamily="34" charset="-122"/>
+                <a:cs typeface="Calibri" pitchFamily="34" charset="-120"/>
+              </a:rPr>
+              <a:t>productos</a:t>
+            </a:r>
+            <a:r>
+              <a:rPr lang="en-US" sz="1000" dirty="0">
+                <a:solidFill>
+                  <a:srgbClr val="6B8CAE"/>
+                </a:solidFill>
+                <a:latin typeface="Calibri" pitchFamily="34" charset="0"/>
+                <a:ea typeface="Calibri" pitchFamily="34" charset="-122"/>
+                <a:cs typeface="Calibri" pitchFamily="34" charset="-120"/>
+              </a:rPr>
+              <a:t> </a:t>
+            </a:r>
+            <a:r>
+              <a:rPr lang="en-US" sz="1000" dirty="0" err="1">
+                <a:solidFill>
+                  <a:srgbClr val="6B8CAE"/>
+                </a:solidFill>
+                <a:latin typeface="Calibri" pitchFamily="34" charset="0"/>
+                <a:ea typeface="Calibri" pitchFamily="34" charset="-122"/>
+                <a:cs typeface="Calibri" pitchFamily="34" charset="-120"/>
+              </a:rPr>
+              <a:t>elegidos</a:t>
+            </a:r>
+            <a:r>
+              <a:rPr lang="en-US" sz="1000" dirty="0">
+                <a:solidFill>
+                  <a:srgbClr val="6B8CAE"/>
+                </a:solidFill>
+                <a:latin typeface="Calibri" pitchFamily="34" charset="0"/>
+                <a:ea typeface="Calibri" pitchFamily="34" charset="-122"/>
+                <a:cs typeface="Calibri" pitchFamily="34" charset="-120"/>
+              </a:rPr>
+              <a:t>, </a:t>
+            </a:r>
+            <a:r>
+              <a:rPr lang="en-US" sz="1000" dirty="0" err="1">
+                <a:solidFill>
+                  <a:srgbClr val="6B8CAE"/>
+                </a:solidFill>
+                <a:latin typeface="Calibri" pitchFamily="34" charset="0"/>
+                <a:ea typeface="Calibri" pitchFamily="34" charset="-122"/>
+                <a:cs typeface="Calibri" pitchFamily="34" charset="-120"/>
+              </a:rPr>
+              <a:t>cuántos</a:t>
+            </a:r>
+            <a:r>
+              <a:rPr lang="en-US" sz="1000" dirty="0">
+                <a:solidFill>
+                  <a:srgbClr val="6B8CAE"/>
+                </a:solidFill>
+                <a:latin typeface="Calibri" pitchFamily="34" charset="0"/>
+                <a:ea typeface="Calibri" pitchFamily="34" charset="-122"/>
+                <a:cs typeface="Calibri" pitchFamily="34" charset="-120"/>
+              </a:rPr>
+              <a:t> </a:t>
+            </a:r>
+            <a:r>
+              <a:rPr lang="en-US" sz="1000" dirty="0" err="1">
+                <a:solidFill>
+                  <a:srgbClr val="6B8CAE"/>
+                </a:solidFill>
+                <a:latin typeface="Calibri" pitchFamily="34" charset="0"/>
+                <a:ea typeface="Calibri" pitchFamily="34" charset="-122"/>
+                <a:cs typeface="Calibri" pitchFamily="34" charset="-120"/>
+              </a:rPr>
+              <a:t>fueron</a:t>
+            </a:r>
+            <a:r>
+              <a:rPr lang="en-US" sz="1000" dirty="0">
+                <a:solidFill>
+                  <a:srgbClr val="6B8CAE"/>
+                </a:solidFill>
+                <a:latin typeface="Calibri" pitchFamily="34" charset="0"/>
+                <a:ea typeface="Calibri" pitchFamily="34" charset="-122"/>
+                <a:cs typeface="Calibri" pitchFamily="34" charset="-120"/>
+              </a:rPr>
+              <a:t> </a:t>
+            </a:r>
+            <a:r>
+              <a:rPr lang="en-US" sz="1000" dirty="0" err="1">
+                <a:solidFill>
+                  <a:srgbClr val="6B8CAE"/>
+                </a:solidFill>
+                <a:latin typeface="Calibri" pitchFamily="34" charset="0"/>
+                <a:ea typeface="Calibri" pitchFamily="34" charset="-122"/>
+                <a:cs typeface="Calibri" pitchFamily="34" charset="-120"/>
+              </a:rPr>
+              <a:t>recimendados</a:t>
+            </a:r>
+            <a:r>
+              <a:rPr lang="en-US" sz="1000" dirty="0">
+                <a:solidFill>
+                  <a:srgbClr val="6B8CAE"/>
+                </a:solidFill>
+                <a:latin typeface="Calibri" pitchFamily="34" charset="0"/>
+                <a:ea typeface="Calibri" pitchFamily="34" charset="-122"/>
+                <a:cs typeface="Calibri" pitchFamily="34" charset="-120"/>
+              </a:rPr>
+              <a:t>?</a:t>
             </a:r>
             <a:endParaRPr lang="en-US" sz="1000" dirty="0"/>
           </a:p>
@@ -20508,7 +21675,117 @@
                 <a:ea typeface="Calibri" pitchFamily="34" charset="-122"/>
                 <a:cs typeface="Calibri" pitchFamily="34" charset="-120"/>
               </a:rPr>
-              <a:t>Anti-filter bubble — diversidad del sistema</a:t>
+              <a:t>Anti-filter bubble — </a:t>
+            </a:r>
+            <a:r>
+              <a:rPr lang="en-US" sz="1000" dirty="0" err="1">
+                <a:solidFill>
+                  <a:srgbClr val="6B8CAE"/>
+                </a:solidFill>
+                <a:latin typeface="Calibri" pitchFamily="34" charset="0"/>
+                <a:ea typeface="Calibri" pitchFamily="34" charset="-122"/>
+                <a:cs typeface="Calibri" pitchFamily="34" charset="-120"/>
+              </a:rPr>
+              <a:t>garantiza</a:t>
+            </a:r>
+            <a:r>
+              <a:rPr lang="en-US" sz="1000" dirty="0">
+                <a:solidFill>
+                  <a:srgbClr val="6B8CAE"/>
+                </a:solidFill>
+                <a:latin typeface="Calibri" pitchFamily="34" charset="0"/>
+                <a:ea typeface="Calibri" pitchFamily="34" charset="-122"/>
+                <a:cs typeface="Calibri" pitchFamily="34" charset="-120"/>
+              </a:rPr>
+              <a:t> </a:t>
+            </a:r>
+            <a:r>
+              <a:rPr lang="en-US" sz="1000" dirty="0" err="1">
+                <a:solidFill>
+                  <a:srgbClr val="6B8CAE"/>
+                </a:solidFill>
+                <a:latin typeface="Calibri" pitchFamily="34" charset="0"/>
+                <a:ea typeface="Calibri" pitchFamily="34" charset="-122"/>
+                <a:cs typeface="Calibri" pitchFamily="34" charset="-120"/>
+              </a:rPr>
+              <a:t>diversidad</a:t>
+            </a:r>
+            <a:r>
+              <a:rPr lang="en-US" sz="1000" dirty="0">
+                <a:solidFill>
+                  <a:srgbClr val="6B8CAE"/>
+                </a:solidFill>
+                <a:latin typeface="Calibri" pitchFamily="34" charset="0"/>
+                <a:ea typeface="Calibri" pitchFamily="34" charset="-122"/>
+                <a:cs typeface="Calibri" pitchFamily="34" charset="-120"/>
+              </a:rPr>
+              <a:t> del Sistema. </a:t>
+            </a:r>
+            <a:r>
+              <a:rPr lang="en-US" sz="1000" dirty="0" err="1">
+                <a:solidFill>
+                  <a:srgbClr val="6B8CAE"/>
+                </a:solidFill>
+                <a:latin typeface="Calibri" pitchFamily="34" charset="0"/>
+                <a:ea typeface="Calibri" pitchFamily="34" charset="-122"/>
+                <a:cs typeface="Calibri" pitchFamily="34" charset="-120"/>
+              </a:rPr>
+              <a:t>Variedad</a:t>
+            </a:r>
+            <a:r>
+              <a:rPr lang="en-US" sz="1000" dirty="0">
+                <a:solidFill>
+                  <a:srgbClr val="6B8CAE"/>
+                </a:solidFill>
+                <a:latin typeface="Calibri" pitchFamily="34" charset="0"/>
+                <a:ea typeface="Calibri" pitchFamily="34" charset="-122"/>
+                <a:cs typeface="Calibri" pitchFamily="34" charset="-120"/>
+              </a:rPr>
+              <a:t> de </a:t>
+            </a:r>
+            <a:r>
+              <a:rPr lang="en-US" sz="1000" dirty="0" err="1">
+                <a:solidFill>
+                  <a:srgbClr val="6B8CAE"/>
+                </a:solidFill>
+                <a:latin typeface="Calibri" pitchFamily="34" charset="0"/>
+                <a:ea typeface="Calibri" pitchFamily="34" charset="-122"/>
+                <a:cs typeface="Calibri" pitchFamily="34" charset="-120"/>
+              </a:rPr>
+              <a:t>recomendación</a:t>
+            </a:r>
+            <a:r>
+              <a:rPr lang="en-US" sz="1000" dirty="0">
+                <a:solidFill>
+                  <a:srgbClr val="6B8CAE"/>
+                </a:solidFill>
+                <a:latin typeface="Calibri" pitchFamily="34" charset="0"/>
+                <a:ea typeface="Calibri" pitchFamily="34" charset="-122"/>
+                <a:cs typeface="Calibri" pitchFamily="34" charset="-120"/>
+              </a:rPr>
+              <a:t> del  Total </a:t>
+            </a:r>
+            <a:r>
+              <a:rPr lang="en-US" sz="1000" dirty="0" err="1">
+                <a:solidFill>
+                  <a:srgbClr val="6B8CAE"/>
+                </a:solidFill>
+                <a:latin typeface="Calibri" pitchFamily="34" charset="0"/>
+                <a:ea typeface="Calibri" pitchFamily="34" charset="-122"/>
+                <a:cs typeface="Calibri" pitchFamily="34" charset="-120"/>
+              </a:rPr>
+              <a:t>Catálogo</a:t>
+            </a:r>
+            <a:r>
+              <a:rPr lang="en-US" sz="1000" dirty="0">
+                <a:solidFill>
+                  <a:srgbClr val="6B8CAE"/>
+                </a:solidFill>
+                <a:latin typeface="Calibri" pitchFamily="34" charset="0"/>
+                <a:ea typeface="Calibri" pitchFamily="34" charset="-122"/>
+                <a:cs typeface="Calibri" pitchFamily="34" charset="-120"/>
+              </a:rPr>
+              <a:t>.</a:t>
             </a:r>
             <a:endParaRPr lang="en-US" sz="1000" dirty="0"/>
           </a:p>
@@ -20738,7 +22015,29 @@
                 <a:ea typeface="Calibri" pitchFamily="34" charset="-122"/>
                 <a:cs typeface="Calibri" pitchFamily="34" charset="-120"/>
               </a:rPr>
-              <a:t>¿Por qué NDCG y no RMSE/MAE?</a:t>
+              <a:t>¿Por </a:t>
+            </a:r>
+            <a:r>
+              <a:rPr lang="en-US" sz="1100" b="1" dirty="0" err="1">
+                <a:solidFill>
+                  <a:srgbClr val="FF8C00"/>
+                </a:solidFill>
+                <a:latin typeface="Calibri" pitchFamily="34" charset="0"/>
+                <a:ea typeface="Calibri" pitchFamily="34" charset="-122"/>
+                <a:cs typeface="Calibri" pitchFamily="34" charset="-120"/>
+              </a:rPr>
+              <a:t>qué</a:t>
+            </a:r>
+            <a:r>
+              <a:rPr lang="en-US" sz="1100" b="1" dirty="0">
+                <a:solidFill>
+                  <a:srgbClr val="FF8C00"/>
+                </a:solidFill>
+                <a:latin typeface="Calibri" pitchFamily="34" charset="0"/>
+                <a:ea typeface="Calibri" pitchFamily="34" charset="-122"/>
+                <a:cs typeface="Calibri" pitchFamily="34" charset="-120"/>
+              </a:rPr>
+              <a:t> NDCG?</a:t>
             </a:r>
             <a:endParaRPr lang="en-US" sz="1100" dirty="0"/>
           </a:p>
@@ -20777,7 +22076,7 @@
                 <a:ea typeface="Calibri" pitchFamily="34" charset="-122"/>
                 <a:cs typeface="Calibri" pitchFamily="34" charset="-120"/>
               </a:rPr>
-              <a:t>Este es un problema de ranking, no de predicción de rating. RMSE mide error puntual en preferencias — sin sentido en feedback implícito. NDCG mide si los ítems relevantes aparecen primero.</a:t>
+              <a:t>Este es un problema de ranking,. NDCG mide si los ítems relevantes aparecen primero.</a:t>
             </a:r>
             <a:endParaRPr lang="en-US" sz="1000" dirty="0"/>
           </a:p>

--- a/presentacion/nexus_tecnico_v2.pptx
+++ b/presentacion/nexus_tecnico_v2.pptx
@@ -131,10 +131,25 @@
   <pc:docChgLst>
     <pc:chgData name="Leila Maria Abduca" userId="b2eb59c3-4a0c-4042-a308-940cfd8606aa" providerId="ADAL" clId="{3096589E-A249-4E20-8EE7-251CDCC4F39D}"/>
     <pc:docChg chg="undo custSel modSld">
-      <pc:chgData name="Leila Maria Abduca" userId="b2eb59c3-4a0c-4042-a308-940cfd8606aa" providerId="ADAL" clId="{3096589E-A249-4E20-8EE7-251CDCC4F39D}" dt="2026-03-23T21:41:35.968" v="582" actId="108"/>
+      <pc:chgData name="Leila Maria Abduca" userId="b2eb59c3-4a0c-4042-a308-940cfd8606aa" providerId="ADAL" clId="{3096589E-A249-4E20-8EE7-251CDCC4F39D}" dt="2026-03-24T00:00:21.859" v="1036" actId="6549"/>
       <pc:docMkLst>
         <pc:docMk/>
       </pc:docMkLst>
+      <pc:sldChg chg="modSp mod">
+        <pc:chgData name="Leila Maria Abduca" userId="b2eb59c3-4a0c-4042-a308-940cfd8606aa" providerId="ADAL" clId="{3096589E-A249-4E20-8EE7-251CDCC4F39D}" dt="2026-03-23T22:06:56.412" v="700" actId="6549"/>
+        <pc:sldMkLst>
+          <pc:docMk/>
+          <pc:sldMk cId="0" sldId="256"/>
+        </pc:sldMkLst>
+        <pc:spChg chg="mod">
+          <ac:chgData name="Leila Maria Abduca" userId="b2eb59c3-4a0c-4042-a308-940cfd8606aa" providerId="ADAL" clId="{3096589E-A249-4E20-8EE7-251CDCC4F39D}" dt="2026-03-23T22:06:56.412" v="700" actId="6549"/>
+          <ac:spMkLst>
+            <pc:docMk/>
+            <pc:sldMk cId="0" sldId="256"/>
+            <ac:spMk id="10" creationId="{00000000-0000-0000-0000-000000000000}"/>
+          </ac:spMkLst>
+        </pc:spChg>
+      </pc:sldChg>
       <pc:sldChg chg="modSp mod">
         <pc:chgData name="Leila Maria Abduca" userId="b2eb59c3-4a0c-4042-a308-940cfd8606aa" providerId="ADAL" clId="{3096589E-A249-4E20-8EE7-251CDCC4F39D}" dt="2026-03-23T15:41:52.502" v="0" actId="6549"/>
         <pc:sldMkLst>
@@ -151,7 +166,7 @@
         </pc:spChg>
       </pc:sldChg>
       <pc:sldChg chg="addSp delSp modSp mod">
-        <pc:chgData name="Leila Maria Abduca" userId="b2eb59c3-4a0c-4042-a308-940cfd8606aa" providerId="ADAL" clId="{3096589E-A249-4E20-8EE7-251CDCC4F39D}" dt="2026-03-23T21:41:35.968" v="582" actId="108"/>
+        <pc:chgData name="Leila Maria Abduca" userId="b2eb59c3-4a0c-4042-a308-940cfd8606aa" providerId="ADAL" clId="{3096589E-A249-4E20-8EE7-251CDCC4F39D}" dt="2026-03-23T23:46:35.842" v="860" actId="20577"/>
         <pc:sldMkLst>
           <pc:docMk/>
           <pc:sldMk cId="0" sldId="258"/>
@@ -189,7 +204,7 @@
           </ac:spMkLst>
         </pc:spChg>
         <pc:spChg chg="mod">
-          <ac:chgData name="Leila Maria Abduca" userId="b2eb59c3-4a0c-4042-a308-940cfd8606aa" providerId="ADAL" clId="{3096589E-A249-4E20-8EE7-251CDCC4F39D}" dt="2026-03-23T20:31:12.499" v="421" actId="20577"/>
+          <ac:chgData name="Leila Maria Abduca" userId="b2eb59c3-4a0c-4042-a308-940cfd8606aa" providerId="ADAL" clId="{3096589E-A249-4E20-8EE7-251CDCC4F39D}" dt="2026-03-23T23:46:35.842" v="860" actId="20577"/>
           <ac:spMkLst>
             <pc:docMk/>
             <pc:sldMk cId="0" sldId="258"/>
@@ -229,7 +244,7 @@
           </ac:spMkLst>
         </pc:spChg>
         <pc:spChg chg="mod">
-          <ac:chgData name="Leila Maria Abduca" userId="b2eb59c3-4a0c-4042-a308-940cfd8606aa" providerId="ADAL" clId="{3096589E-A249-4E20-8EE7-251CDCC4F39D}" dt="2026-03-23T21:41:06.202" v="579" actId="1076"/>
+          <ac:chgData name="Leila Maria Abduca" userId="b2eb59c3-4a0c-4042-a308-940cfd8606aa" providerId="ADAL" clId="{3096589E-A249-4E20-8EE7-251CDCC4F39D}" dt="2026-03-23T22:02:54.574" v="583" actId="20577"/>
           <ac:spMkLst>
             <pc:docMk/>
             <pc:sldMk cId="0" sldId="258"/>
@@ -237,11 +252,35 @@
           </ac:spMkLst>
         </pc:spChg>
         <pc:spChg chg="mod">
-          <ac:chgData name="Leila Maria Abduca" userId="b2eb59c3-4a0c-4042-a308-940cfd8606aa" providerId="ADAL" clId="{3096589E-A249-4E20-8EE7-251CDCC4F39D}" dt="2026-03-23T21:41:35.968" v="582" actId="108"/>
+          <ac:chgData name="Leila Maria Abduca" userId="b2eb59c3-4a0c-4042-a308-940cfd8606aa" providerId="ADAL" clId="{3096589E-A249-4E20-8EE7-251CDCC4F39D}" dt="2026-03-23T22:06:37.671" v="699" actId="1076"/>
           <ac:spMkLst>
             <pc:docMk/>
             <pc:sldMk cId="0" sldId="258"/>
             <ac:spMk id="39" creationId="{00000000-0000-0000-0000-000000000000}"/>
+          </ac:spMkLst>
+        </pc:spChg>
+        <pc:spChg chg="mod">
+          <ac:chgData name="Leila Maria Abduca" userId="b2eb59c3-4a0c-4042-a308-940cfd8606aa" providerId="ADAL" clId="{3096589E-A249-4E20-8EE7-251CDCC4F39D}" dt="2026-03-23T22:05:00.445" v="642" actId="1036"/>
+          <ac:spMkLst>
+            <pc:docMk/>
+            <pc:sldMk cId="0" sldId="258"/>
+            <ac:spMk id="41" creationId="{00000000-0000-0000-0000-000000000000}"/>
+          </ac:spMkLst>
+        </pc:spChg>
+        <pc:spChg chg="mod">
+          <ac:chgData name="Leila Maria Abduca" userId="b2eb59c3-4a0c-4042-a308-940cfd8606aa" providerId="ADAL" clId="{3096589E-A249-4E20-8EE7-251CDCC4F39D}" dt="2026-03-23T22:04:53.911" v="625" actId="1036"/>
+          <ac:spMkLst>
+            <pc:docMk/>
+            <pc:sldMk cId="0" sldId="258"/>
+            <ac:spMk id="43" creationId="{00000000-0000-0000-0000-000000000000}"/>
+          </ac:spMkLst>
+        </pc:spChg>
+        <pc:spChg chg="mod">
+          <ac:chgData name="Leila Maria Abduca" userId="b2eb59c3-4a0c-4042-a308-940cfd8606aa" providerId="ADAL" clId="{3096589E-A249-4E20-8EE7-251CDCC4F39D}" dt="2026-03-23T22:04:47.475" v="614" actId="1036"/>
+          <ac:spMkLst>
+            <pc:docMk/>
+            <pc:sldMk cId="0" sldId="258"/>
+            <ac:spMk id="45" creationId="{00000000-0000-0000-0000-000000000000}"/>
           </ac:spMkLst>
         </pc:spChg>
         <pc:spChg chg="add mod">
@@ -253,6 +292,14 @@
           </ac:spMkLst>
         </pc:spChg>
         <pc:spChg chg="add mod">
+          <ac:chgData name="Leila Maria Abduca" userId="b2eb59c3-4a0c-4042-a308-940cfd8606aa" providerId="ADAL" clId="{3096589E-A249-4E20-8EE7-251CDCC4F39D}" dt="2026-03-23T22:05:43.838" v="680" actId="1076"/>
+          <ac:spMkLst>
+            <pc:docMk/>
+            <pc:sldMk cId="0" sldId="258"/>
+            <ac:spMk id="48" creationId="{B08D81BA-66F5-5414-B56E-74506C3983F2}"/>
+          </ac:spMkLst>
+        </pc:spChg>
+        <pc:spChg chg="add mod">
           <ac:chgData name="Leila Maria Abduca" userId="b2eb59c3-4a0c-4042-a308-940cfd8606aa" providerId="ADAL" clId="{3096589E-A249-4E20-8EE7-251CDCC4F39D}" dt="2026-03-23T21:40:51.232" v="577" actId="1076"/>
           <ac:spMkLst>
             <pc:docMk/>
@@ -260,6 +307,38 @@
             <ac:spMk id="49" creationId="{C9546C0B-1849-41B9-E320-7E86027248C2}"/>
           </ac:spMkLst>
         </pc:spChg>
+        <pc:picChg chg="add mod">
+          <ac:chgData name="Leila Maria Abduca" userId="b2eb59c3-4a0c-4042-a308-940cfd8606aa" providerId="ADAL" clId="{3096589E-A249-4E20-8EE7-251CDCC4F39D}" dt="2026-03-23T22:05:07.391" v="644" actId="1076"/>
+          <ac:picMkLst>
+            <pc:docMk/>
+            <pc:sldMk cId="0" sldId="258"/>
+            <ac:picMk id="8" creationId="{8F9E0AFB-6F56-E8C5-C42B-7326A2A8E939}"/>
+          </ac:picMkLst>
+        </pc:picChg>
+        <pc:picChg chg="mod">
+          <ac:chgData name="Leila Maria Abduca" userId="b2eb59c3-4a0c-4042-a308-940cfd8606aa" providerId="ADAL" clId="{3096589E-A249-4E20-8EE7-251CDCC4F39D}" dt="2026-03-23T22:05:00.445" v="642" actId="1036"/>
+          <ac:picMkLst>
+            <pc:docMk/>
+            <pc:sldMk cId="0" sldId="258"/>
+            <ac:picMk id="40" creationId="{00000000-0000-0000-0000-000000000000}"/>
+          </ac:picMkLst>
+        </pc:picChg>
+        <pc:picChg chg="mod">
+          <ac:chgData name="Leila Maria Abduca" userId="b2eb59c3-4a0c-4042-a308-940cfd8606aa" providerId="ADAL" clId="{3096589E-A249-4E20-8EE7-251CDCC4F39D}" dt="2026-03-23T22:04:53.911" v="625" actId="1036"/>
+          <ac:picMkLst>
+            <pc:docMk/>
+            <pc:sldMk cId="0" sldId="258"/>
+            <ac:picMk id="42" creationId="{00000000-0000-0000-0000-000000000000}"/>
+          </ac:picMkLst>
+        </pc:picChg>
+        <pc:picChg chg="mod">
+          <ac:chgData name="Leila Maria Abduca" userId="b2eb59c3-4a0c-4042-a308-940cfd8606aa" providerId="ADAL" clId="{3096589E-A249-4E20-8EE7-251CDCC4F39D}" dt="2026-03-23T22:04:47.475" v="614" actId="1036"/>
+          <ac:picMkLst>
+            <pc:docMk/>
+            <pc:sldMk cId="0" sldId="258"/>
+            <ac:picMk id="44" creationId="{00000000-0000-0000-0000-000000000000}"/>
+          </ac:picMkLst>
+        </pc:picChg>
         <pc:picChg chg="add mod">
           <ac:chgData name="Leila Maria Abduca" userId="b2eb59c3-4a0c-4042-a308-940cfd8606aa" providerId="ADAL" clId="{3096589E-A249-4E20-8EE7-251CDCC4F39D}" dt="2026-03-23T21:35:31.754" v="493" actId="1076"/>
           <ac:picMkLst>
@@ -332,7 +411,7 @@
         </pc:spChg>
       </pc:sldChg>
       <pc:sldChg chg="modSp mod">
-        <pc:chgData name="Leila Maria Abduca" userId="b2eb59c3-4a0c-4042-a308-940cfd8606aa" providerId="ADAL" clId="{3096589E-A249-4E20-8EE7-251CDCC4F39D}" dt="2026-03-23T19:38:54.147" v="363" actId="20577"/>
+        <pc:chgData name="Leila Maria Abduca" userId="b2eb59c3-4a0c-4042-a308-940cfd8606aa" providerId="ADAL" clId="{3096589E-A249-4E20-8EE7-251CDCC4F39D}" dt="2026-03-23T23:59:23.192" v="1029" actId="6549"/>
         <pc:sldMkLst>
           <pc:docMk/>
           <pc:sldMk cId="0" sldId="261"/>
@@ -394,6 +473,14 @@
           </ac:spMkLst>
         </pc:spChg>
         <pc:spChg chg="mod">
+          <ac:chgData name="Leila Maria Abduca" userId="b2eb59c3-4a0c-4042-a308-940cfd8606aa" providerId="ADAL" clId="{3096589E-A249-4E20-8EE7-251CDCC4F39D}" dt="2026-03-23T23:59:23.192" v="1029" actId="6549"/>
+          <ac:spMkLst>
+            <pc:docMk/>
+            <pc:sldMk cId="0" sldId="261"/>
+            <ac:spMk id="37" creationId="{00000000-0000-0000-0000-000000000000}"/>
+          </ac:spMkLst>
+        </pc:spChg>
+        <pc:spChg chg="mod">
           <ac:chgData name="Leila Maria Abduca" userId="b2eb59c3-4a0c-4042-a308-940cfd8606aa" providerId="ADAL" clId="{3096589E-A249-4E20-8EE7-251CDCC4F39D}" dt="2026-03-23T19:26:27.859" v="63" actId="20577"/>
           <ac:spMkLst>
             <pc:docMk/>
@@ -409,6 +496,115 @@
             <ac:spMk id="41" creationId="{00000000-0000-0000-0000-000000000000}"/>
           </ac:spMkLst>
         </pc:spChg>
+      </pc:sldChg>
+      <pc:sldChg chg="modSp mod modNotesTx">
+        <pc:chgData name="Leila Maria Abduca" userId="b2eb59c3-4a0c-4042-a308-940cfd8606aa" providerId="ADAL" clId="{3096589E-A249-4E20-8EE7-251CDCC4F39D}" dt="2026-03-24T00:00:21.859" v="1036" actId="6549"/>
+        <pc:sldMkLst>
+          <pc:docMk/>
+          <pc:sldMk cId="0" sldId="262"/>
+        </pc:sldMkLst>
+        <pc:spChg chg="mod">
+          <ac:chgData name="Leila Maria Abduca" userId="b2eb59c3-4a0c-4042-a308-940cfd8606aa" providerId="ADAL" clId="{3096589E-A249-4E20-8EE7-251CDCC4F39D}" dt="2026-03-24T00:00:21.859" v="1036" actId="6549"/>
+          <ac:spMkLst>
+            <pc:docMk/>
+            <pc:sldMk cId="0" sldId="262"/>
+            <ac:spMk id="7" creationId="{00000000-0000-0000-0000-000000000000}"/>
+          </ac:spMkLst>
+        </pc:spChg>
+        <pc:spChg chg="mod">
+          <ac:chgData name="Leila Maria Abduca" userId="b2eb59c3-4a0c-4042-a308-940cfd8606aa" providerId="ADAL" clId="{3096589E-A249-4E20-8EE7-251CDCC4F39D}" dt="2026-03-23T23:54:40.122" v="995" actId="20577"/>
+          <ac:spMkLst>
+            <pc:docMk/>
+            <pc:sldMk cId="0" sldId="262"/>
+            <ac:spMk id="24" creationId="{00000000-0000-0000-0000-000000000000}"/>
+          </ac:spMkLst>
+        </pc:spChg>
+        <pc:spChg chg="mod">
+          <ac:chgData name="Leila Maria Abduca" userId="b2eb59c3-4a0c-4042-a308-940cfd8606aa" providerId="ADAL" clId="{3096589E-A249-4E20-8EE7-251CDCC4F39D}" dt="2026-03-23T23:12:59.836" v="701" actId="20577"/>
+          <ac:spMkLst>
+            <pc:docMk/>
+            <pc:sldMk cId="0" sldId="262"/>
+            <ac:spMk id="59" creationId="{00000000-0000-0000-0000-000000000000}"/>
+          </ac:spMkLst>
+        </pc:spChg>
+      </pc:sldChg>
+      <pc:sldChg chg="modSp mod">
+        <pc:chgData name="Leila Maria Abduca" userId="b2eb59c3-4a0c-4042-a308-940cfd8606aa" providerId="ADAL" clId="{3096589E-A249-4E20-8EE7-251CDCC4F39D}" dt="2026-03-23T23:16:53.519" v="713" actId="20577"/>
+        <pc:sldMkLst>
+          <pc:docMk/>
+          <pc:sldMk cId="0" sldId="268"/>
+        </pc:sldMkLst>
+        <pc:spChg chg="mod">
+          <ac:chgData name="Leila Maria Abduca" userId="b2eb59c3-4a0c-4042-a308-940cfd8606aa" providerId="ADAL" clId="{3096589E-A249-4E20-8EE7-251CDCC4F39D}" dt="2026-03-23T23:16:53.519" v="713" actId="20577"/>
+          <ac:spMkLst>
+            <pc:docMk/>
+            <pc:sldMk cId="0" sldId="268"/>
+            <ac:spMk id="52" creationId="{00000000-0000-0000-0000-000000000000}"/>
+          </ac:spMkLst>
+        </pc:spChg>
+      </pc:sldChg>
+      <pc:sldChg chg="addSp delSp modSp mod">
+        <pc:chgData name="Leila Maria Abduca" userId="b2eb59c3-4a0c-4042-a308-940cfd8606aa" providerId="ADAL" clId="{3096589E-A249-4E20-8EE7-251CDCC4F39D}" dt="2026-03-23T23:38:38.192" v="840" actId="207"/>
+        <pc:sldMkLst>
+          <pc:docMk/>
+          <pc:sldMk cId="0" sldId="271"/>
+        </pc:sldMkLst>
+        <pc:spChg chg="add del mod">
+          <ac:chgData name="Leila Maria Abduca" userId="b2eb59c3-4a0c-4042-a308-940cfd8606aa" providerId="ADAL" clId="{3096589E-A249-4E20-8EE7-251CDCC4F39D}" dt="2026-03-23T23:37:18.116" v="779"/>
+          <ac:spMkLst>
+            <pc:docMk/>
+            <pc:sldMk cId="0" sldId="271"/>
+            <ac:spMk id="2" creationId="{00000000-0000-0000-0000-000000000000}"/>
+          </ac:spMkLst>
+        </pc:spChg>
+        <pc:spChg chg="mod">
+          <ac:chgData name="Leila Maria Abduca" userId="b2eb59c3-4a0c-4042-a308-940cfd8606aa" providerId="ADAL" clId="{3096589E-A249-4E20-8EE7-251CDCC4F39D}" dt="2026-03-23T23:28:25.071" v="774" actId="6549"/>
+          <ac:spMkLst>
+            <pc:docMk/>
+            <pc:sldMk cId="0" sldId="271"/>
+            <ac:spMk id="63" creationId="{00000000-0000-0000-0000-000000000000}"/>
+          </ac:spMkLst>
+        </pc:spChg>
+        <pc:spChg chg="mod">
+          <ac:chgData name="Leila Maria Abduca" userId="b2eb59c3-4a0c-4042-a308-940cfd8606aa" providerId="ADAL" clId="{3096589E-A249-4E20-8EE7-251CDCC4F39D}" dt="2026-03-23T23:20:09.759" v="715" actId="6549"/>
+          <ac:spMkLst>
+            <pc:docMk/>
+            <pc:sldMk cId="0" sldId="271"/>
+            <ac:spMk id="76" creationId="{00000000-0000-0000-0000-000000000000}"/>
+          </ac:spMkLst>
+        </pc:spChg>
+        <pc:spChg chg="add del mod">
+          <ac:chgData name="Leila Maria Abduca" userId="b2eb59c3-4a0c-4042-a308-940cfd8606aa" providerId="ADAL" clId="{3096589E-A249-4E20-8EE7-251CDCC4F39D}" dt="2026-03-23T23:26:22.871" v="763" actId="20577"/>
+          <ac:spMkLst>
+            <pc:docMk/>
+            <pc:sldMk cId="0" sldId="271"/>
+            <ac:spMk id="84" creationId="{0F886A24-2147-AAA2-A1FB-4C0E75760265}"/>
+          </ac:spMkLst>
+        </pc:spChg>
+        <pc:spChg chg="add mod">
+          <ac:chgData name="Leila Maria Abduca" userId="b2eb59c3-4a0c-4042-a308-940cfd8606aa" providerId="ADAL" clId="{3096589E-A249-4E20-8EE7-251CDCC4F39D}" dt="2026-03-23T23:38:38.192" v="840" actId="207"/>
+          <ac:spMkLst>
+            <pc:docMk/>
+            <pc:sldMk cId="0" sldId="271"/>
+            <ac:spMk id="86" creationId="{39549D94-9BBF-FD91-9DE1-C25CF159775F}"/>
+          </ac:spMkLst>
+        </pc:spChg>
+        <pc:picChg chg="add del mod">
+          <ac:chgData name="Leila Maria Abduca" userId="b2eb59c3-4a0c-4042-a308-940cfd8606aa" providerId="ADAL" clId="{3096589E-A249-4E20-8EE7-251CDCC4F39D}" dt="2026-03-23T23:26:00.565" v="760" actId="21"/>
+          <ac:picMkLst>
+            <pc:docMk/>
+            <pc:sldMk cId="0" sldId="271"/>
+            <ac:picMk id="83" creationId="{12826671-C37C-67EC-A1DC-88E28F7181BB}"/>
+          </ac:picMkLst>
+        </pc:picChg>
+        <pc:picChg chg="add mod">
+          <ac:chgData name="Leila Maria Abduca" userId="b2eb59c3-4a0c-4042-a308-940cfd8606aa" providerId="ADAL" clId="{3096589E-A249-4E20-8EE7-251CDCC4F39D}" dt="2026-03-23T23:26:14.852" v="762" actId="1076"/>
+          <ac:picMkLst>
+            <pc:docMk/>
+            <pc:sldMk cId="0" sldId="271"/>
+            <ac:picMk id="85" creationId="{1C28CA51-3F11-8002-8560-45F19D675CA4}"/>
+          </ac:picMkLst>
+        </pc:picChg>
       </pc:sldChg>
     </pc:docChg>
   </pc:docChgLst>
@@ -1630,8 +1826,257 @@
           <a:p>
             <a:r>
               <a:rPr lang="en-US" dirty="0"/>
-              <a:t>8 modelos evaluados. SVD básico (k=50) es el ganador de NB07 — supera incluso al híbrido SVD+CB porque el CB añade ruido para usuarios con poco historial. NMF falla completamente por la sparsidad. LightGBM es sorprendentemente bajo — las features no compensan la falta de señal colaborativa.</a:t>
-            </a:r>
+              <a:t>8 modelos evaluados. SVD básico (k=50) es el ganador de NB07 — supera incluso al híbrido SVD+CB porque el CB añade ruido para usuarios con poco historial. NMF falla completamente por la sparsidad. LightGBM es sorprendentemente bajo — las features no compensan la falta de señal </a:t>
+            </a:r>
+            <a:r>
+              <a:rPr lang="en-US" dirty="0" err="1"/>
+              <a:t>colaborativa</a:t>
+            </a:r>
+            <a:r>
+              <a:rPr lang="en-US" dirty="0"/>
+              <a:t>.</a:t>
+            </a:r>
+          </a:p>
+          <a:p>
+            <a:pPr marL="0" marR="0" lvl="0" indent="0" algn="l" defTabSz="914400" rtl="0" eaLnBrk="1" fontAlgn="auto" latinLnBrk="0" hangingPunct="1">
+              <a:lnSpc>
+                <a:spcPct val="100000"/>
+              </a:lnSpc>
+              <a:spcBef>
+                <a:spcPts val="0"/>
+              </a:spcBef>
+              <a:spcAft>
+                <a:spcPts val="0"/>
+              </a:spcAft>
+              <a:buClrTx/>
+              <a:buSzTx/>
+              <a:buFontTx/>
+              <a:buNone/>
+              <a:tabLst/>
+              <a:defRPr/>
+            </a:pPr>
+            <a:r>
+              <a:rPr lang="en-US" sz="1200" dirty="0">
+                <a:solidFill>
+                  <a:srgbClr val="B0C4D8"/>
+                </a:solidFill>
+                <a:latin typeface="Calibri" pitchFamily="34" charset="0"/>
+                <a:ea typeface="Calibri" pitchFamily="34" charset="-122"/>
+                <a:cs typeface="Calibri" pitchFamily="34" charset="-120"/>
+              </a:rPr>
+              <a:t>Content-Based Filtering: no </a:t>
+            </a:r>
+            <a:r>
+              <a:rPr lang="en-US" sz="1200" dirty="0" err="1">
+                <a:solidFill>
+                  <a:srgbClr val="B0C4D8"/>
+                </a:solidFill>
+                <a:latin typeface="Calibri" pitchFamily="34" charset="0"/>
+                <a:ea typeface="Calibri" pitchFamily="34" charset="-122"/>
+                <a:cs typeface="Calibri" pitchFamily="34" charset="-120"/>
+              </a:rPr>
+              <a:t>funciona</a:t>
+            </a:r>
+            <a:r>
+              <a:rPr lang="en-US" sz="1200" dirty="0">
+                <a:solidFill>
+                  <a:srgbClr val="B0C4D8"/>
+                </a:solidFill>
+                <a:latin typeface="Calibri" pitchFamily="34" charset="0"/>
+                <a:ea typeface="Calibri" pitchFamily="34" charset="-122"/>
+                <a:cs typeface="Calibri" pitchFamily="34" charset="-120"/>
+              </a:rPr>
+              <a:t> ante </a:t>
+            </a:r>
+            <a:r>
+              <a:rPr lang="en-US" sz="1200" dirty="0" err="1">
+                <a:solidFill>
+                  <a:srgbClr val="B0C4D8"/>
+                </a:solidFill>
+                <a:latin typeface="Calibri" pitchFamily="34" charset="0"/>
+                <a:ea typeface="Calibri" pitchFamily="34" charset="-122"/>
+                <a:cs typeface="Calibri" pitchFamily="34" charset="-120"/>
+              </a:rPr>
+              <a:t>propiedades</a:t>
+            </a:r>
+            <a:r>
+              <a:rPr lang="en-US" sz="1200" dirty="0">
+                <a:solidFill>
+                  <a:srgbClr val="B0C4D8"/>
+                </a:solidFill>
+                <a:latin typeface="Calibri" pitchFamily="34" charset="0"/>
+                <a:ea typeface="Calibri" pitchFamily="34" charset="-122"/>
+                <a:cs typeface="Calibri" pitchFamily="34" charset="-120"/>
+              </a:rPr>
+              <a:t> sin </a:t>
+            </a:r>
+            <a:r>
+              <a:rPr lang="en-US" sz="1200" dirty="0" err="1">
+                <a:solidFill>
+                  <a:srgbClr val="B0C4D8"/>
+                </a:solidFill>
+                <a:latin typeface="Calibri" pitchFamily="34" charset="0"/>
+                <a:ea typeface="Calibri" pitchFamily="34" charset="-122"/>
+                <a:cs typeface="Calibri" pitchFamily="34" charset="-120"/>
+              </a:rPr>
+              <a:t>contenido</a:t>
+            </a:r>
+            <a:r>
+              <a:rPr lang="en-US" sz="1200" dirty="0">
+                <a:solidFill>
+                  <a:srgbClr val="B0C4D8"/>
+                </a:solidFill>
+                <a:latin typeface="Calibri" pitchFamily="34" charset="0"/>
+                <a:ea typeface="Calibri" pitchFamily="34" charset="-122"/>
+                <a:cs typeface="Calibri" pitchFamily="34" charset="-120"/>
+              </a:rPr>
+              <a:t> </a:t>
+            </a:r>
+            <a:r>
+              <a:rPr lang="en-US" sz="1200" dirty="0" err="1">
+                <a:solidFill>
+                  <a:srgbClr val="B0C4D8"/>
+                </a:solidFill>
+                <a:latin typeface="Calibri" pitchFamily="34" charset="0"/>
+                <a:ea typeface="Calibri" pitchFamily="34" charset="-122"/>
+                <a:cs typeface="Calibri" pitchFamily="34" charset="-120"/>
+              </a:rPr>
+              <a:t>semantico</a:t>
+            </a:r>
+            <a:r>
+              <a:rPr lang="en-US" sz="1200" dirty="0">
+                <a:solidFill>
+                  <a:srgbClr val="B0C4D8"/>
+                </a:solidFill>
+                <a:latin typeface="Calibri" pitchFamily="34" charset="0"/>
+                <a:ea typeface="Calibri" pitchFamily="34" charset="-122"/>
+                <a:cs typeface="Calibri" pitchFamily="34" charset="-120"/>
+              </a:rPr>
+              <a:t>. </a:t>
+            </a:r>
+            <a:br>
+              <a:rPr lang="en-US" sz="1200" dirty="0">
+                <a:solidFill>
+                  <a:srgbClr val="B0C4D8"/>
+                </a:solidFill>
+                <a:latin typeface="Calibri" pitchFamily="34" charset="0"/>
+                <a:ea typeface="Calibri" pitchFamily="34" charset="-122"/>
+                <a:cs typeface="Calibri" pitchFamily="34" charset="-120"/>
+              </a:rPr>
+            </a:br>
+            <a:r>
+              <a:rPr lang="es-AR" sz="1800" b="1" kern="100" dirty="0" err="1">
+                <a:effectLst/>
+                <a:latin typeface="Aptos" panose="020B0004020202020204" pitchFamily="34" charset="0"/>
+                <a:ea typeface="Aptos" panose="020B0004020202020204" pitchFamily="34" charset="0"/>
+                <a:cs typeface="Times New Roman" panose="02020603050405020304" pitchFamily="18" charset="0"/>
+              </a:rPr>
+              <a:t>Item</a:t>
+            </a:r>
+            <a:r>
+              <a:rPr lang="es-AR" sz="1800" b="1" kern="100" dirty="0">
+                <a:effectLst/>
+                <a:latin typeface="Aptos" panose="020B0004020202020204" pitchFamily="34" charset="0"/>
+                <a:ea typeface="Aptos" panose="020B0004020202020204" pitchFamily="34" charset="0"/>
+                <a:cs typeface="Times New Roman" panose="02020603050405020304" pitchFamily="18" charset="0"/>
+              </a:rPr>
+              <a:t>-CF (Filtrado Colaborativo por Ítem)</a:t>
+            </a:r>
+            <a:r>
+              <a:rPr lang="es-AR" sz="1800" kern="100" dirty="0">
+                <a:effectLst/>
+                <a:latin typeface="Aptos" panose="020B0004020202020204" pitchFamily="34" charset="0"/>
+                <a:ea typeface="Aptos" panose="020B0004020202020204" pitchFamily="34" charset="0"/>
+                <a:cs typeface="Times New Roman" panose="02020603050405020304" pitchFamily="18" charset="0"/>
+              </a:rPr>
+              <a:t> </a:t>
+            </a:r>
+            <a:r>
+              <a:rPr lang="es-AR" sz="1800" kern="100" dirty="0">
+                <a:solidFill>
+                  <a:srgbClr val="00B050"/>
+                </a:solidFill>
+                <a:effectLst/>
+                <a:latin typeface="Aptos" panose="020B0004020202020204" pitchFamily="34" charset="0"/>
+                <a:ea typeface="Aptos" panose="020B0004020202020204" pitchFamily="34" charset="0"/>
+                <a:cs typeface="Times New Roman" panose="02020603050405020304" pitchFamily="18" charset="0"/>
+              </a:rPr>
+              <a:t>Busca ítems similares </a:t>
+            </a:r>
+            <a:r>
+              <a:rPr lang="es-AR" sz="1800" kern="100" dirty="0">
+                <a:effectLst/>
+                <a:latin typeface="Aptos" panose="020B0004020202020204" pitchFamily="34" charset="0"/>
+                <a:ea typeface="Aptos" panose="020B0004020202020204" pitchFamily="34" charset="0"/>
+                <a:cs typeface="Times New Roman" panose="02020603050405020304" pitchFamily="18" charset="0"/>
+              </a:rPr>
+              <a:t>(</a:t>
+            </a:r>
+            <a:r>
+              <a:rPr lang="es-AR" sz="1800" kern="100" dirty="0">
+                <a:solidFill>
+                  <a:srgbClr val="00B050"/>
+                </a:solidFill>
+                <a:effectLst/>
+                <a:latin typeface="Aptos" panose="020B0004020202020204" pitchFamily="34" charset="0"/>
+                <a:ea typeface="Aptos" panose="020B0004020202020204" pitchFamily="34" charset="0"/>
+                <a:cs typeface="Times New Roman" panose="02020603050405020304" pitchFamily="18" charset="0"/>
+              </a:rPr>
+              <a:t>en base a quiénes los compraron). </a:t>
+            </a:r>
+            <a:r>
+              <a:rPr lang="es-AR" sz="1800" dirty="0"/>
+              <a:t>con datos </a:t>
+            </a:r>
+            <a:r>
+              <a:rPr lang="es-AR" sz="1800" dirty="0" err="1"/>
+              <a:t>hasheados</a:t>
+            </a:r>
+            <a:r>
+              <a:rPr lang="es-AR" sz="1800" dirty="0"/>
+              <a:t>, el contenido no aporta</a:t>
+            </a:r>
+            <a:endParaRPr lang="en-US" sz="1800" dirty="0"/>
+          </a:p>
+          <a:p>
+            <a:pPr marL="0" marR="0" lvl="0" indent="0" algn="l" defTabSz="914400" rtl="0" eaLnBrk="1" fontAlgn="auto" latinLnBrk="0" hangingPunct="1">
+              <a:lnSpc>
+                <a:spcPct val="100000"/>
+              </a:lnSpc>
+              <a:spcBef>
+                <a:spcPts val="0"/>
+              </a:spcBef>
+              <a:spcAft>
+                <a:spcPts val="0"/>
+              </a:spcAft>
+              <a:buClrTx/>
+              <a:buSzTx/>
+              <a:buFontTx/>
+              <a:buNone/>
+              <a:tabLst/>
+              <a:defRPr/>
+            </a:pPr>
+            <a:r>
+              <a:rPr lang="es-AR" sz="2800" b="1" dirty="0"/>
+              <a:t>SVD </a:t>
+            </a:r>
+            <a:r>
+              <a:rPr lang="es-AR" sz="2800" b="1" dirty="0" err="1"/>
+              <a:t>Opt</a:t>
+            </a:r>
+            <a:r>
+              <a:rPr lang="es-AR" sz="2800" b="1" dirty="0"/>
+              <a:t> no superó a SVD básico: </a:t>
+            </a:r>
+            <a:r>
+              <a:rPr lang="es-AR" sz="2800" dirty="0"/>
+              <a:t>Más parámetros no siempre ayudan, datos son tan </a:t>
+            </a:r>
+            <a:r>
+              <a:rPr lang="es-AR" sz="2800" dirty="0" err="1"/>
+              <a:t>esparsos</a:t>
+            </a:r>
+            <a:endParaRPr lang="en-US" sz="1200" dirty="0"/>
           </a:p>
         </p:txBody>
       </p:sp>
@@ -2429,17 +2874,6 @@
             <a:pPr marL="0" indent="0" algn="ctr">
               <a:buNone/>
             </a:pPr>
-            <a:r>
-              <a:rPr lang="en-US" sz="1800" i="1" dirty="0">
-                <a:solidFill>
-                  <a:srgbClr val="A8E6F8"/>
-                </a:solidFill>
-                <a:latin typeface="Calibri" pitchFamily="34" charset="0"/>
-                <a:ea typeface="Calibri" pitchFamily="34" charset="-122"/>
-                <a:cs typeface="Calibri" pitchFamily="34" charset="-120"/>
-              </a:rPr>
-              <a:t>Presentación Técnica · Entrega Final</a:t>
-            </a:r>
             <a:endParaRPr lang="en-US" sz="1800" dirty="0"/>
           </a:p>
         </p:txBody>
@@ -4514,6 +4948,22 @@
             <a:prstDash val="solid"/>
           </a:ln>
         </p:spPr>
+        <p:txBody>
+          <a:bodyPr/>
+          <a:lstStyle/>
+          <a:p>
+            <a:r>
+              <a:rPr lang="es-AR" sz="1800" b="1">
+                <a:effectLst/>
+                <a:latin typeface="Aptos" panose="020B0004020202020204" pitchFamily="34" charset="0"/>
+                <a:ea typeface="Aptos" panose="020B0004020202020204" pitchFamily="34" charset="0"/>
+                <a:cs typeface="Times New Roman" panose="02020603050405020304" pitchFamily="18" charset="0"/>
+              </a:rPr>
+              <a:t>Filtrado colaborativo</a:t>
+            </a:r>
+            <a:endParaRPr lang="es-AR" dirty="0"/>
+          </a:p>
+        </p:txBody>
       </p:sp>
       <p:sp>
         <p:nvSpPr>
@@ -6467,7 +6917,7 @@
                 <a:ea typeface="Calibri" pitchFamily="34" charset="-122"/>
                 <a:cs typeface="Calibri" pitchFamily="34" charset="-120"/>
               </a:rPr>
-              <a:t>RP3+TD (baseline NB13)</a:t>
+              <a:t>RP3+TD </a:t>
             </a:r>
             <a:endParaRPr lang="en-US" sz="1000" dirty="0"/>
           </a:p>
@@ -6884,13 +7334,46 @@
             <a:r>
               <a:rPr lang="en-US" sz="1100" b="1" dirty="0">
                 <a:solidFill>
+                  <a:srgbClr val="00E5A0"/>
+                </a:solidFill>
+                <a:latin typeface="Calibri" pitchFamily="34" charset="0"/>
+                <a:ea typeface="Calibri" pitchFamily="34" charset="-122"/>
+                <a:cs typeface="Calibri" pitchFamily="34" charset="-120"/>
+              </a:rPr>
+              <a:t>Ensemble </a:t>
+            </a:r>
+            <a:r>
+              <a:rPr lang="en-US" sz="1100" b="1" dirty="0" err="1">
+                <a:solidFill>
+                  <a:srgbClr val="00E5A0"/>
+                </a:solidFill>
+                <a:latin typeface="Calibri" pitchFamily="34" charset="0"/>
+                <a:ea typeface="Calibri" pitchFamily="34" charset="-122"/>
+                <a:cs typeface="Calibri" pitchFamily="34" charset="-120"/>
+              </a:rPr>
+              <a:t>Optimizado</a:t>
+            </a:r>
+            <a:r>
+              <a:rPr lang="en-US" sz="1100" b="1" dirty="0">
+                <a:solidFill>
+                  <a:srgbClr val="00E5A0"/>
+                </a:solidFill>
+                <a:latin typeface="Calibri" pitchFamily="34" charset="0"/>
+                <a:ea typeface="Calibri" pitchFamily="34" charset="-122"/>
+                <a:cs typeface="Calibri" pitchFamily="34" charset="-120"/>
+              </a:rPr>
+              <a:t> (RP3+TD · EASE^R · RP3+MB+TD)</a:t>
+            </a:r>
+            <a:r>
+              <a:rPr lang="en-US" sz="1100" b="1" dirty="0">
+                <a:solidFill>
                   <a:srgbClr val="FFFFFF"/>
                 </a:solidFill>
                 <a:latin typeface="Calibri" pitchFamily="34" charset="0"/>
                 <a:ea typeface="Calibri" pitchFamily="34" charset="-122"/>
                 <a:cs typeface="Calibri" pitchFamily="34" charset="-120"/>
               </a:rPr>
-              <a:t>Ensemble NB15v2 ★</a:t>
+              <a:t> ★</a:t>
             </a:r>
             <a:endParaRPr lang="en-US" sz="1100" dirty="0"/>
           </a:p>
@@ -7085,6 +7568,259 @@
               <a:t>+50.8%</a:t>
             </a:r>
             <a:endParaRPr lang="en-US" sz="1000" dirty="0"/>
+          </a:p>
+        </p:txBody>
+      </p:sp>
+      <p:pic>
+        <p:nvPicPr>
+          <p:cNvPr id="83" name="Image 2" descr="preencoded.png">
+            <a:extLst>
+              <a:ext uri="{FF2B5EF4-FFF2-40B4-BE49-F238E27FC236}">
+                <a16:creationId xmlns:a16="http://schemas.microsoft.com/office/drawing/2014/main" id="{12826671-C37C-67EC-A1DC-88E28F7181BB}"/>
+              </a:ext>
+            </a:extLst>
+          </p:cNvPr>
+          <p:cNvPicPr>
+            <a:picLocks noChangeAspect="1"/>
+          </p:cNvPicPr>
+          <p:nvPr/>
+        </p:nvPicPr>
+        <p:blipFill>
+          <a:blip r:embed="rId4"/>
+          <a:stretch>
+            <a:fillRect/>
+          </a:stretch>
+        </p:blipFill>
+        <p:spPr>
+          <a:xfrm>
+            <a:off x="61229" y="3911346"/>
+            <a:ext cx="201168" cy="201168"/>
+          </a:xfrm>
+          <a:prstGeom prst="rect">
+            <a:avLst/>
+          </a:prstGeom>
+        </p:spPr>
+      </p:pic>
+      <p:sp>
+        <p:nvSpPr>
+          <p:cNvPr id="84" name="Text 30">
+            <a:extLst>
+              <a:ext uri="{FF2B5EF4-FFF2-40B4-BE49-F238E27FC236}">
+                <a16:creationId xmlns:a16="http://schemas.microsoft.com/office/drawing/2014/main" id="{0F886A24-2147-AAA2-A1FB-4C0E75760265}"/>
+              </a:ext>
+            </a:extLst>
+          </p:cNvPr>
+          <p:cNvSpPr/>
+          <p:nvPr/>
+        </p:nvSpPr>
+        <p:spPr>
+          <a:xfrm>
+            <a:off x="295161" y="3876280"/>
+            <a:ext cx="1391728" cy="249174"/>
+          </a:xfrm>
+          <a:prstGeom prst="rect">
+            <a:avLst/>
+          </a:prstGeom>
+          <a:noFill/>
+          <a:ln/>
+        </p:spPr>
+        <p:txBody>
+          <a:bodyPr wrap="square" lIns="0" tIns="0" rIns="0" bIns="0" rtlCol="0" anchor="ctr"/>
+          <a:lstStyle/>
+          <a:p>
+            <a:pPr marL="0" indent="0">
+              <a:buNone/>
+            </a:pPr>
+            <a:r>
+              <a:rPr lang="en-US" sz="1000" dirty="0">
+                <a:solidFill>
+                  <a:srgbClr val="00E5A0"/>
+                </a:solidFill>
+                <a:latin typeface="Calibri" pitchFamily="34" charset="0"/>
+                <a:ea typeface="Calibri" pitchFamily="34" charset="-122"/>
+                <a:cs typeface="Calibri" pitchFamily="34" charset="-120"/>
+              </a:rPr>
+              <a:t> </a:t>
+            </a:r>
+            <a:r>
+              <a:rPr lang="en-US" sz="1000" dirty="0" err="1">
+                <a:solidFill>
+                  <a:srgbClr val="00E5A0"/>
+                </a:solidFill>
+                <a:latin typeface="Calibri" pitchFamily="34" charset="0"/>
+                <a:ea typeface="Calibri" pitchFamily="34" charset="-122"/>
+                <a:cs typeface="Calibri" pitchFamily="34" charset="-120"/>
+              </a:rPr>
+              <a:t>Mejor</a:t>
+            </a:r>
+            <a:r>
+              <a:rPr lang="en-US" sz="1000" dirty="0">
+                <a:solidFill>
+                  <a:srgbClr val="00E5A0"/>
+                </a:solidFill>
+                <a:latin typeface="Calibri" pitchFamily="34" charset="0"/>
+                <a:ea typeface="Calibri" pitchFamily="34" charset="-122"/>
+                <a:cs typeface="Calibri" pitchFamily="34" charset="-120"/>
+              </a:rPr>
+              <a:t> </a:t>
+            </a:r>
+            <a:r>
+              <a:rPr lang="en-US" sz="1000" dirty="0" err="1">
+                <a:solidFill>
+                  <a:srgbClr val="00E5A0"/>
+                </a:solidFill>
+                <a:latin typeface="Calibri" pitchFamily="34" charset="0"/>
+                <a:ea typeface="Calibri" pitchFamily="34" charset="-122"/>
+                <a:cs typeface="Calibri" pitchFamily="34" charset="-120"/>
+              </a:rPr>
+              <a:t>modelo</a:t>
+            </a:r>
+            <a:r>
+              <a:rPr lang="en-US" sz="1000" dirty="0">
+                <a:solidFill>
+                  <a:srgbClr val="00E5A0"/>
+                </a:solidFill>
+                <a:latin typeface="Calibri" pitchFamily="34" charset="0"/>
+                <a:ea typeface="Calibri" pitchFamily="34" charset="-122"/>
+                <a:cs typeface="Calibri" pitchFamily="34" charset="-120"/>
+              </a:rPr>
+              <a:t> individual</a:t>
+            </a:r>
+            <a:endParaRPr lang="en-US" sz="1000" dirty="0"/>
+          </a:p>
+        </p:txBody>
+      </p:sp>
+      <p:pic>
+        <p:nvPicPr>
+          <p:cNvPr id="85" name="Image 2" descr="preencoded.png">
+            <a:extLst>
+              <a:ext uri="{FF2B5EF4-FFF2-40B4-BE49-F238E27FC236}">
+                <a16:creationId xmlns:a16="http://schemas.microsoft.com/office/drawing/2014/main" id="{1C28CA51-3F11-8002-8560-45F19D675CA4}"/>
+              </a:ext>
+            </a:extLst>
+          </p:cNvPr>
+          <p:cNvPicPr>
+            <a:picLocks noChangeAspect="1"/>
+          </p:cNvPicPr>
+          <p:nvPr/>
+        </p:nvPicPr>
+        <p:blipFill>
+          <a:blip r:embed="rId4"/>
+          <a:stretch>
+            <a:fillRect/>
+          </a:stretch>
+        </p:blipFill>
+        <p:spPr>
+          <a:xfrm>
+            <a:off x="30615" y="4817335"/>
+            <a:ext cx="201168" cy="201168"/>
+          </a:xfrm>
+          <a:prstGeom prst="rect">
+            <a:avLst/>
+          </a:prstGeom>
+        </p:spPr>
+      </p:pic>
+      <p:sp>
+        <p:nvSpPr>
+          <p:cNvPr id="86" name="Text 30">
+            <a:extLst>
+              <a:ext uri="{FF2B5EF4-FFF2-40B4-BE49-F238E27FC236}">
+                <a16:creationId xmlns:a16="http://schemas.microsoft.com/office/drawing/2014/main" id="{39549D94-9BBF-FD91-9DE1-C25CF159775F}"/>
+              </a:ext>
+            </a:extLst>
+          </p:cNvPr>
+          <p:cNvSpPr/>
+          <p:nvPr/>
+        </p:nvSpPr>
+        <p:spPr>
+          <a:xfrm>
+            <a:off x="167302" y="2260466"/>
+            <a:ext cx="2489633" cy="226702"/>
+          </a:xfrm>
+          <a:prstGeom prst="rect">
+            <a:avLst/>
+          </a:prstGeom>
+          <a:noFill/>
+          <a:ln/>
+        </p:spPr>
+        <p:txBody>
+          <a:bodyPr wrap="square" lIns="0" tIns="0" rIns="0" bIns="0" rtlCol="0" anchor="ctr"/>
+          <a:lstStyle/>
+          <a:p>
+            <a:pPr marL="0" indent="0">
+              <a:buNone/>
+            </a:pPr>
+            <a:r>
+              <a:rPr lang="en-US" sz="1000" dirty="0">
+                <a:solidFill>
+                  <a:srgbClr val="0070C0"/>
+                </a:solidFill>
+                <a:latin typeface="Calibri" pitchFamily="34" charset="0"/>
+                <a:ea typeface="Calibri" pitchFamily="34" charset="-122"/>
+                <a:cs typeface="Calibri" pitchFamily="34" charset="-120"/>
+              </a:rPr>
+              <a:t>&lt; w: </a:t>
+            </a:r>
+            <a:r>
+              <a:rPr lang="en-US" sz="1000" dirty="0" err="1">
+                <a:solidFill>
+                  <a:srgbClr val="0070C0"/>
+                </a:solidFill>
+                <a:latin typeface="Calibri" pitchFamily="34" charset="0"/>
+                <a:ea typeface="Calibri" pitchFamily="34" charset="-122"/>
+                <a:cs typeface="Calibri" pitchFamily="34" charset="-120"/>
+              </a:rPr>
+              <a:t>Interacciones</a:t>
+            </a:r>
+            <a:r>
+              <a:rPr lang="en-US" sz="1000" dirty="0">
+                <a:solidFill>
+                  <a:srgbClr val="0070C0"/>
+                </a:solidFill>
+                <a:latin typeface="Calibri" pitchFamily="34" charset="0"/>
+                <a:ea typeface="Calibri" pitchFamily="34" charset="-122"/>
+                <a:cs typeface="Calibri" pitchFamily="34" charset="-120"/>
+              </a:rPr>
+              <a:t> </a:t>
+            </a:r>
+            <a:r>
+              <a:rPr lang="en-US" sz="1000" dirty="0" err="1">
+                <a:solidFill>
+                  <a:srgbClr val="0070C0"/>
+                </a:solidFill>
+                <a:latin typeface="Calibri" pitchFamily="34" charset="0"/>
+                <a:ea typeface="Calibri" pitchFamily="34" charset="-122"/>
+                <a:cs typeface="Calibri" pitchFamily="34" charset="-120"/>
+              </a:rPr>
+              <a:t>antiguas</a:t>
+            </a:r>
+            <a:r>
+              <a:rPr lang="en-US" sz="1000" dirty="0">
+                <a:solidFill>
+                  <a:srgbClr val="0070C0"/>
+                </a:solidFill>
+                <a:latin typeface="Calibri" pitchFamily="34" charset="0"/>
+                <a:ea typeface="Calibri" pitchFamily="34" charset="-122"/>
+                <a:cs typeface="Calibri" pitchFamily="34" charset="-120"/>
+              </a:rPr>
+              <a:t> y prod. </a:t>
+            </a:r>
+            <a:r>
+              <a:rPr lang="en-US" sz="1000" dirty="0" err="1">
+                <a:solidFill>
+                  <a:srgbClr val="0070C0"/>
+                </a:solidFill>
+                <a:latin typeface="Calibri" pitchFamily="34" charset="0"/>
+                <a:ea typeface="Calibri" pitchFamily="34" charset="-122"/>
+                <a:cs typeface="Calibri" pitchFamily="34" charset="-120"/>
+              </a:rPr>
+              <a:t>populares</a:t>
+            </a:r>
+            <a:endParaRPr lang="en-US" sz="1000" dirty="0">
+              <a:solidFill>
+                <a:srgbClr val="0070C0"/>
+              </a:solidFill>
+            </a:endParaRPr>
           </a:p>
         </p:txBody>
       </p:sp>
@@ -11612,7 +12348,83 @@
                 <a:ea typeface="Calibri" pitchFamily="34" charset="-122"/>
                 <a:cs typeface="Calibri" pitchFamily="34" charset="-120"/>
               </a:rPr>
-              <a:t>¿Por qué el ensemble supera a los individuales? EASE^R ve el espacio diferente (ρ=0.216). Juntos capturan señales complementarias → 0.0431 vs 0.0286 solo. Dacrema et al. (2019): métodos CF clásicos bien combinados superan DL en sparsidad alta.</a:t>
+              <a:t>¿Por qué el ensemble supera a los individuales? EASE^R ve el espacio diferente (ρ=0.216). Juntos capturan </a:t>
+            </a:r>
+            <a:r>
+              <a:rPr lang="en-US" sz="1000" dirty="0" err="1">
+                <a:solidFill>
+                  <a:srgbClr val="6B8CAE"/>
+                </a:solidFill>
+                <a:latin typeface="Calibri" pitchFamily="34" charset="0"/>
+                <a:ea typeface="Calibri" pitchFamily="34" charset="-122"/>
+                <a:cs typeface="Calibri" pitchFamily="34" charset="-120"/>
+              </a:rPr>
+              <a:t>señales</a:t>
+            </a:r>
+            <a:r>
+              <a:rPr lang="en-US" sz="1000" dirty="0">
+                <a:solidFill>
+                  <a:srgbClr val="6B8CAE"/>
+                </a:solidFill>
+                <a:latin typeface="Calibri" pitchFamily="34" charset="0"/>
+                <a:ea typeface="Calibri" pitchFamily="34" charset="-122"/>
+                <a:cs typeface="Calibri" pitchFamily="34" charset="-120"/>
+              </a:rPr>
+              <a:t> </a:t>
+            </a:r>
+            <a:r>
+              <a:rPr lang="en-US" sz="1000" dirty="0" err="1">
+                <a:solidFill>
+                  <a:srgbClr val="6B8CAE"/>
+                </a:solidFill>
+                <a:latin typeface="Calibri" pitchFamily="34" charset="0"/>
+                <a:ea typeface="Calibri" pitchFamily="34" charset="-122"/>
+                <a:cs typeface="Calibri" pitchFamily="34" charset="-120"/>
+              </a:rPr>
+              <a:t>complementarias</a:t>
+            </a:r>
+            <a:r>
+              <a:rPr lang="en-US" sz="1000" dirty="0">
+                <a:solidFill>
+                  <a:srgbClr val="6B8CAE"/>
+                </a:solidFill>
+                <a:latin typeface="Calibri" pitchFamily="34" charset="0"/>
+                <a:ea typeface="Calibri" pitchFamily="34" charset="-122"/>
+                <a:cs typeface="Calibri" pitchFamily="34" charset="-120"/>
+              </a:rPr>
+              <a:t>: </a:t>
+            </a:r>
+            <a:r>
+              <a:rPr lang="es-AR" sz="1000" dirty="0">
+                <a:solidFill>
+                  <a:srgbClr val="6B8CAE"/>
+                </a:solidFill>
+                <a:latin typeface="Calibri" pitchFamily="34" charset="0"/>
+                <a:ea typeface="Calibri" pitchFamily="34" charset="-122"/>
+                <a:cs typeface="Calibri" pitchFamily="34" charset="-120"/>
+              </a:rPr>
+              <a:t>cuando uno se equivoca, el otro suele acertar. </a:t>
+            </a:r>
+            <a:br>
+              <a:rPr lang="es-AR" sz="1000" dirty="0">
+                <a:solidFill>
+                  <a:srgbClr val="6B8CAE"/>
+                </a:solidFill>
+                <a:latin typeface="Calibri" pitchFamily="34" charset="0"/>
+                <a:ea typeface="Calibri" pitchFamily="34" charset="-122"/>
+                <a:cs typeface="Calibri" pitchFamily="34" charset="-120"/>
+              </a:rPr>
+            </a:br>
+            <a:r>
+              <a:rPr lang="en-US" sz="1000" dirty="0">
+                <a:solidFill>
+                  <a:srgbClr val="6B8CAE"/>
+                </a:solidFill>
+                <a:latin typeface="Calibri" pitchFamily="34" charset="0"/>
+                <a:ea typeface="Calibri" pitchFamily="34" charset="-122"/>
+                <a:cs typeface="Calibri" pitchFamily="34" charset="-120"/>
+              </a:rPr>
+              <a:t> Dacrema et al. (2019): métodos CF clásicos bien combinados superan DL en sparsidad alta.</a:t>
             </a:r>
             <a:endParaRPr lang="en-US" sz="1000" dirty="0"/>
           </a:p>
@@ -15991,29 +16803,7 @@
                 <a:ea typeface="Calibri" pitchFamily="34" charset="-122"/>
                 <a:cs typeface="Calibri" pitchFamily="34" charset="-120"/>
               </a:rPr>
-              <a:t>Se </a:t>
-            </a:r>
-            <a:r>
-              <a:rPr lang="en-US" sz="900" i="1" dirty="0" err="1">
-                <a:solidFill>
-                  <a:srgbClr val="6B8CAE"/>
-                </a:solidFill>
-                <a:latin typeface="Calibri" pitchFamily="34" charset="0"/>
-                <a:ea typeface="Calibri" pitchFamily="34" charset="-122"/>
-                <a:cs typeface="Calibri" pitchFamily="34" charset="-120"/>
-              </a:rPr>
-              <a:t>descartan</a:t>
-            </a:r>
-            <a:r>
-              <a:rPr lang="en-US" sz="900" i="1" dirty="0">
-                <a:solidFill>
-                  <a:srgbClr val="6B8CAE"/>
-                </a:solidFill>
-                <a:latin typeface="Calibri" pitchFamily="34" charset="0"/>
-                <a:ea typeface="Calibri" pitchFamily="34" charset="-122"/>
-                <a:cs typeface="Calibri" pitchFamily="34" charset="-120"/>
-              </a:rPr>
-              <a:t> </a:t>
+              <a:t>Mala performance de </a:t>
             </a:r>
             <a:r>
               <a:rPr lang="en-US" sz="900" i="1" dirty="0" err="1">
@@ -16514,6 +17304,13 @@
             </a:outerShdw>
           </a:effectLst>
         </p:spPr>
+        <p:txBody>
+          <a:bodyPr/>
+          <a:lstStyle/>
+          <a:p>
+            <a:endParaRPr lang="es-AR" dirty="0"/>
+          </a:p>
+        </p:txBody>
       </p:sp>
       <p:sp>
         <p:nvSpPr>
@@ -16586,7 +17383,7 @@
         </p:nvSpPr>
         <p:spPr>
           <a:xfrm>
-            <a:off x="5193792" y="3108960"/>
+            <a:off x="5184475" y="3488864"/>
             <a:ext cx="3520440" cy="347472"/>
           </a:xfrm>
           <a:prstGeom prst="rect">
@@ -16608,7 +17405,7 @@
                 <a:ea typeface="Calibri" pitchFamily="34" charset="-122"/>
                 <a:cs typeface="Calibri" pitchFamily="34" charset="-120"/>
               </a:rPr>
-              <a:t>89.8% de usuarios son </a:t>
+              <a:t>10 % de transacciones y 20 % de los `</a:t>
             </a:r>
             <a:r>
               <a:rPr lang="es-AR" sz="1100" dirty="0" err="1">
@@ -16619,7 +17416,7 @@
                 <a:ea typeface="Calibri" pitchFamily="34" charset="-122"/>
                 <a:cs typeface="Calibri" pitchFamily="34" charset="-120"/>
               </a:rPr>
-              <a:t>one</a:t>
+              <a:t>addtocart</a:t>
             </a:r>
             <a:r>
               <a:rPr lang="es-AR" sz="1100" dirty="0">
@@ -16630,13 +17427,30 @@
                 <a:ea typeface="Calibri" pitchFamily="34" charset="-122"/>
                 <a:cs typeface="Calibri" pitchFamily="34" charset="-120"/>
               </a:rPr>
-              <a:t>-time</a:t>
-            </a:r>
-          </a:p>
-          <a:p>
-            <a:pPr marL="0" indent="0">
-              <a:buNone/>
-            </a:pPr>
+              <a:t>` ocurre sin `</a:t>
+            </a:r>
+            <a:r>
+              <a:rPr lang="es-AR" sz="1100" dirty="0" err="1">
+                <a:solidFill>
+                  <a:srgbClr val="B0C4D8"/>
+                </a:solidFill>
+                <a:latin typeface="Calibri" pitchFamily="34" charset="0"/>
+                <a:ea typeface="Calibri" pitchFamily="34" charset="-122"/>
+                <a:cs typeface="Calibri" pitchFamily="34" charset="-120"/>
+              </a:rPr>
+              <a:t>view</a:t>
+            </a:r>
+            <a:r>
+              <a:rPr lang="es-AR" sz="1100" dirty="0">
+                <a:solidFill>
+                  <a:srgbClr val="B0C4D8"/>
+                </a:solidFill>
+                <a:latin typeface="Calibri" pitchFamily="34" charset="0"/>
+                <a:ea typeface="Calibri" pitchFamily="34" charset="-122"/>
+                <a:cs typeface="Calibri" pitchFamily="34" charset="-120"/>
+              </a:rPr>
+              <a:t>` previo</a:t>
+            </a:r>
             <a:endParaRPr lang="en-US" sz="1100" dirty="0"/>
           </a:p>
         </p:txBody>
@@ -16657,7 +17471,7 @@
         </p:blipFill>
         <p:spPr>
           <a:xfrm>
-            <a:off x="4846320" y="3639312"/>
+            <a:off x="4846320" y="3889474"/>
             <a:ext cx="256032" cy="256032"/>
           </a:xfrm>
           <a:prstGeom prst="rect">
@@ -16673,7 +17487,7 @@
         </p:nvSpPr>
         <p:spPr>
           <a:xfrm>
-            <a:off x="5193792" y="3621024"/>
+            <a:off x="5193792" y="3871186"/>
             <a:ext cx="3520440" cy="347472"/>
           </a:xfrm>
           <a:prstGeom prst="rect">
@@ -16720,7 +17534,7 @@
         </p:blipFill>
         <p:spPr>
           <a:xfrm>
-            <a:off x="4846320" y="4151376"/>
+            <a:off x="4846320" y="4298023"/>
             <a:ext cx="256032" cy="256032"/>
           </a:xfrm>
           <a:prstGeom prst="rect">
@@ -16736,7 +17550,7 @@
         </p:nvSpPr>
         <p:spPr>
           <a:xfrm>
-            <a:off x="5193792" y="4133088"/>
+            <a:off x="5193792" y="4279735"/>
             <a:ext cx="3520440" cy="347472"/>
           </a:xfrm>
           <a:prstGeom prst="rect">
@@ -16783,7 +17597,7 @@
         </p:blipFill>
         <p:spPr>
           <a:xfrm>
-            <a:off x="4846320" y="4663440"/>
+            <a:off x="4846320" y="4715196"/>
             <a:ext cx="256032" cy="256032"/>
           </a:xfrm>
           <a:prstGeom prst="rect">
@@ -16799,7 +17613,7 @@
         </p:nvSpPr>
         <p:spPr>
           <a:xfrm>
-            <a:off x="5193792" y="4645152"/>
+            <a:off x="5193792" y="4696908"/>
             <a:ext cx="3520440" cy="347472"/>
           </a:xfrm>
           <a:prstGeom prst="rect">
@@ -17077,6 +17891,105 @@
               </a:rPr>
               <a:t>.</a:t>
             </a:r>
+            <a:endParaRPr lang="en-US" sz="1100" dirty="0"/>
+          </a:p>
+        </p:txBody>
+      </p:sp>
+      <p:pic>
+        <p:nvPicPr>
+          <p:cNvPr id="8" name="Image 1" descr="preencoded.png">
+            <a:extLst>
+              <a:ext uri="{FF2B5EF4-FFF2-40B4-BE49-F238E27FC236}">
+                <a16:creationId xmlns:a16="http://schemas.microsoft.com/office/drawing/2014/main" id="{8F9E0AFB-6F56-E8C5-C42B-7326A2A8E939}"/>
+              </a:ext>
+            </a:extLst>
+          </p:cNvPr>
+          <p:cNvPicPr>
+            <a:picLocks noChangeAspect="1"/>
+          </p:cNvPicPr>
+          <p:nvPr/>
+        </p:nvPicPr>
+        <p:blipFill>
+          <a:blip r:embed="rId4"/>
+          <a:stretch>
+            <a:fillRect/>
+          </a:stretch>
+        </p:blipFill>
+        <p:spPr>
+          <a:xfrm>
+            <a:off x="4855637" y="3477479"/>
+            <a:ext cx="256032" cy="256032"/>
+          </a:xfrm>
+          <a:prstGeom prst="rect">
+            <a:avLst/>
+          </a:prstGeom>
+        </p:spPr>
+      </p:pic>
+      <p:sp>
+        <p:nvSpPr>
+          <p:cNvPr id="48" name="Text 35">
+            <a:extLst>
+              <a:ext uri="{FF2B5EF4-FFF2-40B4-BE49-F238E27FC236}">
+                <a16:creationId xmlns:a16="http://schemas.microsoft.com/office/drawing/2014/main" id="{B08D81BA-66F5-5414-B56E-74506C3983F2}"/>
+              </a:ext>
+            </a:extLst>
+          </p:cNvPr>
+          <p:cNvSpPr/>
+          <p:nvPr/>
+        </p:nvSpPr>
+        <p:spPr>
+          <a:xfrm>
+            <a:off x="5184475" y="3151015"/>
+            <a:ext cx="3520440" cy="347472"/>
+          </a:xfrm>
+          <a:prstGeom prst="rect">
+            <a:avLst/>
+          </a:prstGeom>
+          <a:noFill/>
+          <a:ln/>
+        </p:spPr>
+        <p:txBody>
+          <a:bodyPr wrap="square" lIns="0" tIns="0" rIns="0" bIns="0" rtlCol="0" anchor="ctr"/>
+          <a:lstStyle/>
+          <a:p>
+            <a:r>
+              <a:rPr lang="es-AR" sz="1100" dirty="0">
+                <a:solidFill>
+                  <a:srgbClr val="B0C4D8"/>
+                </a:solidFill>
+                <a:latin typeface="Calibri" pitchFamily="34" charset="0"/>
+                <a:ea typeface="Calibri" pitchFamily="34" charset="-122"/>
+                <a:cs typeface="Calibri" pitchFamily="34" charset="-120"/>
+              </a:rPr>
+              <a:t>90 % de usuarios son </a:t>
+            </a:r>
+            <a:r>
+              <a:rPr lang="es-AR" sz="1100" dirty="0" err="1">
+                <a:solidFill>
+                  <a:srgbClr val="B0C4D8"/>
+                </a:solidFill>
+                <a:latin typeface="Calibri" pitchFamily="34" charset="0"/>
+                <a:ea typeface="Calibri" pitchFamily="34" charset="-122"/>
+                <a:cs typeface="Calibri" pitchFamily="34" charset="-120"/>
+              </a:rPr>
+              <a:t>one</a:t>
+            </a:r>
+            <a:r>
+              <a:rPr lang="es-AR" sz="1100" dirty="0">
+                <a:solidFill>
+                  <a:srgbClr val="B0C4D8"/>
+                </a:solidFill>
+                <a:latin typeface="Calibri" pitchFamily="34" charset="0"/>
+                <a:ea typeface="Calibri" pitchFamily="34" charset="-122"/>
+                <a:cs typeface="Calibri" pitchFamily="34" charset="-120"/>
+              </a:rPr>
+              <a:t>-time.</a:t>
+            </a:r>
+          </a:p>
+          <a:p>
+            <a:pPr marL="0" indent="0">
+              <a:buNone/>
+            </a:pPr>
             <a:endParaRPr lang="en-US" sz="1100" dirty="0"/>
           </a:p>
         </p:txBody>
@@ -21919,6 +22832,17 @@
               <a:buNone/>
             </a:pPr>
             <a:r>
+              <a:rPr lang="en-US" sz="1000" dirty="0" err="1">
+                <a:solidFill>
+                  <a:srgbClr val="00E5A0"/>
+                </a:solidFill>
+                <a:latin typeface="Calibri" pitchFamily="34" charset="0"/>
+                <a:ea typeface="Calibri" pitchFamily="34" charset="-122"/>
+                <a:cs typeface="Calibri" pitchFamily="34" charset="-120"/>
+              </a:rPr>
+              <a:t>Refleja</a:t>
+            </a:r>
+            <a:r>
               <a:rPr lang="en-US" sz="1000" dirty="0">
                 <a:solidFill>
                   <a:srgbClr val="00E5A0"/>
@@ -21927,7 +22851,51 @@
                 <a:ea typeface="Calibri" pitchFamily="34" charset="-122"/>
                 <a:cs typeface="Calibri" pitchFamily="34" charset="-120"/>
               </a:rPr>
-              <a:t>1749× — veces mejor que recomendación aleatoria</a:t>
+              <a:t> </a:t>
+            </a:r>
+            <a:r>
+              <a:rPr lang="en-US" sz="1000" dirty="0" err="1">
+                <a:solidFill>
+                  <a:srgbClr val="00E5A0"/>
+                </a:solidFill>
+                <a:latin typeface="Calibri" pitchFamily="34" charset="0"/>
+                <a:ea typeface="Calibri" pitchFamily="34" charset="-122"/>
+                <a:cs typeface="Calibri" pitchFamily="34" charset="-120"/>
+              </a:rPr>
+              <a:t>cuánto</a:t>
+            </a:r>
+            <a:r>
+              <a:rPr lang="en-US" sz="1000" dirty="0">
+                <a:solidFill>
+                  <a:srgbClr val="00E5A0"/>
+                </a:solidFill>
+                <a:latin typeface="Calibri" pitchFamily="34" charset="0"/>
+                <a:ea typeface="Calibri" pitchFamily="34" charset="-122"/>
+                <a:cs typeface="Calibri" pitchFamily="34" charset="-120"/>
+              </a:rPr>
+              <a:t> es </a:t>
+            </a:r>
+            <a:r>
+              <a:rPr lang="en-US" sz="1000" dirty="0" err="1">
+                <a:solidFill>
+                  <a:srgbClr val="00E5A0"/>
+                </a:solidFill>
+                <a:latin typeface="Calibri" pitchFamily="34" charset="0"/>
+                <a:ea typeface="Calibri" pitchFamily="34" charset="-122"/>
+                <a:cs typeface="Calibri" pitchFamily="34" charset="-120"/>
+              </a:rPr>
+              <a:t>mejor</a:t>
+            </a:r>
+            <a:r>
+              <a:rPr lang="en-US" sz="1000" dirty="0">
+                <a:solidFill>
+                  <a:srgbClr val="00E5A0"/>
+                </a:solidFill>
+                <a:latin typeface="Calibri" pitchFamily="34" charset="0"/>
+                <a:ea typeface="Calibri" pitchFamily="34" charset="-122"/>
+                <a:cs typeface="Calibri" pitchFamily="34" charset="-120"/>
+              </a:rPr>
+              <a:t> que recomendación aleatoria</a:t>
             </a:r>
             <a:endParaRPr lang="en-US" sz="1000" dirty="0"/>
           </a:p>
@@ -22278,7 +23246,7 @@
                 <a:ea typeface="Calibri" pitchFamily="34" charset="-122"/>
                 <a:cs typeface="Calibri" pitchFamily="34" charset="-120"/>
               </a:rPr>
-              <a:t>Modelos Base — NB07 (8 modelos)</a:t>
+              <a:t>Modelos Base —(8 modelos)</a:t>
             </a:r>
             <a:endParaRPr lang="en-US" sz="2600" dirty="0"/>
           </a:p>
@@ -22897,6 +23865,13 @@
             <a:prstDash val="solid"/>
           </a:ln>
         </p:spPr>
+        <p:txBody>
+          <a:bodyPr/>
+          <a:lstStyle/>
+          <a:p>
+            <a:endParaRPr lang="es-AR" dirty="0"/>
+          </a:p>
+        </p:txBody>
       </p:sp>
       <p:sp>
         <p:nvSpPr>
@@ -24192,6 +25167,13 @@
             <a:prstDash val="solid"/>
           </a:ln>
         </p:spPr>
+        <p:txBody>
+          <a:bodyPr/>
+          <a:lstStyle/>
+          <a:p>
+            <a:endParaRPr lang="es-AR" dirty="0"/>
+          </a:p>
+        </p:txBody>
       </p:sp>
       <p:sp>
         <p:nvSpPr>
